--- a/azimut.pptx
+++ b/azimut.pptx
@@ -1923,7 +1923,7 @@
                 <a:ea typeface="Caveat Brush" pitchFamily="34" charset="-122"/>
                 <a:cs typeface="Caveat Brush" pitchFamily="34" charset="-120"/>
               </a:rPr>
-              <a:t>Nerv tizimi o'smalari</a:t>
+              <a:t>Nerv tizimining o'smalari:</a:t>
             </a:r>
             <a:endParaRPr lang="en-US" sz="1050" dirty="0"/>
           </a:p>
@@ -4437,7 +4437,7 @@
                 <a:ea typeface="Caveat Brush" pitchFamily="34" charset="-122"/>
                 <a:cs typeface="Caveat Brush" pitchFamily="34" charset="-120"/>
               </a:rPr>
-              <a:t>1. Nerv tizimi o'smalari haqida umumiy ma'lumot</a:t>
+              <a:t>1. Nerv tizimining o'smalari: Tushuncha va Turlari</a:t>
             </a:r>
             <a:endParaRPr lang="en-US" sz="1050" dirty="0"/>
           </a:p>
@@ -4596,7 +4596,7 @@
                 <a:ea typeface="Caveat Brush" pitchFamily="34" charset="-122"/>
                 <a:cs typeface="Caveat Brush" pitchFamily="34" charset="-120"/>
               </a:rPr>
-              <a:t>2. Nerv tizimi o'smalari turlari va belgilar</a:t>
+              <a:t>2. Nerv tizimi o'smalarining Belgilari va Diagnostika</a:t>
             </a:r>
             <a:endParaRPr lang="en-US" sz="1050" dirty="0"/>
           </a:p>
@@ -4755,7 +4755,7 @@
                 <a:ea typeface="Caveat Brush" pitchFamily="34" charset="-122"/>
                 <a:cs typeface="Caveat Brush" pitchFamily="34" charset="-120"/>
               </a:rPr>
-              <a:t>3. Nerv tizimi o'smalarini davolash usullari</a:t>
+              <a:t>3. Nerv tizimi o'smalarining Davolash Usullari</a:t>
             </a:r>
             <a:endParaRPr lang="en-US" sz="1050" dirty="0"/>
           </a:p>
@@ -5087,7 +5087,7 @@
       </p:grpSpPr>
       <p:pic>
         <p:nvPicPr>
-          <p:cNvPr id="2" name="Image 0" descr="./images\slide4_img51.png">    </p:cNvPr>
+          <p:cNvPr id="2" name="Image 0" descr="./images\slide5_img56.png">    </p:cNvPr>
           <p:cNvPicPr>
             <a:picLocks noChangeAspect="1"/>
           </p:cNvPicPr>
@@ -5109,9 +5109,3454 @@
           </a:prstGeom>
         </p:spPr>
       </p:pic>
+      <p:pic>
+        <p:nvPicPr>
+          <p:cNvPr id="3" name="Image 1" descr="https://cdn.storymd.com/optimized/pqD9QwIPAa/original.jpg">    </p:cNvPr>
+          <p:cNvPicPr>
+            <a:picLocks noChangeAspect="1"/>
+          </p:cNvPicPr>
+          <p:nvPr/>
+        </p:nvPicPr>
+        <p:blipFill>
+          <a:blip r:embed="rId2"/>
+          <a:stretch>
+            <a:fillRect/>
+          </a:stretch>
+        </p:blipFill>
+        <p:spPr>
+          <a:xfrm>
+            <a:off x="3385895" y="1452747"/>
+            <a:ext cx="2299344" cy="2299344"/>
+          </a:xfrm>
+          <a:prstGeom prst="rect">
+            <a:avLst/>
+          </a:prstGeom>
+        </p:spPr>
+      </p:pic>
+      <p:sp>
+        <p:nvSpPr>
+          <p:cNvPr id="4" name="Shape 0"/>
+          <p:cNvSpPr/>
+          <p:nvPr/>
+        </p:nvSpPr>
+        <p:spPr>
+          <a:xfrm>
+            <a:off x="3385895" y="1452747"/>
+            <a:ext cx="2299344" cy="2299344"/>
+          </a:xfrm>
+          <a:custGeom>
+            <a:avLst/>
+            <a:gdLst/>
+            <a:ahLst/>
+            <a:cxnLst/>
+            <a:rect l="l" t="t" r="r" b="b"/>
+            <a:pathLst>
+              <a:path w="2299344" h="2299344">
+                <a:moveTo>
+                  <a:pt x="0" y="0"/>
+                </a:moveTo>
+                <a:lnTo>
+                  <a:pt x="2299344" y="0"/>
+                </a:lnTo>
+                <a:lnTo>
+                  <a:pt x="2299344" y="2299344"/>
+                </a:lnTo>
+                <a:lnTo>
+                  <a:pt x="0" y="2299344"/>
+                </a:lnTo>
+                <a:close/>
+              </a:path>
+            </a:pathLst>
+          </a:custGeom>
+          <a:solidFill>
+            <a:srgbClr val="FFFFFF">
+              <a:alpha val="0"/>
+            </a:srgbClr>
+          </a:solidFill>
+          <a:ln/>
+        </p:spPr>
+      </p:sp>
+      <p:sp>
+        <p:nvSpPr>
+          <p:cNvPr id="5" name="Text 1"/>
+          <p:cNvSpPr/>
+          <p:nvPr/>
+        </p:nvSpPr>
+        <p:spPr>
+          <a:xfrm>
+            <a:off x="3385895" y="1452747"/>
+            <a:ext cx="2299344" cy="2299344"/>
+          </a:xfrm>
+          <a:prstGeom prst="rect">
+            <a:avLst/>
+          </a:prstGeom>
+          <a:noFill/>
+          <a:ln/>
+        </p:spPr>
+        <p:txBody>
+          <a:bodyPr wrap="square" rtlCol="0" anchor="t"/>
+          <a:lstStyle/>
+          <a:p>
+            <a:pPr indent="0" marL="0">
+              <a:spcBef>
+                <a:spcPts val="375"/>
+              </a:spcBef>
+              <a:buNone/>
+            </a:pPr>
+            <a:endParaRPr lang="en-US" sz="1050" dirty="0"/>
+          </a:p>
+        </p:txBody>
+      </p:sp>
+      <p:sp>
+        <p:nvSpPr>
+          <p:cNvPr id="6" name="Shape 2"/>
+          <p:cNvSpPr/>
+          <p:nvPr/>
+        </p:nvSpPr>
+        <p:spPr>
+          <a:xfrm>
+            <a:off x="3385895" y="1452747"/>
+            <a:ext cx="2299344" cy="2299344"/>
+          </a:xfrm>
+          <a:custGeom>
+            <a:avLst/>
+            <a:gdLst/>
+            <a:ahLst/>
+            <a:cxnLst/>
+            <a:rect l="l" t="t" r="r" b="b"/>
+            <a:pathLst>
+              <a:path w="2299344" h="2299344">
+                <a:moveTo>
+                  <a:pt x="0" y="0"/>
+                </a:moveTo>
+                <a:lnTo>
+                  <a:pt x="2299344" y="0"/>
+                </a:lnTo>
+                <a:lnTo>
+                  <a:pt x="2299344" y="2299344"/>
+                </a:lnTo>
+                <a:lnTo>
+                  <a:pt x="0" y="2299344"/>
+                </a:lnTo>
+                <a:close/>
+              </a:path>
+            </a:pathLst>
+          </a:custGeom>
+          <a:solidFill>
+            <a:srgbClr val="000000">
+              <a:alpha val="0"/>
+            </a:srgbClr>
+          </a:solidFill>
+          <a:ln/>
+        </p:spPr>
+      </p:sp>
+      <p:sp>
+        <p:nvSpPr>
+          <p:cNvPr id="7" name="Text 3"/>
+          <p:cNvSpPr/>
+          <p:nvPr/>
+        </p:nvSpPr>
+        <p:spPr>
+          <a:xfrm>
+            <a:off x="3385895" y="1452747"/>
+            <a:ext cx="2299344" cy="2299344"/>
+          </a:xfrm>
+          <a:prstGeom prst="rect">
+            <a:avLst/>
+          </a:prstGeom>
+          <a:noFill/>
+          <a:ln/>
+        </p:spPr>
+        <p:txBody>
+          <a:bodyPr wrap="square" rtlCol="0" anchor="t"/>
+          <a:lstStyle/>
+          <a:p>
+            <a:pPr algn="l" indent="0" marL="0">
+              <a:spcBef>
+                <a:spcPts val="375"/>
+              </a:spcBef>
+              <a:buNone/>
+            </a:pPr>
+            <a:r>
+              <a:rPr lang="en-US" sz="1800" dirty="0">
+                <a:solidFill>
+                  <a:srgbClr val="000000"/>
+                </a:solidFill>
+                <a:latin typeface="Calibri" pitchFamily="34" charset="0"/>
+                <a:ea typeface="Calibri" pitchFamily="34" charset="-122"/>
+                <a:cs typeface="Calibri" pitchFamily="34" charset="-120"/>
+              </a:rPr>
+              <a:t> </a:t>
+            </a:r>
+            <a:endParaRPr lang="en-US" sz="1050" dirty="0"/>
+          </a:p>
+        </p:txBody>
+      </p:sp>
+      <p:pic>
+        <p:nvPicPr>
+          <p:cNvPr id="8" name="Image 2" descr="./images\slide5_img58.png">    </p:cNvPr>
+          <p:cNvPicPr>
+            <a:picLocks noChangeAspect="1"/>
+          </p:cNvPicPr>
+          <p:nvPr/>
+        </p:nvPicPr>
+        <p:blipFill>
+          <a:blip r:embed="rId3"/>
+          <a:stretch>
+            <a:fillRect/>
+          </a:stretch>
+        </p:blipFill>
+        <p:spPr>
+          <a:xfrm>
+            <a:off x="3385895" y="1452747"/>
+            <a:ext cx="2299344" cy="2299344"/>
+          </a:xfrm>
+          <a:prstGeom prst="rect">
+            <a:avLst/>
+          </a:prstGeom>
+        </p:spPr>
+      </p:pic>
+      <p:pic>
+        <p:nvPicPr>
+          <p:cNvPr id="9" name="Image 3" descr="./images\slide5_img59.png">    </p:cNvPr>
+          <p:cNvPicPr>
+            <a:picLocks noChangeAspect="1"/>
+          </p:cNvPicPr>
+          <p:nvPr/>
+        </p:nvPicPr>
+        <p:blipFill>
+          <a:blip r:embed="rId4"/>
+          <a:stretch>
+            <a:fillRect/>
+          </a:stretch>
+        </p:blipFill>
+        <p:spPr>
+          <a:xfrm>
+            <a:off x="6193097" y="1452747"/>
+            <a:ext cx="2299344" cy="2299344"/>
+          </a:xfrm>
+          <a:prstGeom prst="rect">
+            <a:avLst/>
+          </a:prstGeom>
+        </p:spPr>
+      </p:pic>
+      <p:sp>
+        <p:nvSpPr>
+          <p:cNvPr id="10" name="Shape 4"/>
+          <p:cNvSpPr/>
+          <p:nvPr/>
+        </p:nvSpPr>
+        <p:spPr>
+          <a:xfrm>
+            <a:off x="6193097" y="1452747"/>
+            <a:ext cx="2299344" cy="2299344"/>
+          </a:xfrm>
+          <a:custGeom>
+            <a:avLst/>
+            <a:gdLst/>
+            <a:ahLst/>
+            <a:cxnLst/>
+            <a:rect l="l" t="t" r="r" b="b"/>
+            <a:pathLst>
+              <a:path w="2299344" h="2299344">
+                <a:moveTo>
+                  <a:pt x="0" y="0"/>
+                </a:moveTo>
+                <a:lnTo>
+                  <a:pt x="2299344" y="0"/>
+                </a:lnTo>
+                <a:lnTo>
+                  <a:pt x="2299344" y="2299344"/>
+                </a:lnTo>
+                <a:lnTo>
+                  <a:pt x="0" y="2299344"/>
+                </a:lnTo>
+                <a:close/>
+              </a:path>
+            </a:pathLst>
+          </a:custGeom>
+          <a:solidFill>
+            <a:srgbClr val="FFFFFF">
+              <a:alpha val="0"/>
+            </a:srgbClr>
+          </a:solidFill>
+          <a:ln/>
+        </p:spPr>
+      </p:sp>
+      <p:sp>
+        <p:nvSpPr>
+          <p:cNvPr id="11" name="Text 5"/>
+          <p:cNvSpPr/>
+          <p:nvPr/>
+        </p:nvSpPr>
+        <p:spPr>
+          <a:xfrm>
+            <a:off x="6193097" y="1452747"/>
+            <a:ext cx="2299344" cy="2299344"/>
+          </a:xfrm>
+          <a:prstGeom prst="rect">
+            <a:avLst/>
+          </a:prstGeom>
+          <a:noFill/>
+          <a:ln/>
+        </p:spPr>
+        <p:txBody>
+          <a:bodyPr wrap="square" rtlCol="0" anchor="t"/>
+          <a:lstStyle/>
+          <a:p>
+            <a:pPr indent="0" marL="0">
+              <a:spcBef>
+                <a:spcPts val="375"/>
+              </a:spcBef>
+              <a:buNone/>
+            </a:pPr>
+            <a:endParaRPr lang="en-US" sz="1050" dirty="0"/>
+          </a:p>
+        </p:txBody>
+      </p:sp>
+      <p:sp>
+        <p:nvSpPr>
+          <p:cNvPr id="12" name="Shape 6"/>
+          <p:cNvSpPr/>
+          <p:nvPr/>
+        </p:nvSpPr>
+        <p:spPr>
+          <a:xfrm>
+            <a:off x="6193097" y="1452747"/>
+            <a:ext cx="2299344" cy="2299344"/>
+          </a:xfrm>
+          <a:custGeom>
+            <a:avLst/>
+            <a:gdLst/>
+            <a:ahLst/>
+            <a:cxnLst/>
+            <a:rect l="l" t="t" r="r" b="b"/>
+            <a:pathLst>
+              <a:path w="2299344" h="2299344">
+                <a:moveTo>
+                  <a:pt x="0" y="0"/>
+                </a:moveTo>
+                <a:lnTo>
+                  <a:pt x="2299344" y="0"/>
+                </a:lnTo>
+                <a:lnTo>
+                  <a:pt x="2299344" y="2299344"/>
+                </a:lnTo>
+                <a:lnTo>
+                  <a:pt x="0" y="2299344"/>
+                </a:lnTo>
+                <a:close/>
+              </a:path>
+            </a:pathLst>
+          </a:custGeom>
+          <a:solidFill>
+            <a:srgbClr val="000000">
+              <a:alpha val="0"/>
+            </a:srgbClr>
+          </a:solidFill>
+          <a:ln/>
+        </p:spPr>
+      </p:sp>
+      <p:sp>
+        <p:nvSpPr>
+          <p:cNvPr id="13" name="Text 7"/>
+          <p:cNvSpPr/>
+          <p:nvPr/>
+        </p:nvSpPr>
+        <p:spPr>
+          <a:xfrm>
+            <a:off x="6193097" y="1452747"/>
+            <a:ext cx="2299344" cy="2299344"/>
+          </a:xfrm>
+          <a:prstGeom prst="rect">
+            <a:avLst/>
+          </a:prstGeom>
+          <a:noFill/>
+          <a:ln/>
+        </p:spPr>
+        <p:txBody>
+          <a:bodyPr wrap="square" rtlCol="0" anchor="t"/>
+          <a:lstStyle/>
+          <a:p>
+            <a:pPr algn="l" indent="0" marL="0">
+              <a:spcBef>
+                <a:spcPts val="375"/>
+              </a:spcBef>
+              <a:buNone/>
+            </a:pPr>
+            <a:r>
+              <a:rPr lang="en-US" sz="1800" dirty="0">
+                <a:solidFill>
+                  <a:srgbClr val="000000"/>
+                </a:solidFill>
+                <a:latin typeface="Calibri" pitchFamily="34" charset="0"/>
+                <a:ea typeface="Calibri" pitchFamily="34" charset="-122"/>
+                <a:cs typeface="Calibri" pitchFamily="34" charset="-120"/>
+              </a:rPr>
+              <a:t> </a:t>
+            </a:r>
+            <a:endParaRPr lang="en-US" sz="1050" dirty="0"/>
+          </a:p>
+        </p:txBody>
+      </p:sp>
+      <p:pic>
+        <p:nvPicPr>
+          <p:cNvPr id="14" name="Image 4" descr="./images\slide5_img60.png">    </p:cNvPr>
+          <p:cNvPicPr>
+            <a:picLocks noChangeAspect="1"/>
+          </p:cNvPicPr>
+          <p:nvPr/>
+        </p:nvPicPr>
+        <p:blipFill>
+          <a:blip r:embed="rId5"/>
+          <a:stretch>
+            <a:fillRect/>
+          </a:stretch>
+        </p:blipFill>
+        <p:spPr>
+          <a:xfrm>
+            <a:off x="6193097" y="1452747"/>
+            <a:ext cx="2299344" cy="2299344"/>
+          </a:xfrm>
+          <a:prstGeom prst="rect">
+            <a:avLst/>
+          </a:prstGeom>
+        </p:spPr>
+      </p:pic>
+      <p:pic>
+        <p:nvPicPr>
+          <p:cNvPr id="15" name="Image 5" descr="./images\slide5_img61.png">    </p:cNvPr>
+          <p:cNvPicPr>
+            <a:picLocks noChangeAspect="1"/>
+          </p:cNvPicPr>
+          <p:nvPr/>
+        </p:nvPicPr>
+        <p:blipFill>
+          <a:blip r:embed="rId6"/>
+          <a:stretch>
+            <a:fillRect/>
+          </a:stretch>
+        </p:blipFill>
+        <p:spPr>
+          <a:xfrm>
+            <a:off x="651178" y="1452747"/>
+            <a:ext cx="2299344" cy="2299344"/>
+          </a:xfrm>
+          <a:prstGeom prst="rect">
+            <a:avLst/>
+          </a:prstGeom>
+        </p:spPr>
+      </p:pic>
+      <p:sp>
+        <p:nvSpPr>
+          <p:cNvPr id="16" name="Shape 8"/>
+          <p:cNvSpPr/>
+          <p:nvPr/>
+        </p:nvSpPr>
+        <p:spPr>
+          <a:xfrm>
+            <a:off x="651178" y="1452747"/>
+            <a:ext cx="2299344" cy="2299344"/>
+          </a:xfrm>
+          <a:custGeom>
+            <a:avLst/>
+            <a:gdLst/>
+            <a:ahLst/>
+            <a:cxnLst/>
+            <a:rect l="l" t="t" r="r" b="b"/>
+            <a:pathLst>
+              <a:path w="2299344" h="2299344">
+                <a:moveTo>
+                  <a:pt x="0" y="0"/>
+                </a:moveTo>
+                <a:lnTo>
+                  <a:pt x="2299344" y="0"/>
+                </a:lnTo>
+                <a:lnTo>
+                  <a:pt x="2299344" y="2299344"/>
+                </a:lnTo>
+                <a:lnTo>
+                  <a:pt x="0" y="2299344"/>
+                </a:lnTo>
+                <a:close/>
+              </a:path>
+            </a:pathLst>
+          </a:custGeom>
+          <a:solidFill>
+            <a:srgbClr val="FFFFFF">
+              <a:alpha val="0"/>
+            </a:srgbClr>
+          </a:solidFill>
+          <a:ln/>
+        </p:spPr>
+      </p:sp>
+      <p:sp>
+        <p:nvSpPr>
+          <p:cNvPr id="17" name="Text 9"/>
+          <p:cNvSpPr/>
+          <p:nvPr/>
+        </p:nvSpPr>
+        <p:spPr>
+          <a:xfrm>
+            <a:off x="651178" y="1452747"/>
+            <a:ext cx="2299344" cy="2299344"/>
+          </a:xfrm>
+          <a:prstGeom prst="rect">
+            <a:avLst/>
+          </a:prstGeom>
+          <a:noFill/>
+          <a:ln/>
+        </p:spPr>
+        <p:txBody>
+          <a:bodyPr wrap="square" rtlCol="0" anchor="t"/>
+          <a:lstStyle/>
+          <a:p>
+            <a:pPr indent="0" marL="0">
+              <a:spcBef>
+                <a:spcPts val="375"/>
+              </a:spcBef>
+              <a:buNone/>
+            </a:pPr>
+            <a:endParaRPr lang="en-US" sz="1050" dirty="0"/>
+          </a:p>
+        </p:txBody>
+      </p:sp>
+      <p:sp>
+        <p:nvSpPr>
+          <p:cNvPr id="18" name="Shape 10"/>
+          <p:cNvSpPr/>
+          <p:nvPr/>
+        </p:nvSpPr>
+        <p:spPr>
+          <a:xfrm>
+            <a:off x="651178" y="1452747"/>
+            <a:ext cx="2299344" cy="2299344"/>
+          </a:xfrm>
+          <a:custGeom>
+            <a:avLst/>
+            <a:gdLst/>
+            <a:ahLst/>
+            <a:cxnLst/>
+            <a:rect l="l" t="t" r="r" b="b"/>
+            <a:pathLst>
+              <a:path w="2299344" h="2299344">
+                <a:moveTo>
+                  <a:pt x="0" y="0"/>
+                </a:moveTo>
+                <a:lnTo>
+                  <a:pt x="2299344" y="0"/>
+                </a:lnTo>
+                <a:lnTo>
+                  <a:pt x="2299344" y="2299344"/>
+                </a:lnTo>
+                <a:lnTo>
+                  <a:pt x="0" y="2299344"/>
+                </a:lnTo>
+                <a:close/>
+              </a:path>
+            </a:pathLst>
+          </a:custGeom>
+          <a:solidFill>
+            <a:srgbClr val="000000">
+              <a:alpha val="0"/>
+            </a:srgbClr>
+          </a:solidFill>
+          <a:ln/>
+        </p:spPr>
+      </p:sp>
+      <p:sp>
+        <p:nvSpPr>
+          <p:cNvPr id="19" name="Text 11"/>
+          <p:cNvSpPr/>
+          <p:nvPr/>
+        </p:nvSpPr>
+        <p:spPr>
+          <a:xfrm>
+            <a:off x="651178" y="1452747"/>
+            <a:ext cx="2299344" cy="2299344"/>
+          </a:xfrm>
+          <a:prstGeom prst="rect">
+            <a:avLst/>
+          </a:prstGeom>
+          <a:noFill/>
+          <a:ln/>
+        </p:spPr>
+        <p:txBody>
+          <a:bodyPr wrap="square" rtlCol="0" anchor="t"/>
+          <a:lstStyle/>
+          <a:p>
+            <a:pPr algn="l" indent="0" marL="0">
+              <a:spcBef>
+                <a:spcPts val="375"/>
+              </a:spcBef>
+              <a:buNone/>
+            </a:pPr>
+            <a:r>
+              <a:rPr lang="en-US" sz="1800" dirty="0">
+                <a:solidFill>
+                  <a:srgbClr val="000000"/>
+                </a:solidFill>
+                <a:latin typeface="Calibri" pitchFamily="34" charset="0"/>
+                <a:ea typeface="Calibri" pitchFamily="34" charset="-122"/>
+                <a:cs typeface="Calibri" pitchFamily="34" charset="-120"/>
+              </a:rPr>
+              <a:t> </a:t>
+            </a:r>
+            <a:endParaRPr lang="en-US" sz="1050" dirty="0"/>
+          </a:p>
+        </p:txBody>
+      </p:sp>
+      <p:pic>
+        <p:nvPicPr>
+          <p:cNvPr id="20" name="Image 6" descr="./images\slide5_img62.png">    </p:cNvPr>
+          <p:cNvPicPr>
+            <a:picLocks noChangeAspect="1"/>
+          </p:cNvPicPr>
+          <p:nvPr/>
+        </p:nvPicPr>
+        <p:blipFill>
+          <a:blip r:embed="rId7"/>
+          <a:stretch>
+            <a:fillRect/>
+          </a:stretch>
+        </p:blipFill>
+        <p:spPr>
+          <a:xfrm>
+            <a:off x="651178" y="1452747"/>
+            <a:ext cx="2299344" cy="2299344"/>
+          </a:xfrm>
+          <a:prstGeom prst="rect">
+            <a:avLst/>
+          </a:prstGeom>
+        </p:spPr>
+      </p:pic>
+      <p:pic>
+        <p:nvPicPr>
+          <p:cNvPr id="21" name="Image 7" descr="./images\slide5_img63.png">    </p:cNvPr>
+          <p:cNvPicPr>
+            <a:picLocks noChangeAspect="1"/>
+          </p:cNvPicPr>
+          <p:nvPr/>
+        </p:nvPicPr>
+        <p:blipFill>
+          <a:blip r:embed="rId8"/>
+          <a:stretch>
+            <a:fillRect/>
+          </a:stretch>
+        </p:blipFill>
+        <p:spPr>
+          <a:xfrm>
+            <a:off x="551228" y="1377789"/>
+            <a:ext cx="2499245" cy="2449260"/>
+          </a:xfrm>
+          <a:prstGeom prst="rect">
+            <a:avLst/>
+          </a:prstGeom>
+        </p:spPr>
+      </p:pic>
+      <p:sp>
+        <p:nvSpPr>
+          <p:cNvPr id="22" name="Shape 12"/>
+          <p:cNvSpPr/>
+          <p:nvPr/>
+        </p:nvSpPr>
+        <p:spPr>
+          <a:xfrm>
+            <a:off x="551228" y="1377789"/>
+            <a:ext cx="2499245" cy="2449260"/>
+          </a:xfrm>
+          <a:custGeom>
+            <a:avLst/>
+            <a:gdLst/>
+            <a:ahLst/>
+            <a:cxnLst/>
+            <a:rect l="l" t="t" r="r" b="b"/>
+            <a:pathLst>
+              <a:path w="2499245" h="2449260">
+                <a:moveTo>
+                  <a:pt x="0" y="0"/>
+                </a:moveTo>
+                <a:lnTo>
+                  <a:pt x="2499245" y="0"/>
+                </a:lnTo>
+                <a:lnTo>
+                  <a:pt x="2499245" y="2449260"/>
+                </a:lnTo>
+                <a:lnTo>
+                  <a:pt x="0" y="2449260"/>
+                </a:lnTo>
+                <a:close/>
+              </a:path>
+            </a:pathLst>
+          </a:custGeom>
+          <a:solidFill>
+            <a:srgbClr val="FFFFFF">
+              <a:alpha val="0"/>
+            </a:srgbClr>
+          </a:solidFill>
+          <a:ln/>
+        </p:spPr>
+      </p:sp>
+      <p:sp>
+        <p:nvSpPr>
+          <p:cNvPr id="23" name="Text 13"/>
+          <p:cNvSpPr/>
+          <p:nvPr/>
+        </p:nvSpPr>
+        <p:spPr>
+          <a:xfrm>
+            <a:off x="551228" y="1377789"/>
+            <a:ext cx="2499245" cy="2449260"/>
+          </a:xfrm>
+          <a:prstGeom prst="rect">
+            <a:avLst/>
+          </a:prstGeom>
+          <a:noFill/>
+          <a:ln/>
+        </p:spPr>
+        <p:txBody>
+          <a:bodyPr wrap="square" rtlCol="0" anchor="t"/>
+          <a:lstStyle/>
+          <a:p>
+            <a:pPr indent="0" marL="0">
+              <a:spcBef>
+                <a:spcPts val="375"/>
+              </a:spcBef>
+              <a:buNone/>
+            </a:pPr>
+            <a:endParaRPr lang="en-US" sz="1050" dirty="0"/>
+          </a:p>
+        </p:txBody>
+      </p:sp>
+      <p:sp>
+        <p:nvSpPr>
+          <p:cNvPr id="24" name="Shape 14"/>
+          <p:cNvSpPr/>
+          <p:nvPr/>
+        </p:nvSpPr>
+        <p:spPr>
+          <a:xfrm>
+            <a:off x="551228" y="1377789"/>
+            <a:ext cx="2499245" cy="2449260"/>
+          </a:xfrm>
+          <a:custGeom>
+            <a:avLst/>
+            <a:gdLst/>
+            <a:ahLst/>
+            <a:cxnLst/>
+            <a:rect l="l" t="t" r="r" b="b"/>
+            <a:pathLst>
+              <a:path w="2499245" h="2449260">
+                <a:moveTo>
+                  <a:pt x="0" y="0"/>
+                </a:moveTo>
+                <a:lnTo>
+                  <a:pt x="2499245" y="0"/>
+                </a:lnTo>
+                <a:lnTo>
+                  <a:pt x="2499245" y="2449260"/>
+                </a:lnTo>
+                <a:lnTo>
+                  <a:pt x="0" y="2449260"/>
+                </a:lnTo>
+                <a:close/>
+              </a:path>
+            </a:pathLst>
+          </a:custGeom>
+          <a:solidFill>
+            <a:srgbClr val="000000">
+              <a:alpha val="0"/>
+            </a:srgbClr>
+          </a:solidFill>
+          <a:ln/>
+        </p:spPr>
+      </p:sp>
+      <p:sp>
+        <p:nvSpPr>
+          <p:cNvPr id="25" name="Text 15"/>
+          <p:cNvSpPr/>
+          <p:nvPr/>
+        </p:nvSpPr>
+        <p:spPr>
+          <a:xfrm>
+            <a:off x="551228" y="1377789"/>
+            <a:ext cx="2499245" cy="2449260"/>
+          </a:xfrm>
+          <a:prstGeom prst="rect">
+            <a:avLst/>
+          </a:prstGeom>
+          <a:noFill/>
+          <a:ln/>
+        </p:spPr>
+        <p:txBody>
+          <a:bodyPr wrap="square" rtlCol="0" anchor="t"/>
+          <a:lstStyle/>
+          <a:p>
+            <a:pPr algn="l" indent="0" marL="0">
+              <a:spcBef>
+                <a:spcPts val="375"/>
+              </a:spcBef>
+              <a:buNone/>
+            </a:pPr>
+            <a:r>
+              <a:rPr lang="en-US" sz="1800" dirty="0">
+                <a:solidFill>
+                  <a:srgbClr val="000000"/>
+                </a:solidFill>
+                <a:latin typeface="Calibri" pitchFamily="34" charset="0"/>
+                <a:ea typeface="Calibri" pitchFamily="34" charset="-122"/>
+                <a:cs typeface="Calibri" pitchFamily="34" charset="-120"/>
+              </a:rPr>
+              <a:t> </a:t>
+            </a:r>
+            <a:endParaRPr lang="en-US" sz="1050" dirty="0"/>
+          </a:p>
+        </p:txBody>
+      </p:sp>
+      <p:pic>
+        <p:nvPicPr>
+          <p:cNvPr id="26" name="Image 8" descr="./images\slide5_img64.png">    </p:cNvPr>
+          <p:cNvPicPr>
+            <a:picLocks noChangeAspect="1"/>
+          </p:cNvPicPr>
+          <p:nvPr/>
+        </p:nvPicPr>
+        <p:blipFill>
+          <a:blip r:embed="rId9"/>
+          <a:stretch>
+            <a:fillRect/>
+          </a:stretch>
+        </p:blipFill>
+        <p:spPr>
+          <a:xfrm>
+            <a:off x="551228" y="1377789"/>
+            <a:ext cx="2499245" cy="2449260"/>
+          </a:xfrm>
+          <a:prstGeom prst="rect">
+            <a:avLst/>
+          </a:prstGeom>
+        </p:spPr>
+      </p:pic>
+      <p:pic>
+        <p:nvPicPr>
+          <p:cNvPr id="27" name="Image 9" descr="./images\slide5_img65.png">    </p:cNvPr>
+          <p:cNvPicPr>
+            <a:picLocks noChangeAspect="1"/>
+          </p:cNvPicPr>
+          <p:nvPr/>
+        </p:nvPicPr>
+        <p:blipFill>
+          <a:blip r:embed="rId10"/>
+          <a:stretch>
+            <a:fillRect/>
+          </a:stretch>
+        </p:blipFill>
+        <p:spPr>
+          <a:xfrm>
+            <a:off x="3322378" y="1377789"/>
+            <a:ext cx="2499245" cy="2449260"/>
+          </a:xfrm>
+          <a:prstGeom prst="rect">
+            <a:avLst/>
+          </a:prstGeom>
+        </p:spPr>
+      </p:pic>
+      <p:sp>
+        <p:nvSpPr>
+          <p:cNvPr id="28" name="Shape 16"/>
+          <p:cNvSpPr/>
+          <p:nvPr/>
+        </p:nvSpPr>
+        <p:spPr>
+          <a:xfrm>
+            <a:off x="3322378" y="1377789"/>
+            <a:ext cx="2499245" cy="2449260"/>
+          </a:xfrm>
+          <a:custGeom>
+            <a:avLst/>
+            <a:gdLst/>
+            <a:ahLst/>
+            <a:cxnLst/>
+            <a:rect l="l" t="t" r="r" b="b"/>
+            <a:pathLst>
+              <a:path w="2499245" h="2449260">
+                <a:moveTo>
+                  <a:pt x="0" y="0"/>
+                </a:moveTo>
+                <a:lnTo>
+                  <a:pt x="2499245" y="0"/>
+                </a:lnTo>
+                <a:lnTo>
+                  <a:pt x="2499245" y="2449260"/>
+                </a:lnTo>
+                <a:lnTo>
+                  <a:pt x="0" y="2449260"/>
+                </a:lnTo>
+                <a:close/>
+              </a:path>
+            </a:pathLst>
+          </a:custGeom>
+          <a:solidFill>
+            <a:srgbClr val="FFFFFF">
+              <a:alpha val="0"/>
+            </a:srgbClr>
+          </a:solidFill>
+          <a:ln/>
+        </p:spPr>
+      </p:sp>
+      <p:sp>
+        <p:nvSpPr>
+          <p:cNvPr id="29" name="Text 17"/>
+          <p:cNvSpPr/>
+          <p:nvPr/>
+        </p:nvSpPr>
+        <p:spPr>
+          <a:xfrm>
+            <a:off x="3322378" y="1377789"/>
+            <a:ext cx="2499245" cy="2449260"/>
+          </a:xfrm>
+          <a:prstGeom prst="rect">
+            <a:avLst/>
+          </a:prstGeom>
+          <a:noFill/>
+          <a:ln/>
+        </p:spPr>
+        <p:txBody>
+          <a:bodyPr wrap="square" rtlCol="0" anchor="t"/>
+          <a:lstStyle/>
+          <a:p>
+            <a:pPr indent="0" marL="0">
+              <a:spcBef>
+                <a:spcPts val="375"/>
+              </a:spcBef>
+              <a:buNone/>
+            </a:pPr>
+            <a:endParaRPr lang="en-US" sz="1050" dirty="0"/>
+          </a:p>
+        </p:txBody>
+      </p:sp>
+      <p:sp>
+        <p:nvSpPr>
+          <p:cNvPr id="30" name="Shape 18"/>
+          <p:cNvSpPr/>
+          <p:nvPr/>
+        </p:nvSpPr>
+        <p:spPr>
+          <a:xfrm>
+            <a:off x="3322378" y="1377789"/>
+            <a:ext cx="2499245" cy="2449260"/>
+          </a:xfrm>
+          <a:custGeom>
+            <a:avLst/>
+            <a:gdLst/>
+            <a:ahLst/>
+            <a:cxnLst/>
+            <a:rect l="l" t="t" r="r" b="b"/>
+            <a:pathLst>
+              <a:path w="2499245" h="2449260">
+                <a:moveTo>
+                  <a:pt x="0" y="0"/>
+                </a:moveTo>
+                <a:lnTo>
+                  <a:pt x="2499245" y="0"/>
+                </a:lnTo>
+                <a:lnTo>
+                  <a:pt x="2499245" y="2449260"/>
+                </a:lnTo>
+                <a:lnTo>
+                  <a:pt x="0" y="2449260"/>
+                </a:lnTo>
+                <a:close/>
+              </a:path>
+            </a:pathLst>
+          </a:custGeom>
+          <a:solidFill>
+            <a:srgbClr val="000000">
+              <a:alpha val="0"/>
+            </a:srgbClr>
+          </a:solidFill>
+          <a:ln/>
+        </p:spPr>
+      </p:sp>
+      <p:sp>
+        <p:nvSpPr>
+          <p:cNvPr id="31" name="Text 19"/>
+          <p:cNvSpPr/>
+          <p:nvPr/>
+        </p:nvSpPr>
+        <p:spPr>
+          <a:xfrm>
+            <a:off x="3322378" y="1377789"/>
+            <a:ext cx="2499245" cy="2449260"/>
+          </a:xfrm>
+          <a:prstGeom prst="rect">
+            <a:avLst/>
+          </a:prstGeom>
+          <a:noFill/>
+          <a:ln/>
+        </p:spPr>
+        <p:txBody>
+          <a:bodyPr wrap="square" rtlCol="0" anchor="t"/>
+          <a:lstStyle/>
+          <a:p>
+            <a:pPr algn="l" indent="0" marL="0">
+              <a:spcBef>
+                <a:spcPts val="375"/>
+              </a:spcBef>
+              <a:buNone/>
+            </a:pPr>
+            <a:r>
+              <a:rPr lang="en-US" sz="1800" dirty="0">
+                <a:solidFill>
+                  <a:srgbClr val="000000"/>
+                </a:solidFill>
+                <a:latin typeface="Calibri" pitchFamily="34" charset="0"/>
+                <a:ea typeface="Calibri" pitchFamily="34" charset="-122"/>
+                <a:cs typeface="Calibri" pitchFamily="34" charset="-120"/>
+              </a:rPr>
+              <a:t> </a:t>
+            </a:r>
+            <a:endParaRPr lang="en-US" sz="1050" dirty="0"/>
+          </a:p>
+        </p:txBody>
+      </p:sp>
+      <p:pic>
+        <p:nvPicPr>
+          <p:cNvPr id="32" name="Image 10" descr="./images\slide5_img66.png">    </p:cNvPr>
+          <p:cNvPicPr>
+            <a:picLocks noChangeAspect="1"/>
+          </p:cNvPicPr>
+          <p:nvPr/>
+        </p:nvPicPr>
+        <p:blipFill>
+          <a:blip r:embed="rId11"/>
+          <a:stretch>
+            <a:fillRect/>
+          </a:stretch>
+        </p:blipFill>
+        <p:spPr>
+          <a:xfrm>
+            <a:off x="3322378" y="1377789"/>
+            <a:ext cx="2499245" cy="2449260"/>
+          </a:xfrm>
+          <a:prstGeom prst="rect">
+            <a:avLst/>
+          </a:prstGeom>
+        </p:spPr>
+      </p:pic>
+      <p:pic>
+        <p:nvPicPr>
+          <p:cNvPr id="33" name="Image 11" descr="./images\slide5_img67.png">    </p:cNvPr>
+          <p:cNvPicPr>
+            <a:picLocks noChangeAspect="1"/>
+          </p:cNvPicPr>
+          <p:nvPr/>
+        </p:nvPicPr>
+        <p:blipFill>
+          <a:blip r:embed="rId12"/>
+          <a:stretch>
+            <a:fillRect/>
+          </a:stretch>
+        </p:blipFill>
+        <p:spPr>
+          <a:xfrm>
+            <a:off x="6093528" y="1377789"/>
+            <a:ext cx="2499245" cy="2449260"/>
+          </a:xfrm>
+          <a:prstGeom prst="rect">
+            <a:avLst/>
+          </a:prstGeom>
+        </p:spPr>
+      </p:pic>
+      <p:sp>
+        <p:nvSpPr>
+          <p:cNvPr id="34" name="Shape 20"/>
+          <p:cNvSpPr/>
+          <p:nvPr/>
+        </p:nvSpPr>
+        <p:spPr>
+          <a:xfrm>
+            <a:off x="6093528" y="1377789"/>
+            <a:ext cx="2499245" cy="2449260"/>
+          </a:xfrm>
+          <a:custGeom>
+            <a:avLst/>
+            <a:gdLst/>
+            <a:ahLst/>
+            <a:cxnLst/>
+            <a:rect l="l" t="t" r="r" b="b"/>
+            <a:pathLst>
+              <a:path w="2499245" h="2449260">
+                <a:moveTo>
+                  <a:pt x="0" y="0"/>
+                </a:moveTo>
+                <a:lnTo>
+                  <a:pt x="2499245" y="0"/>
+                </a:lnTo>
+                <a:lnTo>
+                  <a:pt x="2499245" y="2449260"/>
+                </a:lnTo>
+                <a:lnTo>
+                  <a:pt x="0" y="2449260"/>
+                </a:lnTo>
+                <a:close/>
+              </a:path>
+            </a:pathLst>
+          </a:custGeom>
+          <a:solidFill>
+            <a:srgbClr val="FFFFFF">
+              <a:alpha val="0"/>
+            </a:srgbClr>
+          </a:solidFill>
+          <a:ln/>
+        </p:spPr>
+      </p:sp>
+      <p:sp>
+        <p:nvSpPr>
+          <p:cNvPr id="35" name="Text 21"/>
+          <p:cNvSpPr/>
+          <p:nvPr/>
+        </p:nvSpPr>
+        <p:spPr>
+          <a:xfrm>
+            <a:off x="6093528" y="1377789"/>
+            <a:ext cx="2499245" cy="2449260"/>
+          </a:xfrm>
+          <a:prstGeom prst="rect">
+            <a:avLst/>
+          </a:prstGeom>
+          <a:noFill/>
+          <a:ln/>
+        </p:spPr>
+        <p:txBody>
+          <a:bodyPr wrap="square" rtlCol="0" anchor="t"/>
+          <a:lstStyle/>
+          <a:p>
+            <a:pPr indent="0" marL="0">
+              <a:spcBef>
+                <a:spcPts val="375"/>
+              </a:spcBef>
+              <a:buNone/>
+            </a:pPr>
+            <a:endParaRPr lang="en-US" sz="1050" dirty="0"/>
+          </a:p>
+        </p:txBody>
+      </p:sp>
+      <p:sp>
+        <p:nvSpPr>
+          <p:cNvPr id="36" name="Shape 22"/>
+          <p:cNvSpPr/>
+          <p:nvPr/>
+        </p:nvSpPr>
+        <p:spPr>
+          <a:xfrm>
+            <a:off x="6093528" y="1377789"/>
+            <a:ext cx="2499245" cy="2449260"/>
+          </a:xfrm>
+          <a:custGeom>
+            <a:avLst/>
+            <a:gdLst/>
+            <a:ahLst/>
+            <a:cxnLst/>
+            <a:rect l="l" t="t" r="r" b="b"/>
+            <a:pathLst>
+              <a:path w="2499245" h="2449260">
+                <a:moveTo>
+                  <a:pt x="0" y="0"/>
+                </a:moveTo>
+                <a:lnTo>
+                  <a:pt x="2499245" y="0"/>
+                </a:lnTo>
+                <a:lnTo>
+                  <a:pt x="2499245" y="2449260"/>
+                </a:lnTo>
+                <a:lnTo>
+                  <a:pt x="0" y="2449260"/>
+                </a:lnTo>
+                <a:close/>
+              </a:path>
+            </a:pathLst>
+          </a:custGeom>
+          <a:solidFill>
+            <a:srgbClr val="000000">
+              <a:alpha val="0"/>
+            </a:srgbClr>
+          </a:solidFill>
+          <a:ln/>
+        </p:spPr>
+      </p:sp>
+      <p:sp>
+        <p:nvSpPr>
+          <p:cNvPr id="37" name="Text 23"/>
+          <p:cNvSpPr/>
+          <p:nvPr/>
+        </p:nvSpPr>
+        <p:spPr>
+          <a:xfrm>
+            <a:off x="6093528" y="1377789"/>
+            <a:ext cx="2499245" cy="2449260"/>
+          </a:xfrm>
+          <a:prstGeom prst="rect">
+            <a:avLst/>
+          </a:prstGeom>
+          <a:noFill/>
+          <a:ln/>
+        </p:spPr>
+        <p:txBody>
+          <a:bodyPr wrap="square" rtlCol="0" anchor="t"/>
+          <a:lstStyle/>
+          <a:p>
+            <a:pPr algn="l" indent="0" marL="0">
+              <a:spcBef>
+                <a:spcPts val="375"/>
+              </a:spcBef>
+              <a:buNone/>
+            </a:pPr>
+            <a:r>
+              <a:rPr lang="en-US" sz="1800" dirty="0">
+                <a:solidFill>
+                  <a:srgbClr val="000000"/>
+                </a:solidFill>
+                <a:latin typeface="Calibri" pitchFamily="34" charset="0"/>
+                <a:ea typeface="Calibri" pitchFamily="34" charset="-122"/>
+                <a:cs typeface="Calibri" pitchFamily="34" charset="-120"/>
+              </a:rPr>
+              <a:t> </a:t>
+            </a:r>
+            <a:endParaRPr lang="en-US" sz="1050" dirty="0"/>
+          </a:p>
+        </p:txBody>
+      </p:sp>
+      <p:pic>
+        <p:nvPicPr>
+          <p:cNvPr id="38" name="Image 12" descr="./images\slide5_img68.png">    </p:cNvPr>
+          <p:cNvPicPr>
+            <a:picLocks noChangeAspect="1"/>
+          </p:cNvPicPr>
+          <p:nvPr/>
+        </p:nvPicPr>
+        <p:blipFill>
+          <a:blip r:embed="rId13"/>
+          <a:stretch>
+            <a:fillRect/>
+          </a:stretch>
+        </p:blipFill>
+        <p:spPr>
+          <a:xfrm>
+            <a:off x="6093528" y="1377789"/>
+            <a:ext cx="2499245" cy="2449260"/>
+          </a:xfrm>
+          <a:prstGeom prst="rect">
+            <a:avLst/>
+          </a:prstGeom>
+        </p:spPr>
+      </p:pic>
+      <p:sp>
+        <p:nvSpPr>
+          <p:cNvPr id="39" name="Shape 24"/>
+          <p:cNvSpPr/>
+          <p:nvPr/>
+        </p:nvSpPr>
+        <p:spPr>
+          <a:xfrm>
+            <a:off x="874042" y="197820"/>
+            <a:ext cx="7395900" cy="552450"/>
+          </a:xfrm>
+          <a:custGeom>
+            <a:avLst/>
+            <a:gdLst/>
+            <a:ahLst/>
+            <a:cxnLst/>
+            <a:rect l="l" t="t" r="r" b="b"/>
+            <a:pathLst>
+              <a:path w="7395900" h="552450">
+                <a:moveTo>
+                  <a:pt x="0" y="0"/>
+                </a:moveTo>
+                <a:lnTo>
+                  <a:pt x="7395900" y="0"/>
+                </a:lnTo>
+                <a:lnTo>
+                  <a:pt x="7395900" y="552450"/>
+                </a:lnTo>
+                <a:lnTo>
+                  <a:pt x="0" y="552450"/>
+                </a:lnTo>
+                <a:close/>
+              </a:path>
+            </a:pathLst>
+          </a:custGeom>
+          <a:solidFill>
+            <a:srgbClr val="FFFFFF">
+              <a:alpha val="0"/>
+            </a:srgbClr>
+          </a:solidFill>
+          <a:ln/>
+        </p:spPr>
+      </p:sp>
+      <p:sp>
+        <p:nvSpPr>
+          <p:cNvPr id="40" name="Text 25"/>
+          <p:cNvSpPr/>
+          <p:nvPr/>
+        </p:nvSpPr>
+        <p:spPr>
+          <a:xfrm>
+            <a:off x="874042" y="197820"/>
+            <a:ext cx="7395900" cy="552450"/>
+          </a:xfrm>
+          <a:prstGeom prst="rect">
+            <a:avLst/>
+          </a:prstGeom>
+          <a:noFill/>
+          <a:ln/>
+        </p:spPr>
+        <p:txBody>
+          <a:bodyPr wrap="square" rtlCol="0" anchor="t"/>
+          <a:lstStyle/>
+          <a:p>
+            <a:pPr indent="0" marL="0">
+              <a:spcBef>
+                <a:spcPts val="375"/>
+              </a:spcBef>
+              <a:buNone/>
+            </a:pPr>
+            <a:endParaRPr lang="en-US" sz="1050" dirty="0"/>
+          </a:p>
+        </p:txBody>
+      </p:sp>
+      <p:sp>
+        <p:nvSpPr>
+          <p:cNvPr id="41" name="Shape 26"/>
+          <p:cNvSpPr/>
+          <p:nvPr/>
+        </p:nvSpPr>
+        <p:spPr>
+          <a:xfrm>
+            <a:off x="874042" y="197820"/>
+            <a:ext cx="7395900" cy="552450"/>
+          </a:xfrm>
+          <a:custGeom>
+            <a:avLst/>
+            <a:gdLst/>
+            <a:ahLst/>
+            <a:cxnLst/>
+            <a:rect l="l" t="t" r="r" b="b"/>
+            <a:pathLst>
+              <a:path w="7395900" h="552450">
+                <a:moveTo>
+                  <a:pt x="0" y="0"/>
+                </a:moveTo>
+                <a:lnTo>
+                  <a:pt x="7395900" y="0"/>
+                </a:lnTo>
+                <a:lnTo>
+                  <a:pt x="7395900" y="552450"/>
+                </a:lnTo>
+                <a:lnTo>
+                  <a:pt x="0" y="552450"/>
+                </a:lnTo>
+                <a:close/>
+              </a:path>
+            </a:pathLst>
+          </a:custGeom>
+          <a:solidFill>
+            <a:srgbClr val="000000">
+              <a:alpha val="0"/>
+            </a:srgbClr>
+          </a:solidFill>
+          <a:ln/>
+        </p:spPr>
+      </p:sp>
+      <p:sp>
+        <p:nvSpPr>
+          <p:cNvPr id="42" name="Text 27"/>
+          <p:cNvSpPr/>
+          <p:nvPr/>
+        </p:nvSpPr>
+        <p:spPr>
+          <a:xfrm>
+            <a:off x="874042" y="197820"/>
+            <a:ext cx="7395900" cy="552450"/>
+          </a:xfrm>
+          <a:prstGeom prst="rect">
+            <a:avLst/>
+          </a:prstGeom>
+          <a:noFill/>
+          <a:ln/>
+        </p:spPr>
+        <p:txBody>
+          <a:bodyPr wrap="square" rtlCol="0" anchor="t"/>
+          <a:lstStyle/>
+          <a:p>
+            <a:pPr algn="ctr" indent="0" marL="0">
+              <a:spcBef>
+                <a:spcPts val="375"/>
+              </a:spcBef>
+              <a:buNone/>
+            </a:pPr>
+            <a:r>
+              <a:rPr lang="en-US" sz="3000" dirty="0">
+                <a:solidFill>
+                  <a:srgbClr val="45464D"/>
+                </a:solidFill>
+                <a:latin typeface="Caveat Brush" pitchFamily="34" charset="0"/>
+                <a:ea typeface="Caveat Brush" pitchFamily="34" charset="-122"/>
+                <a:cs typeface="Caveat Brush" pitchFamily="34" charset="-120"/>
+              </a:rPr>
+              <a:t>Tumor Turlari va Belgilari</a:t>
+            </a:r>
+            <a:endParaRPr lang="en-US" sz="1050" dirty="0"/>
+          </a:p>
+        </p:txBody>
+      </p:sp>
+      <p:sp>
+        <p:nvSpPr>
+          <p:cNvPr id="43" name="Shape 28"/>
+          <p:cNvSpPr/>
+          <p:nvPr/>
+        </p:nvSpPr>
+        <p:spPr>
+          <a:xfrm>
+            <a:off x="651178" y="1478873"/>
+            <a:ext cx="2269341" cy="603796"/>
+          </a:xfrm>
+          <a:custGeom>
+            <a:avLst/>
+            <a:gdLst/>
+            <a:ahLst/>
+            <a:cxnLst/>
+            <a:rect l="l" t="t" r="r" b="b"/>
+            <a:pathLst>
+              <a:path w="2269341" h="603796">
+                <a:moveTo>
+                  <a:pt x="0" y="0"/>
+                </a:moveTo>
+                <a:lnTo>
+                  <a:pt x="2269341" y="0"/>
+                </a:lnTo>
+                <a:lnTo>
+                  <a:pt x="2269341" y="603796"/>
+                </a:lnTo>
+                <a:lnTo>
+                  <a:pt x="0" y="603796"/>
+                </a:lnTo>
+                <a:close/>
+              </a:path>
+            </a:pathLst>
+          </a:custGeom>
+          <a:solidFill>
+            <a:srgbClr val="FFFFFF">
+              <a:alpha val="0"/>
+            </a:srgbClr>
+          </a:solidFill>
+          <a:ln/>
+        </p:spPr>
+      </p:sp>
+      <p:sp>
+        <p:nvSpPr>
+          <p:cNvPr id="44" name="Text 29"/>
+          <p:cNvSpPr/>
+          <p:nvPr/>
+        </p:nvSpPr>
+        <p:spPr>
+          <a:xfrm>
+            <a:off x="651178" y="1478873"/>
+            <a:ext cx="2269341" cy="603796"/>
+          </a:xfrm>
+          <a:prstGeom prst="rect">
+            <a:avLst/>
+          </a:prstGeom>
+          <a:noFill/>
+          <a:ln/>
+        </p:spPr>
+        <p:txBody>
+          <a:bodyPr wrap="square" rtlCol="0" anchor="t"/>
+          <a:lstStyle/>
+          <a:p>
+            <a:pPr indent="0" marL="0">
+              <a:spcBef>
+                <a:spcPts val="375"/>
+              </a:spcBef>
+              <a:buNone/>
+            </a:pPr>
+            <a:endParaRPr lang="en-US" sz="1050" dirty="0"/>
+          </a:p>
+        </p:txBody>
+      </p:sp>
+      <p:sp>
+        <p:nvSpPr>
+          <p:cNvPr id="45" name="Shape 30"/>
+          <p:cNvSpPr/>
+          <p:nvPr/>
+        </p:nvSpPr>
+        <p:spPr>
+          <a:xfrm>
+            <a:off x="651178" y="1478873"/>
+            <a:ext cx="2269341" cy="603796"/>
+          </a:xfrm>
+          <a:custGeom>
+            <a:avLst/>
+            <a:gdLst/>
+            <a:ahLst/>
+            <a:cxnLst/>
+            <a:rect l="l" t="t" r="r" b="b"/>
+            <a:pathLst>
+              <a:path w="2269341" h="603796">
+                <a:moveTo>
+                  <a:pt x="0" y="0"/>
+                </a:moveTo>
+                <a:lnTo>
+                  <a:pt x="2269341" y="0"/>
+                </a:lnTo>
+                <a:lnTo>
+                  <a:pt x="2269341" y="603796"/>
+                </a:lnTo>
+                <a:lnTo>
+                  <a:pt x="0" y="603796"/>
+                </a:lnTo>
+                <a:close/>
+              </a:path>
+            </a:pathLst>
+          </a:custGeom>
+          <a:solidFill>
+            <a:srgbClr val="000000">
+              <a:alpha val="0"/>
+            </a:srgbClr>
+          </a:solidFill>
+          <a:ln/>
+        </p:spPr>
+      </p:sp>
+      <p:sp>
+        <p:nvSpPr>
+          <p:cNvPr id="46" name="Text 31"/>
+          <p:cNvSpPr/>
+          <p:nvPr/>
+        </p:nvSpPr>
+        <p:spPr>
+          <a:xfrm>
+            <a:off x="651178" y="1478873"/>
+            <a:ext cx="2269341" cy="603796"/>
+          </a:xfrm>
+          <a:prstGeom prst="rect">
+            <a:avLst/>
+          </a:prstGeom>
+          <a:noFill/>
+          <a:ln/>
+        </p:spPr>
+        <p:txBody>
+          <a:bodyPr wrap="square" rtlCol="0" anchor="t"/>
+          <a:lstStyle/>
+          <a:p>
+            <a:pPr algn="l" indent="0" marL="0">
+              <a:spcBef>
+                <a:spcPts val="375"/>
+              </a:spcBef>
+              <a:buNone/>
+            </a:pPr>
+            <a:r>
+              <a:rPr lang="en-US" sz="975" dirty="0">
+                <a:solidFill>
+                  <a:srgbClr val="000000"/>
+                </a:solidFill>
+                <a:latin typeface="Nunito" pitchFamily="34" charset="0"/>
+                <a:ea typeface="Nunito" pitchFamily="34" charset="-122"/>
+                <a:cs typeface="Nunito" pitchFamily="34" charset="-120"/>
+              </a:rPr>
+              <a:t>Tumorlar organizmda to'qimalarning o'sishi natijasida paydo bo'ladi. Ular yaxshi yoki yomon bo'lishi mumkin.</a:t>
+            </a:r>
+            <a:endParaRPr lang="en-US" sz="1050" dirty="0"/>
+          </a:p>
+        </p:txBody>
+      </p:sp>
+      <p:sp>
+        <p:nvSpPr>
+          <p:cNvPr id="47" name="Shape 32"/>
+          <p:cNvSpPr/>
+          <p:nvPr/>
+        </p:nvSpPr>
+        <p:spPr>
+          <a:xfrm>
+            <a:off x="3385895" y="1537943"/>
+            <a:ext cx="2216616" cy="603796"/>
+          </a:xfrm>
+          <a:custGeom>
+            <a:avLst/>
+            <a:gdLst/>
+            <a:ahLst/>
+            <a:cxnLst/>
+            <a:rect l="l" t="t" r="r" b="b"/>
+            <a:pathLst>
+              <a:path w="2216616" h="603796">
+                <a:moveTo>
+                  <a:pt x="0" y="0"/>
+                </a:moveTo>
+                <a:lnTo>
+                  <a:pt x="2216616" y="0"/>
+                </a:lnTo>
+                <a:lnTo>
+                  <a:pt x="2216616" y="603796"/>
+                </a:lnTo>
+                <a:lnTo>
+                  <a:pt x="0" y="603796"/>
+                </a:lnTo>
+                <a:close/>
+              </a:path>
+            </a:pathLst>
+          </a:custGeom>
+          <a:solidFill>
+            <a:srgbClr val="FFFFFF">
+              <a:alpha val="0"/>
+            </a:srgbClr>
+          </a:solidFill>
+          <a:ln/>
+        </p:spPr>
+      </p:sp>
+      <p:sp>
+        <p:nvSpPr>
+          <p:cNvPr id="48" name="Text 33"/>
+          <p:cNvSpPr/>
+          <p:nvPr/>
+        </p:nvSpPr>
+        <p:spPr>
+          <a:xfrm>
+            <a:off x="3385895" y="1537943"/>
+            <a:ext cx="2216616" cy="603796"/>
+          </a:xfrm>
+          <a:prstGeom prst="rect">
+            <a:avLst/>
+          </a:prstGeom>
+          <a:noFill/>
+          <a:ln/>
+        </p:spPr>
+        <p:txBody>
+          <a:bodyPr wrap="square" rtlCol="0" anchor="t"/>
+          <a:lstStyle/>
+          <a:p>
+            <a:pPr indent="0" marL="0">
+              <a:spcBef>
+                <a:spcPts val="375"/>
+              </a:spcBef>
+              <a:buNone/>
+            </a:pPr>
+            <a:endParaRPr lang="en-US" sz="1050" dirty="0"/>
+          </a:p>
+        </p:txBody>
+      </p:sp>
+      <p:sp>
+        <p:nvSpPr>
+          <p:cNvPr id="49" name="Shape 34"/>
+          <p:cNvSpPr/>
+          <p:nvPr/>
+        </p:nvSpPr>
+        <p:spPr>
+          <a:xfrm>
+            <a:off x="3385895" y="1537943"/>
+            <a:ext cx="2216616" cy="603796"/>
+          </a:xfrm>
+          <a:custGeom>
+            <a:avLst/>
+            <a:gdLst/>
+            <a:ahLst/>
+            <a:cxnLst/>
+            <a:rect l="l" t="t" r="r" b="b"/>
+            <a:pathLst>
+              <a:path w="2216616" h="603796">
+                <a:moveTo>
+                  <a:pt x="0" y="0"/>
+                </a:moveTo>
+                <a:lnTo>
+                  <a:pt x="2216616" y="0"/>
+                </a:lnTo>
+                <a:lnTo>
+                  <a:pt x="2216616" y="603796"/>
+                </a:lnTo>
+                <a:lnTo>
+                  <a:pt x="0" y="603796"/>
+                </a:lnTo>
+                <a:close/>
+              </a:path>
+            </a:pathLst>
+          </a:custGeom>
+          <a:solidFill>
+            <a:srgbClr val="000000">
+              <a:alpha val="0"/>
+            </a:srgbClr>
+          </a:solidFill>
+          <a:ln/>
+        </p:spPr>
+      </p:sp>
+      <p:sp>
+        <p:nvSpPr>
+          <p:cNvPr id="50" name="Text 35"/>
+          <p:cNvSpPr/>
+          <p:nvPr/>
+        </p:nvSpPr>
+        <p:spPr>
+          <a:xfrm>
+            <a:off x="3385895" y="1537943"/>
+            <a:ext cx="2216616" cy="603796"/>
+          </a:xfrm>
+          <a:prstGeom prst="rect">
+            <a:avLst/>
+          </a:prstGeom>
+          <a:noFill/>
+          <a:ln/>
+        </p:spPr>
+        <p:txBody>
+          <a:bodyPr wrap="square" rtlCol="0" anchor="t"/>
+          <a:lstStyle/>
+          <a:p>
+            <a:pPr algn="l" indent="0" marL="0">
+              <a:spcBef>
+                <a:spcPts val="375"/>
+              </a:spcBef>
+              <a:buNone/>
+            </a:pPr>
+            <a:r>
+              <a:rPr lang="en-US" sz="975" dirty="0">
+                <a:solidFill>
+                  <a:srgbClr val="000000"/>
+                </a:solidFill>
+                <a:latin typeface="Nunito" pitchFamily="34" charset="0"/>
+                <a:ea typeface="Nunito" pitchFamily="34" charset="-122"/>
+                <a:cs typeface="Nunito" pitchFamily="34" charset="-120"/>
+              </a:rPr>
+              <a:t>Yomon o'simliklar tez sur'atlarda o'sadi va atrofdagi to'qimalarga zarar etkazadi. Belgilari orasida og'riq, shish va qon ketish bor.</a:t>
+            </a:r>
+            <a:endParaRPr lang="en-US" sz="1050" dirty="0"/>
+          </a:p>
+        </p:txBody>
+      </p:sp>
+      <p:sp>
+        <p:nvSpPr>
+          <p:cNvPr id="51" name="Shape 36"/>
+          <p:cNvSpPr/>
+          <p:nvPr/>
+        </p:nvSpPr>
+        <p:spPr>
+          <a:xfrm>
+            <a:off x="6234269" y="1597013"/>
+            <a:ext cx="2228813" cy="603796"/>
+          </a:xfrm>
+          <a:custGeom>
+            <a:avLst/>
+            <a:gdLst/>
+            <a:ahLst/>
+            <a:cxnLst/>
+            <a:rect l="l" t="t" r="r" b="b"/>
+            <a:pathLst>
+              <a:path w="2228813" h="603796">
+                <a:moveTo>
+                  <a:pt x="0" y="0"/>
+                </a:moveTo>
+                <a:lnTo>
+                  <a:pt x="2228813" y="0"/>
+                </a:lnTo>
+                <a:lnTo>
+                  <a:pt x="2228813" y="603796"/>
+                </a:lnTo>
+                <a:lnTo>
+                  <a:pt x="0" y="603796"/>
+                </a:lnTo>
+                <a:close/>
+              </a:path>
+            </a:pathLst>
+          </a:custGeom>
+          <a:solidFill>
+            <a:srgbClr val="FFFFFF">
+              <a:alpha val="0"/>
+            </a:srgbClr>
+          </a:solidFill>
+          <a:ln/>
+        </p:spPr>
+      </p:sp>
+      <p:sp>
+        <p:nvSpPr>
+          <p:cNvPr id="52" name="Text 37"/>
+          <p:cNvSpPr/>
+          <p:nvPr/>
+        </p:nvSpPr>
+        <p:spPr>
+          <a:xfrm>
+            <a:off x="6234269" y="1597013"/>
+            <a:ext cx="2228813" cy="603796"/>
+          </a:xfrm>
+          <a:prstGeom prst="rect">
+            <a:avLst/>
+          </a:prstGeom>
+          <a:noFill/>
+          <a:ln/>
+        </p:spPr>
+        <p:txBody>
+          <a:bodyPr wrap="square" rtlCol="0" anchor="t"/>
+          <a:lstStyle/>
+          <a:p>
+            <a:pPr indent="0" marL="0">
+              <a:spcBef>
+                <a:spcPts val="375"/>
+              </a:spcBef>
+              <a:buNone/>
+            </a:pPr>
+            <a:endParaRPr lang="en-US" sz="1050" dirty="0"/>
+          </a:p>
+        </p:txBody>
+      </p:sp>
+      <p:sp>
+        <p:nvSpPr>
+          <p:cNvPr id="53" name="Shape 38"/>
+          <p:cNvSpPr/>
+          <p:nvPr/>
+        </p:nvSpPr>
+        <p:spPr>
+          <a:xfrm>
+            <a:off x="6234269" y="1597013"/>
+            <a:ext cx="2228813" cy="603796"/>
+          </a:xfrm>
+          <a:custGeom>
+            <a:avLst/>
+            <a:gdLst/>
+            <a:ahLst/>
+            <a:cxnLst/>
+            <a:rect l="l" t="t" r="r" b="b"/>
+            <a:pathLst>
+              <a:path w="2228813" h="603796">
+                <a:moveTo>
+                  <a:pt x="0" y="0"/>
+                </a:moveTo>
+                <a:lnTo>
+                  <a:pt x="2228813" y="0"/>
+                </a:lnTo>
+                <a:lnTo>
+                  <a:pt x="2228813" y="603796"/>
+                </a:lnTo>
+                <a:lnTo>
+                  <a:pt x="0" y="603796"/>
+                </a:lnTo>
+                <a:close/>
+              </a:path>
+            </a:pathLst>
+          </a:custGeom>
+          <a:solidFill>
+            <a:srgbClr val="000000">
+              <a:alpha val="0"/>
+            </a:srgbClr>
+          </a:solidFill>
+          <a:ln/>
+        </p:spPr>
+      </p:sp>
+      <p:sp>
+        <p:nvSpPr>
+          <p:cNvPr id="54" name="Text 39"/>
+          <p:cNvSpPr/>
+          <p:nvPr/>
+        </p:nvSpPr>
+        <p:spPr>
+          <a:xfrm>
+            <a:off x="6234269" y="1597013"/>
+            <a:ext cx="2228813" cy="603796"/>
+          </a:xfrm>
+          <a:prstGeom prst="rect">
+            <a:avLst/>
+          </a:prstGeom>
+          <a:noFill/>
+          <a:ln/>
+        </p:spPr>
+        <p:txBody>
+          <a:bodyPr wrap="square" rtlCol="0" anchor="t"/>
+          <a:lstStyle/>
+          <a:p>
+            <a:pPr algn="ctr" indent="0" marL="0">
+              <a:spcBef>
+                <a:spcPts val="375"/>
+              </a:spcBef>
+              <a:buNone/>
+            </a:pPr>
+            <a:r>
+              <a:rPr lang="en-US" sz="975" dirty="0">
+                <a:solidFill>
+                  <a:srgbClr val="000000"/>
+                </a:solidFill>
+                <a:latin typeface="Nunito" pitchFamily="34" charset="0"/>
+                <a:ea typeface="Nunito" pitchFamily="34" charset="-122"/>
+                <a:cs typeface="Nunito" pitchFamily="34" charset="-120"/>
+              </a:rPr>
+              <a:t>Yaxshi o'simliklar esa sekin o'sadi va ko'pincha asoratlar keltirib chiqarmaydi. Ularning belgilari kamroq sezilarli bo'lishi mumkin.</a:t>
+            </a:r>
+            <a:endParaRPr lang="en-US" sz="1050" dirty="0"/>
+          </a:p>
+        </p:txBody>
+      </p:sp>
+    </p:spTree>
+  </p:cSld>
+  <p:clrMapOvr>
+    <a:masterClrMapping/>
+  </p:clrMapOvr>
+</p:sld>
+</file>
+
+<file path=ppt/slides/slide4.xml><?xml version="1.0" encoding="utf-8"?>
+<p:sld xmlns:a="http://schemas.openxmlformats.org/drawingml/2006/main" xmlns:r="http://schemas.openxmlformats.org/officeDocument/2006/relationships" xmlns:p="http://schemas.openxmlformats.org/presentationml/2006/main">
+  <p:cSld name="Slide 4">
+    <p:bg>
+      <p:bgPr>
+        <a:solidFill>
+          <a:srgbClr val="F1F1F1"/>
+        </a:solidFill>
+      </p:bgPr>
+    </p:bg>
+    <p:spTree>
+      <p:nvGrpSpPr>
+        <p:cNvPr id="1" name=""/>
+        <p:cNvGrpSpPr/>
+        <p:nvPr/>
+      </p:nvGrpSpPr>
+      <p:grpSpPr>
+        <a:xfrm>
+          <a:off x="0" y="0"/>
+          <a:ext cx="0" cy="0"/>
+          <a:chOff x="0" y="0"/>
+          <a:chExt cx="0" cy="0"/>
+        </a:xfrm>
+      </p:grpSpPr>
+      <p:pic>
+        <p:nvPicPr>
+          <p:cNvPr id="2" name="Image 0" descr="./images\slide6_img69.png">    </p:cNvPr>
+          <p:cNvPicPr>
+            <a:picLocks noChangeAspect="1"/>
+          </p:cNvPicPr>
+          <p:nvPr/>
+        </p:nvPicPr>
+        <p:blipFill>
+          <a:blip r:embed="rId1"/>
+          <a:stretch>
+            <a:fillRect/>
+          </a:stretch>
+        </p:blipFill>
+        <p:spPr>
+          <a:xfrm>
+            <a:off x="0" y="0"/>
+            <a:ext cx="9144000" cy="5143500"/>
+          </a:xfrm>
+          <a:prstGeom prst="rect">
+            <a:avLst/>
+          </a:prstGeom>
+        </p:spPr>
+      </p:pic>
+      <p:pic>
+        <p:nvPicPr>
+          <p:cNvPr id="3" name="Image 1" descr="https://img.freepik.com/premium-vector/vector-isolated-illustration-benign-tumor-tissue-medical-diagram-poster-educational-science-medical-use-biological-icon-logo_206049-1637.jpg?w=2000">    </p:cNvPr>
+          <p:cNvPicPr>
+            <a:picLocks noChangeAspect="1"/>
+          </p:cNvPicPr>
+          <p:nvPr/>
+        </p:nvPicPr>
+        <p:blipFill>
+          <a:blip r:embed="rId2"/>
+          <a:stretch>
+            <a:fillRect/>
+          </a:stretch>
+        </p:blipFill>
+        <p:spPr>
+          <a:xfrm>
+            <a:off x="3116890" y="1094737"/>
+            <a:ext cx="2910220" cy="3713738"/>
+          </a:xfrm>
+          <a:prstGeom prst="rect">
+            <a:avLst/>
+          </a:prstGeom>
+        </p:spPr>
+      </p:pic>
+      <p:sp>
+        <p:nvSpPr>
+          <p:cNvPr id="4" name="Shape 0"/>
+          <p:cNvSpPr/>
+          <p:nvPr/>
+        </p:nvSpPr>
+        <p:spPr>
+          <a:xfrm>
+            <a:off x="1401482" y="161274"/>
+            <a:ext cx="6341100" cy="476250"/>
+          </a:xfrm>
+          <a:custGeom>
+            <a:avLst/>
+            <a:gdLst/>
+            <a:ahLst/>
+            <a:cxnLst/>
+            <a:rect l="l" t="t" r="r" b="b"/>
+            <a:pathLst>
+              <a:path w="6341100" h="476250">
+                <a:moveTo>
+                  <a:pt x="0" y="0"/>
+                </a:moveTo>
+                <a:lnTo>
+                  <a:pt x="6341100" y="0"/>
+                </a:lnTo>
+                <a:lnTo>
+                  <a:pt x="6341100" y="476250"/>
+                </a:lnTo>
+                <a:lnTo>
+                  <a:pt x="0" y="476250"/>
+                </a:lnTo>
+                <a:close/>
+              </a:path>
+            </a:pathLst>
+          </a:custGeom>
+          <a:solidFill>
+            <a:srgbClr val="FFFFFF">
+              <a:alpha val="0"/>
+            </a:srgbClr>
+          </a:solidFill>
+          <a:ln/>
+        </p:spPr>
+      </p:sp>
+      <p:sp>
+        <p:nvSpPr>
+          <p:cNvPr id="5" name="Text 1"/>
+          <p:cNvSpPr/>
+          <p:nvPr/>
+        </p:nvSpPr>
+        <p:spPr>
+          <a:xfrm>
+            <a:off x="1401482" y="161274"/>
+            <a:ext cx="6341100" cy="476250"/>
+          </a:xfrm>
+          <a:prstGeom prst="rect">
+            <a:avLst/>
+          </a:prstGeom>
+          <a:noFill/>
+          <a:ln/>
+        </p:spPr>
+        <p:txBody>
+          <a:bodyPr wrap="square" rtlCol="0" anchor="t"/>
+          <a:lstStyle/>
+          <a:p>
+            <a:pPr indent="0" marL="0">
+              <a:spcBef>
+                <a:spcPts val="375"/>
+              </a:spcBef>
+              <a:buNone/>
+            </a:pPr>
+            <a:endParaRPr lang="en-US" sz="1050" dirty="0"/>
+          </a:p>
+        </p:txBody>
+      </p:sp>
+      <p:sp>
+        <p:nvSpPr>
+          <p:cNvPr id="6" name="Shape 2"/>
+          <p:cNvSpPr/>
+          <p:nvPr/>
+        </p:nvSpPr>
+        <p:spPr>
+          <a:xfrm>
+            <a:off x="1401482" y="161274"/>
+            <a:ext cx="6341100" cy="476250"/>
+          </a:xfrm>
+          <a:custGeom>
+            <a:avLst/>
+            <a:gdLst/>
+            <a:ahLst/>
+            <a:cxnLst/>
+            <a:rect l="l" t="t" r="r" b="b"/>
+            <a:pathLst>
+              <a:path w="6341100" h="476250">
+                <a:moveTo>
+                  <a:pt x="0" y="0"/>
+                </a:moveTo>
+                <a:lnTo>
+                  <a:pt x="6341100" y="0"/>
+                </a:lnTo>
+                <a:lnTo>
+                  <a:pt x="6341100" y="476250"/>
+                </a:lnTo>
+                <a:lnTo>
+                  <a:pt x="0" y="476250"/>
+                </a:lnTo>
+                <a:close/>
+              </a:path>
+            </a:pathLst>
+          </a:custGeom>
+          <a:solidFill>
+            <a:srgbClr val="000000">
+              <a:alpha val="0"/>
+            </a:srgbClr>
+          </a:solidFill>
+          <a:ln/>
+        </p:spPr>
+      </p:sp>
+      <p:sp>
+        <p:nvSpPr>
+          <p:cNvPr id="7" name="Text 3"/>
+          <p:cNvSpPr/>
+          <p:nvPr/>
+        </p:nvSpPr>
+        <p:spPr>
+          <a:xfrm>
+            <a:off x="1401482" y="161274"/>
+            <a:ext cx="6341100" cy="476250"/>
+          </a:xfrm>
+          <a:prstGeom prst="rect">
+            <a:avLst/>
+          </a:prstGeom>
+          <a:noFill/>
+          <a:ln/>
+        </p:spPr>
+        <p:txBody>
+          <a:bodyPr wrap="square" rtlCol="0" anchor="t"/>
+          <a:lstStyle/>
+          <a:p>
+            <a:pPr algn="ctr" indent="0" marL="0">
+              <a:spcBef>
+                <a:spcPts val="375"/>
+              </a:spcBef>
+              <a:buNone/>
+            </a:pPr>
+            <a:r>
+              <a:rPr lang="en-US" sz="3000" dirty="0">
+                <a:solidFill>
+                  <a:srgbClr val="45464D"/>
+                </a:solidFill>
+                <a:latin typeface="Caveat Brush" pitchFamily="34" charset="0"/>
+                <a:ea typeface="Caveat Brush" pitchFamily="34" charset="-122"/>
+                <a:cs typeface="Caveat Brush" pitchFamily="34" charset="-120"/>
+              </a:rPr>
+              <a:t>Tumor Tasnifi Tushuntirish</a:t>
+            </a:r>
+            <a:endParaRPr lang="en-US" sz="1050" dirty="0"/>
+          </a:p>
+        </p:txBody>
+      </p:sp>
+      <p:sp>
+        <p:nvSpPr>
+          <p:cNvPr id="8" name="Shape 4"/>
+          <p:cNvSpPr/>
+          <p:nvPr/>
+        </p:nvSpPr>
+        <p:spPr>
+          <a:xfrm>
+            <a:off x="6517040" y="2139780"/>
+            <a:ext cx="2026650" cy="349523"/>
+          </a:xfrm>
+          <a:custGeom>
+            <a:avLst/>
+            <a:gdLst/>
+            <a:ahLst/>
+            <a:cxnLst/>
+            <a:rect l="l" t="t" r="r" b="b"/>
+            <a:pathLst>
+              <a:path w="2026650" h="349523">
+                <a:moveTo>
+                  <a:pt x="0" y="0"/>
+                </a:moveTo>
+                <a:lnTo>
+                  <a:pt x="2026650" y="0"/>
+                </a:lnTo>
+                <a:lnTo>
+                  <a:pt x="2026650" y="349523"/>
+                </a:lnTo>
+                <a:lnTo>
+                  <a:pt x="0" y="349523"/>
+                </a:lnTo>
+                <a:close/>
+              </a:path>
+            </a:pathLst>
+          </a:custGeom>
+          <a:solidFill>
+            <a:srgbClr val="FFFFFF">
+              <a:alpha val="0"/>
+            </a:srgbClr>
+          </a:solidFill>
+          <a:ln/>
+        </p:spPr>
+      </p:sp>
+      <p:sp>
+        <p:nvSpPr>
+          <p:cNvPr id="9" name="Text 5"/>
+          <p:cNvSpPr/>
+          <p:nvPr/>
+        </p:nvSpPr>
+        <p:spPr>
+          <a:xfrm>
+            <a:off x="6517040" y="2139780"/>
+            <a:ext cx="2026650" cy="349523"/>
+          </a:xfrm>
+          <a:prstGeom prst="rect">
+            <a:avLst/>
+          </a:prstGeom>
+          <a:noFill/>
+          <a:ln/>
+        </p:spPr>
+        <p:txBody>
+          <a:bodyPr wrap="square" rtlCol="0" anchor="t"/>
+          <a:lstStyle/>
+          <a:p>
+            <a:pPr indent="0" marL="0">
+              <a:spcBef>
+                <a:spcPts val="375"/>
+              </a:spcBef>
+              <a:buNone/>
+            </a:pPr>
+            <a:endParaRPr lang="en-US" sz="1050" dirty="0"/>
+          </a:p>
+        </p:txBody>
+      </p:sp>
+      <p:sp>
+        <p:nvSpPr>
+          <p:cNvPr id="10" name="Shape 6"/>
+          <p:cNvSpPr/>
+          <p:nvPr/>
+        </p:nvSpPr>
+        <p:spPr>
+          <a:xfrm>
+            <a:off x="6517040" y="2139780"/>
+            <a:ext cx="2026650" cy="349523"/>
+          </a:xfrm>
+          <a:custGeom>
+            <a:avLst/>
+            <a:gdLst/>
+            <a:ahLst/>
+            <a:cxnLst/>
+            <a:rect l="l" t="t" r="r" b="b"/>
+            <a:pathLst>
+              <a:path w="2026650" h="349523">
+                <a:moveTo>
+                  <a:pt x="0" y="0"/>
+                </a:moveTo>
+                <a:lnTo>
+                  <a:pt x="2026650" y="0"/>
+                </a:lnTo>
+                <a:lnTo>
+                  <a:pt x="2026650" y="349523"/>
+                </a:lnTo>
+                <a:lnTo>
+                  <a:pt x="0" y="349523"/>
+                </a:lnTo>
+                <a:close/>
+              </a:path>
+            </a:pathLst>
+          </a:custGeom>
+          <a:solidFill>
+            <a:srgbClr val="000000">
+              <a:alpha val="0"/>
+            </a:srgbClr>
+          </a:solidFill>
+          <a:ln/>
+        </p:spPr>
+      </p:sp>
+      <p:sp>
+        <p:nvSpPr>
+          <p:cNvPr id="11" name="Text 7"/>
+          <p:cNvSpPr/>
+          <p:nvPr/>
+        </p:nvSpPr>
+        <p:spPr>
+          <a:xfrm>
+            <a:off x="6517040" y="2139780"/>
+            <a:ext cx="2026650" cy="349523"/>
+          </a:xfrm>
+          <a:prstGeom prst="rect">
+            <a:avLst/>
+          </a:prstGeom>
+          <a:noFill/>
+          <a:ln/>
+        </p:spPr>
+        <p:txBody>
+          <a:bodyPr wrap="square" rtlCol="0" anchor="t"/>
+          <a:lstStyle/>
+          <a:p>
+            <a:pPr algn="l" indent="0" marL="0">
+              <a:spcBef>
+                <a:spcPts val="375"/>
+              </a:spcBef>
+              <a:buNone/>
+            </a:pPr>
+            <a:r>
+              <a:rPr lang="en-US" sz="975" dirty="0">
+                <a:solidFill>
+                  <a:srgbClr val="000000"/>
+                </a:solidFill>
+                <a:latin typeface="Nunito" pitchFamily="34" charset="0"/>
+                <a:ea typeface="Nunito" pitchFamily="34" charset="-122"/>
+                <a:cs typeface="Nunito" pitchFamily="34" charset="-120"/>
+              </a:rPr>
+              <a:t>Tumorlar organizmda hujayralarning nazoratsiz o'sishi natijasida paydo bo'ladi.</a:t>
+            </a:r>
+            <a:endParaRPr lang="en-US" sz="1050" dirty="0"/>
+          </a:p>
+        </p:txBody>
+      </p:sp>
+      <p:sp>
+        <p:nvSpPr>
+          <p:cNvPr id="12" name="Shape 8"/>
+          <p:cNvSpPr/>
+          <p:nvPr/>
+        </p:nvSpPr>
+        <p:spPr>
+          <a:xfrm>
+            <a:off x="6446157" y="1520039"/>
+            <a:ext cx="2026650" cy="241399"/>
+          </a:xfrm>
+          <a:custGeom>
+            <a:avLst/>
+            <a:gdLst/>
+            <a:ahLst/>
+            <a:cxnLst/>
+            <a:rect l="l" t="t" r="r" b="b"/>
+            <a:pathLst>
+              <a:path w="2026650" h="241399">
+                <a:moveTo>
+                  <a:pt x="0" y="0"/>
+                </a:moveTo>
+                <a:lnTo>
+                  <a:pt x="2026650" y="0"/>
+                </a:lnTo>
+                <a:lnTo>
+                  <a:pt x="2026650" y="241399"/>
+                </a:lnTo>
+                <a:lnTo>
+                  <a:pt x="0" y="241399"/>
+                </a:lnTo>
+                <a:close/>
+              </a:path>
+            </a:pathLst>
+          </a:custGeom>
+          <a:solidFill>
+            <a:srgbClr val="FFFFFF">
+              <a:alpha val="0"/>
+            </a:srgbClr>
+          </a:solidFill>
+          <a:ln/>
+        </p:spPr>
+      </p:sp>
+      <p:sp>
+        <p:nvSpPr>
+          <p:cNvPr id="13" name="Text 9"/>
+          <p:cNvSpPr/>
+          <p:nvPr/>
+        </p:nvSpPr>
+        <p:spPr>
+          <a:xfrm>
+            <a:off x="6446157" y="1520039"/>
+            <a:ext cx="2026650" cy="241399"/>
+          </a:xfrm>
+          <a:prstGeom prst="rect">
+            <a:avLst/>
+          </a:prstGeom>
+          <a:noFill/>
+          <a:ln/>
+        </p:spPr>
+        <p:txBody>
+          <a:bodyPr wrap="square" rtlCol="0" anchor="t"/>
+          <a:lstStyle/>
+          <a:p>
+            <a:pPr indent="0" marL="0">
+              <a:spcBef>
+                <a:spcPts val="375"/>
+              </a:spcBef>
+              <a:buNone/>
+            </a:pPr>
+            <a:endParaRPr lang="en-US" sz="1050" dirty="0"/>
+          </a:p>
+        </p:txBody>
+      </p:sp>
+      <p:sp>
+        <p:nvSpPr>
+          <p:cNvPr id="14" name="Shape 10"/>
+          <p:cNvSpPr/>
+          <p:nvPr/>
+        </p:nvSpPr>
+        <p:spPr>
+          <a:xfrm>
+            <a:off x="6446157" y="1520039"/>
+            <a:ext cx="2026650" cy="241399"/>
+          </a:xfrm>
+          <a:custGeom>
+            <a:avLst/>
+            <a:gdLst/>
+            <a:ahLst/>
+            <a:cxnLst/>
+            <a:rect l="l" t="t" r="r" b="b"/>
+            <a:pathLst>
+              <a:path w="2026650" h="241399">
+                <a:moveTo>
+                  <a:pt x="0" y="0"/>
+                </a:moveTo>
+                <a:lnTo>
+                  <a:pt x="2026650" y="0"/>
+                </a:lnTo>
+                <a:lnTo>
+                  <a:pt x="2026650" y="241399"/>
+                </a:lnTo>
+                <a:lnTo>
+                  <a:pt x="0" y="241399"/>
+                </a:lnTo>
+                <a:close/>
+              </a:path>
+            </a:pathLst>
+          </a:custGeom>
+          <a:solidFill>
+            <a:srgbClr val="000000">
+              <a:alpha val="0"/>
+            </a:srgbClr>
+          </a:solidFill>
+          <a:ln/>
+        </p:spPr>
+      </p:sp>
+      <p:sp>
+        <p:nvSpPr>
+          <p:cNvPr id="15" name="Text 11"/>
+          <p:cNvSpPr/>
+          <p:nvPr/>
+        </p:nvSpPr>
+        <p:spPr>
+          <a:xfrm>
+            <a:off x="6446157" y="1520039"/>
+            <a:ext cx="2026650" cy="241399"/>
+          </a:xfrm>
+          <a:prstGeom prst="rect">
+            <a:avLst/>
+          </a:prstGeom>
+          <a:noFill/>
+          <a:ln/>
+        </p:spPr>
+        <p:txBody>
+          <a:bodyPr wrap="square" rtlCol="0" anchor="t"/>
+          <a:lstStyle/>
+          <a:p>
+            <a:pPr algn="ctr" indent="0" marL="0">
+              <a:spcBef>
+                <a:spcPts val="375"/>
+              </a:spcBef>
+              <a:buNone/>
+            </a:pPr>
+            <a:r>
+              <a:rPr lang="en-US" sz="1125" b="1" dirty="0">
+                <a:solidFill>
+                  <a:srgbClr val="000000"/>
+                </a:solidFill>
+                <a:latin typeface="Nunito" pitchFamily="34" charset="0"/>
+                <a:ea typeface="Nunito" pitchFamily="34" charset="-122"/>
+                <a:cs typeface="Nunito" pitchFamily="34" charset="-120"/>
+              </a:rPr>
+              <a:t>Asosiy turdagi tumorlar: benign va malign.</a:t>
+            </a:r>
+            <a:endParaRPr lang="en-US" sz="1050" dirty="0"/>
+          </a:p>
+        </p:txBody>
+      </p:sp>
+      <p:sp>
+        <p:nvSpPr>
+          <p:cNvPr id="16" name="Shape 12"/>
+          <p:cNvSpPr/>
+          <p:nvPr/>
+        </p:nvSpPr>
+        <p:spPr>
+          <a:xfrm>
+            <a:off x="6517040" y="3923708"/>
+            <a:ext cx="2026650" cy="349523"/>
+          </a:xfrm>
+          <a:custGeom>
+            <a:avLst/>
+            <a:gdLst/>
+            <a:ahLst/>
+            <a:cxnLst/>
+            <a:rect l="l" t="t" r="r" b="b"/>
+            <a:pathLst>
+              <a:path w="2026650" h="349523">
+                <a:moveTo>
+                  <a:pt x="0" y="0"/>
+                </a:moveTo>
+                <a:lnTo>
+                  <a:pt x="2026650" y="0"/>
+                </a:lnTo>
+                <a:lnTo>
+                  <a:pt x="2026650" y="349523"/>
+                </a:lnTo>
+                <a:lnTo>
+                  <a:pt x="0" y="349523"/>
+                </a:lnTo>
+                <a:close/>
+              </a:path>
+            </a:pathLst>
+          </a:custGeom>
+          <a:solidFill>
+            <a:srgbClr val="FFFFFF">
+              <a:alpha val="0"/>
+            </a:srgbClr>
+          </a:solidFill>
+          <a:ln/>
+        </p:spPr>
+      </p:sp>
+      <p:sp>
+        <p:nvSpPr>
+          <p:cNvPr id="17" name="Text 13"/>
+          <p:cNvSpPr/>
+          <p:nvPr/>
+        </p:nvSpPr>
+        <p:spPr>
+          <a:xfrm>
+            <a:off x="6517040" y="3923708"/>
+            <a:ext cx="2026650" cy="349523"/>
+          </a:xfrm>
+          <a:prstGeom prst="rect">
+            <a:avLst/>
+          </a:prstGeom>
+          <a:noFill/>
+          <a:ln/>
+        </p:spPr>
+        <p:txBody>
+          <a:bodyPr wrap="square" rtlCol="0" anchor="t"/>
+          <a:lstStyle/>
+          <a:p>
+            <a:pPr indent="0" marL="0">
+              <a:spcBef>
+                <a:spcPts val="375"/>
+              </a:spcBef>
+              <a:buNone/>
+            </a:pPr>
+            <a:endParaRPr lang="en-US" sz="1050" dirty="0"/>
+          </a:p>
+        </p:txBody>
+      </p:sp>
+      <p:sp>
+        <p:nvSpPr>
+          <p:cNvPr id="18" name="Shape 14"/>
+          <p:cNvSpPr/>
+          <p:nvPr/>
+        </p:nvSpPr>
+        <p:spPr>
+          <a:xfrm>
+            <a:off x="6517040" y="3923708"/>
+            <a:ext cx="2026650" cy="349523"/>
+          </a:xfrm>
+          <a:custGeom>
+            <a:avLst/>
+            <a:gdLst/>
+            <a:ahLst/>
+            <a:cxnLst/>
+            <a:rect l="l" t="t" r="r" b="b"/>
+            <a:pathLst>
+              <a:path w="2026650" h="349523">
+                <a:moveTo>
+                  <a:pt x="0" y="0"/>
+                </a:moveTo>
+                <a:lnTo>
+                  <a:pt x="2026650" y="0"/>
+                </a:lnTo>
+                <a:lnTo>
+                  <a:pt x="2026650" y="349523"/>
+                </a:lnTo>
+                <a:lnTo>
+                  <a:pt x="0" y="349523"/>
+                </a:lnTo>
+                <a:close/>
+              </a:path>
+            </a:pathLst>
+          </a:custGeom>
+          <a:solidFill>
+            <a:srgbClr val="000000">
+              <a:alpha val="0"/>
+            </a:srgbClr>
+          </a:solidFill>
+          <a:ln/>
+        </p:spPr>
+      </p:sp>
+      <p:sp>
+        <p:nvSpPr>
+          <p:cNvPr id="19" name="Text 15"/>
+          <p:cNvSpPr/>
+          <p:nvPr/>
+        </p:nvSpPr>
+        <p:spPr>
+          <a:xfrm>
+            <a:off x="6517040" y="3923708"/>
+            <a:ext cx="2026650" cy="349523"/>
+          </a:xfrm>
+          <a:prstGeom prst="rect">
+            <a:avLst/>
+          </a:prstGeom>
+          <a:noFill/>
+          <a:ln/>
+        </p:spPr>
+        <p:txBody>
+          <a:bodyPr wrap="square" rtlCol="0" anchor="t"/>
+          <a:lstStyle/>
+          <a:p>
+            <a:pPr algn="ctr" indent="0" marL="0">
+              <a:spcBef>
+                <a:spcPts val="375"/>
+              </a:spcBef>
+              <a:buNone/>
+            </a:pPr>
+            <a:r>
+              <a:rPr lang="en-US" sz="975" dirty="0">
+                <a:solidFill>
+                  <a:srgbClr val="000000"/>
+                </a:solidFill>
+                <a:latin typeface="Nunito" pitchFamily="34" charset="0"/>
+                <a:ea typeface="Nunito" pitchFamily="34" charset="-122"/>
+                <a:cs typeface="Nunito" pitchFamily="34" charset="-120"/>
+              </a:rPr>
+              <a:t>Malign tumorlar: saraton hujayralari o'sib, boshqa to'qimalarga tarqaladi.</a:t>
+            </a:r>
+            <a:endParaRPr lang="en-US" sz="1050" dirty="0"/>
+          </a:p>
+        </p:txBody>
+      </p:sp>
+      <p:sp>
+        <p:nvSpPr>
+          <p:cNvPr id="20" name="Shape 16"/>
+          <p:cNvSpPr/>
+          <p:nvPr/>
+        </p:nvSpPr>
+        <p:spPr>
+          <a:xfrm>
+            <a:off x="6481599" y="3307470"/>
+            <a:ext cx="2026650" cy="241399"/>
+          </a:xfrm>
+          <a:custGeom>
+            <a:avLst/>
+            <a:gdLst/>
+            <a:ahLst/>
+            <a:cxnLst/>
+            <a:rect l="l" t="t" r="r" b="b"/>
+            <a:pathLst>
+              <a:path w="2026650" h="241399">
+                <a:moveTo>
+                  <a:pt x="0" y="0"/>
+                </a:moveTo>
+                <a:lnTo>
+                  <a:pt x="2026650" y="0"/>
+                </a:lnTo>
+                <a:lnTo>
+                  <a:pt x="2026650" y="241399"/>
+                </a:lnTo>
+                <a:lnTo>
+                  <a:pt x="0" y="241399"/>
+                </a:lnTo>
+                <a:close/>
+              </a:path>
+            </a:pathLst>
+          </a:custGeom>
+          <a:solidFill>
+            <a:srgbClr val="FFFFFF">
+              <a:alpha val="0"/>
+            </a:srgbClr>
+          </a:solidFill>
+          <a:ln/>
+        </p:spPr>
+      </p:sp>
+      <p:sp>
+        <p:nvSpPr>
+          <p:cNvPr id="21" name="Text 17"/>
+          <p:cNvSpPr/>
+          <p:nvPr/>
+        </p:nvSpPr>
+        <p:spPr>
+          <a:xfrm>
+            <a:off x="6481599" y="3307470"/>
+            <a:ext cx="2026650" cy="241399"/>
+          </a:xfrm>
+          <a:prstGeom prst="rect">
+            <a:avLst/>
+          </a:prstGeom>
+          <a:noFill/>
+          <a:ln/>
+        </p:spPr>
+        <p:txBody>
+          <a:bodyPr wrap="square" rtlCol="0" anchor="t"/>
+          <a:lstStyle/>
+          <a:p>
+            <a:pPr indent="0" marL="0">
+              <a:spcBef>
+                <a:spcPts val="375"/>
+              </a:spcBef>
+              <a:buNone/>
+            </a:pPr>
+            <a:endParaRPr lang="en-US" sz="1050" dirty="0"/>
+          </a:p>
+        </p:txBody>
+      </p:sp>
+      <p:sp>
+        <p:nvSpPr>
+          <p:cNvPr id="22" name="Shape 18"/>
+          <p:cNvSpPr/>
+          <p:nvPr/>
+        </p:nvSpPr>
+        <p:spPr>
+          <a:xfrm>
+            <a:off x="6481599" y="3307470"/>
+            <a:ext cx="2026650" cy="241399"/>
+          </a:xfrm>
+          <a:custGeom>
+            <a:avLst/>
+            <a:gdLst/>
+            <a:ahLst/>
+            <a:cxnLst/>
+            <a:rect l="l" t="t" r="r" b="b"/>
+            <a:pathLst>
+              <a:path w="2026650" h="241399">
+                <a:moveTo>
+                  <a:pt x="0" y="0"/>
+                </a:moveTo>
+                <a:lnTo>
+                  <a:pt x="2026650" y="0"/>
+                </a:lnTo>
+                <a:lnTo>
+                  <a:pt x="2026650" y="241399"/>
+                </a:lnTo>
+                <a:lnTo>
+                  <a:pt x="0" y="241399"/>
+                </a:lnTo>
+                <a:close/>
+              </a:path>
+            </a:pathLst>
+          </a:custGeom>
+          <a:solidFill>
+            <a:srgbClr val="000000">
+              <a:alpha val="0"/>
+            </a:srgbClr>
+          </a:solidFill>
+          <a:ln/>
+        </p:spPr>
+      </p:sp>
+      <p:sp>
+        <p:nvSpPr>
+          <p:cNvPr id="23" name="Text 19"/>
+          <p:cNvSpPr/>
+          <p:nvPr/>
+        </p:nvSpPr>
+        <p:spPr>
+          <a:xfrm>
+            <a:off x="6481599" y="3307470"/>
+            <a:ext cx="2026650" cy="241399"/>
+          </a:xfrm>
+          <a:prstGeom prst="rect">
+            <a:avLst/>
+          </a:prstGeom>
+          <a:noFill/>
+          <a:ln/>
+        </p:spPr>
+        <p:txBody>
+          <a:bodyPr wrap="square" rtlCol="0" anchor="t"/>
+          <a:lstStyle/>
+          <a:p>
+            <a:pPr algn="ctr" indent="0" marL="0">
+              <a:spcBef>
+                <a:spcPts val="375"/>
+              </a:spcBef>
+              <a:buNone/>
+            </a:pPr>
+            <a:r>
+              <a:rPr lang="en-US" sz="1125" b="1" dirty="0">
+                <a:solidFill>
+                  <a:srgbClr val="000000"/>
+                </a:solidFill>
+                <a:latin typeface="Nunito" pitchFamily="34" charset="0"/>
+                <a:ea typeface="Nunito" pitchFamily="34" charset="-122"/>
+                <a:cs typeface="Nunito" pitchFamily="34" charset="-120"/>
+              </a:rPr>
+              <a:t>Benign tumorlar: o'sish tezligi sekin, boshqa to'qimalarga tarqalmaydi.</a:t>
+            </a:r>
+            <a:endParaRPr lang="en-US" sz="1050" dirty="0"/>
+          </a:p>
+        </p:txBody>
+      </p:sp>
+      <p:sp>
+        <p:nvSpPr>
+          <p:cNvPr id="24" name="Shape 20"/>
+          <p:cNvSpPr/>
+          <p:nvPr/>
+        </p:nvSpPr>
+        <p:spPr>
+          <a:xfrm>
+            <a:off x="600373" y="2018613"/>
+            <a:ext cx="2026650" cy="349523"/>
+          </a:xfrm>
+          <a:custGeom>
+            <a:avLst/>
+            <a:gdLst/>
+            <a:ahLst/>
+            <a:cxnLst/>
+            <a:rect l="l" t="t" r="r" b="b"/>
+            <a:pathLst>
+              <a:path w="2026650" h="349523">
+                <a:moveTo>
+                  <a:pt x="0" y="0"/>
+                </a:moveTo>
+                <a:lnTo>
+                  <a:pt x="2026650" y="0"/>
+                </a:lnTo>
+                <a:lnTo>
+                  <a:pt x="2026650" y="349523"/>
+                </a:lnTo>
+                <a:lnTo>
+                  <a:pt x="0" y="349523"/>
+                </a:lnTo>
+                <a:close/>
+              </a:path>
+            </a:pathLst>
+          </a:custGeom>
+          <a:solidFill>
+            <a:srgbClr val="FFFFFF">
+              <a:alpha val="0"/>
+            </a:srgbClr>
+          </a:solidFill>
+          <a:ln/>
+        </p:spPr>
+      </p:sp>
+      <p:sp>
+        <p:nvSpPr>
+          <p:cNvPr id="25" name="Text 21"/>
+          <p:cNvSpPr/>
+          <p:nvPr/>
+        </p:nvSpPr>
+        <p:spPr>
+          <a:xfrm>
+            <a:off x="600373" y="2018613"/>
+            <a:ext cx="2026650" cy="349523"/>
+          </a:xfrm>
+          <a:prstGeom prst="rect">
+            <a:avLst/>
+          </a:prstGeom>
+          <a:noFill/>
+          <a:ln/>
+        </p:spPr>
+        <p:txBody>
+          <a:bodyPr wrap="square" rtlCol="0" anchor="t"/>
+          <a:lstStyle/>
+          <a:p>
+            <a:pPr indent="0" marL="0">
+              <a:spcBef>
+                <a:spcPts val="375"/>
+              </a:spcBef>
+              <a:buNone/>
+            </a:pPr>
+            <a:endParaRPr lang="en-US" sz="1050" dirty="0"/>
+          </a:p>
+        </p:txBody>
+      </p:sp>
+      <p:sp>
+        <p:nvSpPr>
+          <p:cNvPr id="26" name="Shape 22"/>
+          <p:cNvSpPr/>
+          <p:nvPr/>
+        </p:nvSpPr>
+        <p:spPr>
+          <a:xfrm>
+            <a:off x="600373" y="2018613"/>
+            <a:ext cx="2026650" cy="349523"/>
+          </a:xfrm>
+          <a:custGeom>
+            <a:avLst/>
+            <a:gdLst/>
+            <a:ahLst/>
+            <a:cxnLst/>
+            <a:rect l="l" t="t" r="r" b="b"/>
+            <a:pathLst>
+              <a:path w="2026650" h="349523">
+                <a:moveTo>
+                  <a:pt x="0" y="0"/>
+                </a:moveTo>
+                <a:lnTo>
+                  <a:pt x="2026650" y="0"/>
+                </a:lnTo>
+                <a:lnTo>
+                  <a:pt x="2026650" y="349523"/>
+                </a:lnTo>
+                <a:lnTo>
+                  <a:pt x="0" y="349523"/>
+                </a:lnTo>
+                <a:close/>
+              </a:path>
+            </a:pathLst>
+          </a:custGeom>
+          <a:solidFill>
+            <a:srgbClr val="000000">
+              <a:alpha val="0"/>
+            </a:srgbClr>
+          </a:solidFill>
+          <a:ln/>
+        </p:spPr>
+      </p:sp>
+      <p:sp>
+        <p:nvSpPr>
+          <p:cNvPr id="27" name="Text 23"/>
+          <p:cNvSpPr/>
+          <p:nvPr/>
+        </p:nvSpPr>
+        <p:spPr>
+          <a:xfrm>
+            <a:off x="600373" y="2018613"/>
+            <a:ext cx="2026650" cy="349523"/>
+          </a:xfrm>
+          <a:prstGeom prst="rect">
+            <a:avLst/>
+          </a:prstGeom>
+          <a:noFill/>
+          <a:ln/>
+        </p:spPr>
+        <p:txBody>
+          <a:bodyPr wrap="square" rtlCol="0" anchor="t"/>
+          <a:lstStyle/>
+          <a:p>
+            <a:pPr algn="l" indent="0" marL="0">
+              <a:spcBef>
+                <a:spcPts val="375"/>
+              </a:spcBef>
+              <a:buNone/>
+            </a:pPr>
+            <a:r>
+              <a:rPr lang="en-US" sz="975" dirty="0">
+                <a:solidFill>
+                  <a:srgbClr val="000000"/>
+                </a:solidFill>
+                <a:latin typeface="Nunito" pitchFamily="34" charset="0"/>
+                <a:ea typeface="Nunito" pitchFamily="34" charset="-122"/>
+                <a:cs typeface="Nunito" pitchFamily="34" charset="-120"/>
+              </a:rPr>
+              <a:t>Tumorlarning klassifikatsiyasi: joylashuvi, turiga ko'ra.</a:t>
+            </a:r>
+            <a:endParaRPr lang="en-US" sz="1050" dirty="0"/>
+          </a:p>
+        </p:txBody>
+      </p:sp>
+      <p:sp>
+        <p:nvSpPr>
+          <p:cNvPr id="28" name="Shape 24"/>
+          <p:cNvSpPr/>
+          <p:nvPr/>
+        </p:nvSpPr>
+        <p:spPr>
+          <a:xfrm>
+            <a:off x="600373" y="1456867"/>
+            <a:ext cx="2026650" cy="241399"/>
+          </a:xfrm>
+          <a:custGeom>
+            <a:avLst/>
+            <a:gdLst/>
+            <a:ahLst/>
+            <a:cxnLst/>
+            <a:rect l="l" t="t" r="r" b="b"/>
+            <a:pathLst>
+              <a:path w="2026650" h="241399">
+                <a:moveTo>
+                  <a:pt x="0" y="0"/>
+                </a:moveTo>
+                <a:lnTo>
+                  <a:pt x="2026650" y="0"/>
+                </a:lnTo>
+                <a:lnTo>
+                  <a:pt x="2026650" y="241399"/>
+                </a:lnTo>
+                <a:lnTo>
+                  <a:pt x="0" y="241399"/>
+                </a:lnTo>
+                <a:close/>
+              </a:path>
+            </a:pathLst>
+          </a:custGeom>
+          <a:solidFill>
+            <a:srgbClr val="FFFFFF">
+              <a:alpha val="0"/>
+            </a:srgbClr>
+          </a:solidFill>
+          <a:ln/>
+        </p:spPr>
+      </p:sp>
+      <p:sp>
+        <p:nvSpPr>
+          <p:cNvPr id="29" name="Text 25"/>
+          <p:cNvSpPr/>
+          <p:nvPr/>
+        </p:nvSpPr>
+        <p:spPr>
+          <a:xfrm>
+            <a:off x="600373" y="1456867"/>
+            <a:ext cx="2026650" cy="241399"/>
+          </a:xfrm>
+          <a:prstGeom prst="rect">
+            <a:avLst/>
+          </a:prstGeom>
+          <a:noFill/>
+          <a:ln/>
+        </p:spPr>
+        <p:txBody>
+          <a:bodyPr wrap="square" rtlCol="0" anchor="t"/>
+          <a:lstStyle/>
+          <a:p>
+            <a:pPr indent="0" marL="0">
+              <a:spcBef>
+                <a:spcPts val="375"/>
+              </a:spcBef>
+              <a:buNone/>
+            </a:pPr>
+            <a:endParaRPr lang="en-US" sz="1050" dirty="0"/>
+          </a:p>
+        </p:txBody>
+      </p:sp>
+      <p:sp>
+        <p:nvSpPr>
+          <p:cNvPr id="30" name="Shape 26"/>
+          <p:cNvSpPr/>
+          <p:nvPr/>
+        </p:nvSpPr>
+        <p:spPr>
+          <a:xfrm>
+            <a:off x="600373" y="1456867"/>
+            <a:ext cx="2026650" cy="241399"/>
+          </a:xfrm>
+          <a:custGeom>
+            <a:avLst/>
+            <a:gdLst/>
+            <a:ahLst/>
+            <a:cxnLst/>
+            <a:rect l="l" t="t" r="r" b="b"/>
+            <a:pathLst>
+              <a:path w="2026650" h="241399">
+                <a:moveTo>
+                  <a:pt x="0" y="0"/>
+                </a:moveTo>
+                <a:lnTo>
+                  <a:pt x="2026650" y="0"/>
+                </a:lnTo>
+                <a:lnTo>
+                  <a:pt x="2026650" y="241399"/>
+                </a:lnTo>
+                <a:lnTo>
+                  <a:pt x="0" y="241399"/>
+                </a:lnTo>
+                <a:close/>
+              </a:path>
+            </a:pathLst>
+          </a:custGeom>
+          <a:solidFill>
+            <a:srgbClr val="000000">
+              <a:alpha val="0"/>
+            </a:srgbClr>
+          </a:solidFill>
+          <a:ln/>
+        </p:spPr>
+      </p:sp>
+      <p:sp>
+        <p:nvSpPr>
+          <p:cNvPr id="31" name="Text 27"/>
+          <p:cNvSpPr/>
+          <p:nvPr/>
+        </p:nvSpPr>
+        <p:spPr>
+          <a:xfrm>
+            <a:off x="600373" y="1456867"/>
+            <a:ext cx="2026650" cy="241399"/>
+          </a:xfrm>
+          <a:prstGeom prst="rect">
+            <a:avLst/>
+          </a:prstGeom>
+          <a:noFill/>
+          <a:ln/>
+        </p:spPr>
+        <p:txBody>
+          <a:bodyPr wrap="square" rtlCol="0" anchor="t"/>
+          <a:lstStyle/>
+          <a:p>
+            <a:pPr algn="ctr" indent="0" marL="0">
+              <a:spcBef>
+                <a:spcPts val="375"/>
+              </a:spcBef>
+              <a:buNone/>
+            </a:pPr>
+            <a:r>
+              <a:rPr lang="en-US" sz="1125" b="1" dirty="0">
+                <a:solidFill>
+                  <a:srgbClr val="000000"/>
+                </a:solidFill>
+                <a:latin typeface="Nunito" pitchFamily="34" charset="0"/>
+                <a:ea typeface="Nunito" pitchFamily="34" charset="-122"/>
+                <a:cs typeface="Nunito" pitchFamily="34" charset="-120"/>
+              </a:rPr>
+              <a:t>O'simta turlari: sarkoma, karcinoma, leiomiyoma. </a:t>
+            </a:r>
+            <a:endParaRPr lang="en-US" sz="1050" dirty="0"/>
+          </a:p>
+        </p:txBody>
+      </p:sp>
+      <p:sp>
+        <p:nvSpPr>
+          <p:cNvPr id="32" name="Shape 28"/>
+          <p:cNvSpPr/>
+          <p:nvPr/>
+        </p:nvSpPr>
+        <p:spPr>
+          <a:xfrm>
+            <a:off x="600373" y="3866558"/>
+            <a:ext cx="2026650" cy="349523"/>
+          </a:xfrm>
+          <a:custGeom>
+            <a:avLst/>
+            <a:gdLst/>
+            <a:ahLst/>
+            <a:cxnLst/>
+            <a:rect l="l" t="t" r="r" b="b"/>
+            <a:pathLst>
+              <a:path w="2026650" h="349523">
+                <a:moveTo>
+                  <a:pt x="0" y="0"/>
+                </a:moveTo>
+                <a:lnTo>
+                  <a:pt x="2026650" y="0"/>
+                </a:lnTo>
+                <a:lnTo>
+                  <a:pt x="2026650" y="349523"/>
+                </a:lnTo>
+                <a:lnTo>
+                  <a:pt x="0" y="349523"/>
+                </a:lnTo>
+                <a:close/>
+              </a:path>
+            </a:pathLst>
+          </a:custGeom>
+          <a:solidFill>
+            <a:srgbClr val="FFFFFF">
+              <a:alpha val="0"/>
+            </a:srgbClr>
+          </a:solidFill>
+          <a:ln/>
+        </p:spPr>
+      </p:sp>
+      <p:sp>
+        <p:nvSpPr>
+          <p:cNvPr id="33" name="Text 29"/>
+          <p:cNvSpPr/>
+          <p:nvPr/>
+        </p:nvSpPr>
+        <p:spPr>
+          <a:xfrm>
+            <a:off x="600373" y="3866558"/>
+            <a:ext cx="2026650" cy="349523"/>
+          </a:xfrm>
+          <a:prstGeom prst="rect">
+            <a:avLst/>
+          </a:prstGeom>
+          <a:noFill/>
+          <a:ln/>
+        </p:spPr>
+        <p:txBody>
+          <a:bodyPr wrap="square" rtlCol="0" anchor="t"/>
+          <a:lstStyle/>
+          <a:p>
+            <a:pPr indent="0" marL="0">
+              <a:spcBef>
+                <a:spcPts val="375"/>
+              </a:spcBef>
+              <a:buNone/>
+            </a:pPr>
+            <a:endParaRPr lang="en-US" sz="1050" dirty="0"/>
+          </a:p>
+        </p:txBody>
+      </p:sp>
+      <p:sp>
+        <p:nvSpPr>
+          <p:cNvPr id="34" name="Shape 30"/>
+          <p:cNvSpPr/>
+          <p:nvPr/>
+        </p:nvSpPr>
+        <p:spPr>
+          <a:xfrm>
+            <a:off x="600373" y="3866558"/>
+            <a:ext cx="2026650" cy="349523"/>
+          </a:xfrm>
+          <a:custGeom>
+            <a:avLst/>
+            <a:gdLst/>
+            <a:ahLst/>
+            <a:cxnLst/>
+            <a:rect l="l" t="t" r="r" b="b"/>
+            <a:pathLst>
+              <a:path w="2026650" h="349523">
+                <a:moveTo>
+                  <a:pt x="0" y="0"/>
+                </a:moveTo>
+                <a:lnTo>
+                  <a:pt x="2026650" y="0"/>
+                </a:lnTo>
+                <a:lnTo>
+                  <a:pt x="2026650" y="349523"/>
+                </a:lnTo>
+                <a:lnTo>
+                  <a:pt x="0" y="349523"/>
+                </a:lnTo>
+                <a:close/>
+              </a:path>
+            </a:pathLst>
+          </a:custGeom>
+          <a:solidFill>
+            <a:srgbClr val="000000">
+              <a:alpha val="0"/>
+            </a:srgbClr>
+          </a:solidFill>
+          <a:ln/>
+        </p:spPr>
+      </p:sp>
+      <p:sp>
+        <p:nvSpPr>
+          <p:cNvPr id="35" name="Text 31"/>
+          <p:cNvSpPr/>
+          <p:nvPr/>
+        </p:nvSpPr>
+        <p:spPr>
+          <a:xfrm>
+            <a:off x="600373" y="3866558"/>
+            <a:ext cx="2026650" cy="349523"/>
+          </a:xfrm>
+          <a:prstGeom prst="rect">
+            <a:avLst/>
+          </a:prstGeom>
+          <a:noFill/>
+          <a:ln/>
+        </p:spPr>
+        <p:txBody>
+          <a:bodyPr wrap="square" rtlCol="0" anchor="t"/>
+          <a:lstStyle/>
+          <a:p>
+            <a:pPr algn="ctr" indent="0" marL="0">
+              <a:spcBef>
+                <a:spcPts val="375"/>
+              </a:spcBef>
+              <a:buNone/>
+            </a:pPr>
+            <a:r>
+              <a:rPr lang="en-US" sz="975" dirty="0">
+                <a:solidFill>
+                  <a:srgbClr val="000000"/>
+                </a:solidFill>
+                <a:latin typeface="Nunito" pitchFamily="34" charset="0"/>
+                <a:ea typeface="Nunito" pitchFamily="34" charset="-122"/>
+                <a:cs typeface="Nunito" pitchFamily="34" charset="-120"/>
+              </a:rPr>
+              <a:t>Tumorlar o'zaro turlicha belgilarga ega, ko'p holatda alomatlar paydo bo'ladi.</a:t>
+            </a:r>
+            <a:endParaRPr lang="en-US" sz="1050" dirty="0"/>
+          </a:p>
+        </p:txBody>
+      </p:sp>
+      <p:sp>
+        <p:nvSpPr>
+          <p:cNvPr id="36" name="Shape 32"/>
+          <p:cNvSpPr/>
+          <p:nvPr/>
+        </p:nvSpPr>
+        <p:spPr>
+          <a:xfrm>
+            <a:off x="482233" y="3307470"/>
+            <a:ext cx="2026650" cy="241399"/>
+          </a:xfrm>
+          <a:custGeom>
+            <a:avLst/>
+            <a:gdLst/>
+            <a:ahLst/>
+            <a:cxnLst/>
+            <a:rect l="l" t="t" r="r" b="b"/>
+            <a:pathLst>
+              <a:path w="2026650" h="241399">
+                <a:moveTo>
+                  <a:pt x="0" y="0"/>
+                </a:moveTo>
+                <a:lnTo>
+                  <a:pt x="2026650" y="0"/>
+                </a:lnTo>
+                <a:lnTo>
+                  <a:pt x="2026650" y="241399"/>
+                </a:lnTo>
+                <a:lnTo>
+                  <a:pt x="0" y="241399"/>
+                </a:lnTo>
+                <a:close/>
+              </a:path>
+            </a:pathLst>
+          </a:custGeom>
+          <a:solidFill>
+            <a:srgbClr val="FFFFFF">
+              <a:alpha val="0"/>
+            </a:srgbClr>
+          </a:solidFill>
+          <a:ln/>
+        </p:spPr>
+      </p:sp>
+      <p:sp>
+        <p:nvSpPr>
+          <p:cNvPr id="37" name="Text 33"/>
+          <p:cNvSpPr/>
+          <p:nvPr/>
+        </p:nvSpPr>
+        <p:spPr>
+          <a:xfrm>
+            <a:off x="482233" y="3307470"/>
+            <a:ext cx="2026650" cy="241399"/>
+          </a:xfrm>
+          <a:prstGeom prst="rect">
+            <a:avLst/>
+          </a:prstGeom>
+          <a:noFill/>
+          <a:ln/>
+        </p:spPr>
+        <p:txBody>
+          <a:bodyPr wrap="square" rtlCol="0" anchor="t"/>
+          <a:lstStyle/>
+          <a:p>
+            <a:pPr indent="0" marL="0">
+              <a:spcBef>
+                <a:spcPts val="375"/>
+              </a:spcBef>
+              <a:buNone/>
+            </a:pPr>
+            <a:endParaRPr lang="en-US" sz="1050" dirty="0"/>
+          </a:p>
+        </p:txBody>
+      </p:sp>
+      <p:sp>
+        <p:nvSpPr>
+          <p:cNvPr id="38" name="Shape 34"/>
+          <p:cNvSpPr/>
+          <p:nvPr/>
+        </p:nvSpPr>
+        <p:spPr>
+          <a:xfrm>
+            <a:off x="482233" y="3307470"/>
+            <a:ext cx="2026650" cy="241399"/>
+          </a:xfrm>
+          <a:custGeom>
+            <a:avLst/>
+            <a:gdLst/>
+            <a:ahLst/>
+            <a:cxnLst/>
+            <a:rect l="l" t="t" r="r" b="b"/>
+            <a:pathLst>
+              <a:path w="2026650" h="241399">
+                <a:moveTo>
+                  <a:pt x="0" y="0"/>
+                </a:moveTo>
+                <a:lnTo>
+                  <a:pt x="2026650" y="0"/>
+                </a:lnTo>
+                <a:lnTo>
+                  <a:pt x="2026650" y="241399"/>
+                </a:lnTo>
+                <a:lnTo>
+                  <a:pt x="0" y="241399"/>
+                </a:lnTo>
+                <a:close/>
+              </a:path>
+            </a:pathLst>
+          </a:custGeom>
+          <a:solidFill>
+            <a:srgbClr val="000000">
+              <a:alpha val="0"/>
+            </a:srgbClr>
+          </a:solidFill>
+          <a:ln/>
+        </p:spPr>
+      </p:sp>
+      <p:sp>
+        <p:nvSpPr>
+          <p:cNvPr id="39" name="Text 35"/>
+          <p:cNvSpPr/>
+          <p:nvPr/>
+        </p:nvSpPr>
+        <p:spPr>
+          <a:xfrm>
+            <a:off x="482233" y="3307470"/>
+            <a:ext cx="2026650" cy="241399"/>
+          </a:xfrm>
+          <a:prstGeom prst="rect">
+            <a:avLst/>
+          </a:prstGeom>
+          <a:noFill/>
+          <a:ln/>
+        </p:spPr>
+        <p:txBody>
+          <a:bodyPr wrap="square" rtlCol="0" anchor="t"/>
+          <a:lstStyle/>
+          <a:p>
+            <a:pPr algn="ctr" indent="0" marL="0">
+              <a:spcBef>
+                <a:spcPts val="375"/>
+              </a:spcBef>
+              <a:buNone/>
+            </a:pPr>
+            <a:r>
+              <a:rPr lang="en-US" sz="1125" b="1" dirty="0">
+                <a:solidFill>
+                  <a:srgbClr val="000000"/>
+                </a:solidFill>
+                <a:latin typeface="Nunito" pitchFamily="34" charset="0"/>
+                <a:ea typeface="Nunito" pitchFamily="34" charset="-122"/>
+                <a:cs typeface="Nunito" pitchFamily="34" charset="-120"/>
+              </a:rPr>
+              <a:t>Tashxis va davolash usullari: jarrohlik, kimyoterapiya, radiatsiya.</a:t>
+            </a:r>
+            <a:endParaRPr lang="en-US" sz="1050" dirty="0"/>
+          </a:p>
+        </p:txBody>
+      </p:sp>
+    </p:spTree>
+  </p:cSld>
+  <p:clrMapOvr>
+    <a:masterClrMapping/>
+  </p:clrMapOvr>
+</p:sld>
+</file>
+
+<file path=ppt/slides/slide5.xml><?xml version="1.0" encoding="utf-8"?>
+<p:sld xmlns:a="http://schemas.openxmlformats.org/drawingml/2006/main" xmlns:r="http://schemas.openxmlformats.org/officeDocument/2006/relationships" xmlns:p="http://schemas.openxmlformats.org/presentationml/2006/main">
+  <p:cSld name="Slide 5">
+    <p:bg>
+      <p:bgPr>
+        <a:solidFill>
+          <a:srgbClr val="F1F1F1"/>
+        </a:solidFill>
+      </p:bgPr>
+    </p:bg>
+    <p:spTree>
+      <p:nvGrpSpPr>
+        <p:cNvPr id="1" name=""/>
+        <p:cNvGrpSpPr/>
+        <p:nvPr/>
+      </p:nvGrpSpPr>
+      <p:grpSpPr>
+        <a:xfrm>
+          <a:off x="0" y="0"/>
+          <a:ext cx="0" cy="0"/>
+          <a:chOff x="0" y="0"/>
+          <a:chExt cx="0" cy="0"/>
+        </a:xfrm>
+      </p:grpSpPr>
+      <p:pic>
+        <p:nvPicPr>
+          <p:cNvPr id="2" name="Image 0" descr="./images\slide4_img51.png">    </p:cNvPr>
+          <p:cNvPicPr>
+            <a:picLocks noChangeAspect="1"/>
+          </p:cNvPicPr>
+          <p:nvPr/>
+        </p:nvPicPr>
+        <p:blipFill>
+          <a:blip r:embed="rId1"/>
+          <a:stretch>
+            <a:fillRect/>
+          </a:stretch>
+        </p:blipFill>
+        <p:spPr>
+          <a:xfrm>
+            <a:off x="0" y="0"/>
+            <a:ext cx="9144000" cy="5143500"/>
+          </a:xfrm>
+          <a:prstGeom prst="rect">
+            <a:avLst/>
+          </a:prstGeom>
+        </p:spPr>
+      </p:pic>
       <p:graphicFrame>
         <p:nvGraphicFramePr>
-          <p:cNvPr id="4" name="Table 0"/>
+          <p:cNvPr id="6" name="Table 0"/>
           <p:cNvGraphicFramePr>
             <a:graphicFrameLocks noGrp="1"/>
           </p:cNvGraphicFramePr>
@@ -5155,74 +8600,6 @@
                           <a:cs typeface="Nunito" pitchFamily="34" charset="-120"/>
                         </a:rPr>
                         <a:t>O'sma nomi</a:t>
-                      </a:r>
-                      <a:endParaRPr lang="en-US" sz="900" dirty="0">
-                        <a:latin typeface="Nunito" charset="0"/>
-                        <a:ea typeface="Nunito" charset="0"/>
-                        <a:cs typeface="Nunito" charset="0"/>
-                      </a:endParaRPr>
-                    </a:p>
-                  </a:txBody>
-                  <a:tcPr marL="91440" marR="91440" marT="45720" marB="45720" anchor="ctr">
-                    <a:lnL w="4763" cap="flat" cmpd="sng" algn="ctr">
-                      <a:solidFill>
-                        <a:srgbClr val="000000"/>
-                      </a:solidFill>
-                      <a:prstDash val="solid"/>
-                      <a:round/>
-                      <a:headEnd type="none" w="med" len="med"/>
-                      <a:tailEnd type="none" w="med" len="med"/>
-                    </a:lnL>
-                    <a:lnR w="4763" cap="flat" cmpd="sng" algn="ctr">
-                      <a:solidFill>
-                        <a:srgbClr val="000000"/>
-                      </a:solidFill>
-                      <a:prstDash val="solid"/>
-                      <a:round/>
-                      <a:headEnd type="none" w="med" len="med"/>
-                      <a:tailEnd type="none" w="med" len="med"/>
-                    </a:lnR>
-                    <a:lnT w="4763" cap="flat" cmpd="sng" algn="ctr">
-                      <a:solidFill>
-                        <a:srgbClr val="000000"/>
-                      </a:solidFill>
-                      <a:prstDash val="solid"/>
-                      <a:round/>
-                      <a:headEnd type="none" w="med" len="med"/>
-                      <a:tailEnd type="none" w="med" len="med"/>
-                    </a:lnT>
-                    <a:lnB w="4763" cap="flat" cmpd="sng" algn="ctr">
-                      <a:solidFill>
-                        <a:srgbClr val="000000"/>
-                      </a:solidFill>
-                      <a:prstDash val="solid"/>
-                      <a:round/>
-                      <a:headEnd type="none" w="med" len="med"/>
-                      <a:tailEnd type="none" w="med" len="med"/>
-                    </a:lnB>
-                    <a:solidFill>
-                      <a:srgbClr val="C1C5D4"/>
-                    </a:solidFill>
-                  </a:tcPr>
-                </a:tc>
-                <a:tc>
-                  <a:txBody>
-                    <a:bodyPr/>
-                    <a:lstStyle/>
-                    <a:p>
-                      <a:pPr algn="l" indent="0" marL="0">
-                        <a:buNone/>
-                      </a:pPr>
-                      <a:r>
-                        <a:rPr lang="en-US" sz="900" u="none" dirty="0">
-                          <a:solidFill>
-                            <a:srgbClr val="000000"/>
-                          </a:solidFill>
-                          <a:latin typeface="Nunito" pitchFamily="34" charset="0"/>
-                          <a:ea typeface="Nunito" pitchFamily="34" charset="-122"/>
-                          <a:cs typeface="Nunito" pitchFamily="34" charset="-120"/>
-                        </a:rPr>
-                        <a:t>Turi</a:t>
                       </a:r>
                       <a:endParaRPr lang="en-US" sz="900" dirty="0">
                         <a:latin typeface="Nunito" charset="0"/>
@@ -5341,6 +8718,74 @@
                     </a:solidFill>
                   </a:tcPr>
                 </a:tc>
+                <a:tc>
+                  <a:txBody>
+                    <a:bodyPr/>
+                    <a:lstStyle/>
+                    <a:p>
+                      <a:pPr algn="l" indent="0" marL="0">
+                        <a:buNone/>
+                      </a:pPr>
+                      <a:r>
+                        <a:rPr lang="en-US" sz="900" u="none" dirty="0">
+                          <a:solidFill>
+                            <a:srgbClr val="000000"/>
+                          </a:solidFill>
+                          <a:latin typeface="Nunito" pitchFamily="34" charset="0"/>
+                          <a:ea typeface="Nunito" pitchFamily="34" charset="-122"/>
+                          <a:cs typeface="Nunito" pitchFamily="34" charset="-120"/>
+                        </a:rPr>
+                        <a:t>Sintomlar</a:t>
+                      </a:r>
+                      <a:endParaRPr lang="en-US" sz="900" dirty="0">
+                        <a:latin typeface="Nunito" charset="0"/>
+                        <a:ea typeface="Nunito" charset="0"/>
+                        <a:cs typeface="Nunito" charset="0"/>
+                      </a:endParaRPr>
+                    </a:p>
+                  </a:txBody>
+                  <a:tcPr marL="91440" marR="91440" marT="45720" marB="45720" anchor="ctr">
+                    <a:lnL w="4763" cap="flat" cmpd="sng" algn="ctr">
+                      <a:solidFill>
+                        <a:srgbClr val="000000"/>
+                      </a:solidFill>
+                      <a:prstDash val="solid"/>
+                      <a:round/>
+                      <a:headEnd type="none" w="med" len="med"/>
+                      <a:tailEnd type="none" w="med" len="med"/>
+                    </a:lnL>
+                    <a:lnR w="4763" cap="flat" cmpd="sng" algn="ctr">
+                      <a:solidFill>
+                        <a:srgbClr val="000000"/>
+                      </a:solidFill>
+                      <a:prstDash val="solid"/>
+                      <a:round/>
+                      <a:headEnd type="none" w="med" len="med"/>
+                      <a:tailEnd type="none" w="med" len="med"/>
+                    </a:lnR>
+                    <a:lnT w="4763" cap="flat" cmpd="sng" algn="ctr">
+                      <a:solidFill>
+                        <a:srgbClr val="000000"/>
+                      </a:solidFill>
+                      <a:prstDash val="solid"/>
+                      <a:round/>
+                      <a:headEnd type="none" w="med" len="med"/>
+                      <a:tailEnd type="none" w="med" len="med"/>
+                    </a:lnT>
+                    <a:lnB w="4763" cap="flat" cmpd="sng" algn="ctr">
+                      <a:solidFill>
+                        <a:srgbClr val="000000"/>
+                      </a:solidFill>
+                      <a:prstDash val="solid"/>
+                      <a:round/>
+                      <a:headEnd type="none" w="med" len="med"/>
+                      <a:tailEnd type="none" w="med" len="med"/>
+                    </a:lnB>
+                    <a:solidFill>
+                      <a:srgbClr val="C1C5D4"/>
+                    </a:solidFill>
+                  </a:tcPr>
+                </a:tc>
               </a:tr>
               <a:tr h="692869">
                 <a:tc>
@@ -5360,7 +8805,7 @@
                           <a:ea typeface="Calibri" pitchFamily="34" charset="-122"/>
                           <a:cs typeface="Calibri" pitchFamily="34" charset="-120"/>
                         </a:rPr>
-                        <a:t>Astrositoma</a:t>
+                        <a:t>Meningioma</a:t>
                       </a:r>
                       <a:endParaRPr lang="en-US" sz="900" dirty="0">
                         <a:latin typeface="Calibri" charset="0"/>
@@ -5425,7 +8870,139 @@
                           <a:ea typeface="Calibri" pitchFamily="34" charset="-122"/>
                           <a:cs typeface="Calibri" pitchFamily="34" charset="-120"/>
                         </a:rPr>
-                        <a:t>Benign</a:t>
+                        <a:t>Meninges</a:t>
+                      </a:r>
+                      <a:endParaRPr lang="en-US" sz="900" dirty="0">
+                        <a:latin typeface="Calibri" charset="0"/>
+                        <a:ea typeface="Calibri" charset="0"/>
+                        <a:cs typeface="Calibri" charset="0"/>
+                      </a:endParaRPr>
+                    </a:p>
+                  </a:txBody>
+                  <a:tcPr marL="91440" marR="91440" marT="45720" marB="45720" anchor="ctr">
+                    <a:lnL w="4763" cap="flat" cmpd="sng" algn="ctr">
+                      <a:solidFill>
+                        <a:srgbClr val="000000"/>
+                      </a:solidFill>
+                      <a:prstDash val="solid"/>
+                      <a:round/>
+                      <a:headEnd type="none" w="med" len="med"/>
+                      <a:tailEnd type="none" w="med" len="med"/>
+                    </a:lnL>
+                    <a:lnR w="4763" cap="flat" cmpd="sng" algn="ctr">
+                      <a:solidFill>
+                        <a:srgbClr val="000000"/>
+                      </a:solidFill>
+                      <a:prstDash val="solid"/>
+                      <a:round/>
+                      <a:headEnd type="none" w="med" len="med"/>
+                      <a:tailEnd type="none" w="med" len="med"/>
+                    </a:lnR>
+                    <a:lnT w="4763" cap="flat" cmpd="sng" algn="ctr">
+                      <a:solidFill>
+                        <a:srgbClr val="000000"/>
+                      </a:solidFill>
+                      <a:prstDash val="solid"/>
+                      <a:round/>
+                      <a:headEnd type="none" w="med" len="med"/>
+                      <a:tailEnd type="none" w="med" len="med"/>
+                    </a:lnT>
+                    <a:lnB w="4763" cap="flat" cmpd="sng" algn="ctr">
+                      <a:solidFill>
+                        <a:srgbClr val="000000"/>
+                      </a:solidFill>
+                      <a:prstDash val="solid"/>
+                      <a:round/>
+                      <a:headEnd type="none" w="med" len="med"/>
+                      <a:tailEnd type="none" w="med" len="med"/>
+                    </a:lnB>
+                  </a:tcPr>
+                </a:tc>
+                <a:tc>
+                  <a:txBody>
+                    <a:bodyPr/>
+                    <a:lstStyle/>
+                    <a:p>
+                      <a:pPr algn="l" indent="0" marL="0">
+                        <a:buNone/>
+                      </a:pPr>
+                      <a:r>
+                        <a:rPr lang="en-US" sz="900" u="none" dirty="0">
+                          <a:solidFill>
+                            <a:srgbClr val="000000"/>
+                          </a:solidFill>
+                          <a:latin typeface="Calibri" pitchFamily="34" charset="0"/>
+                          <a:ea typeface="Calibri" pitchFamily="34" charset="-122"/>
+                          <a:cs typeface="Calibri" pitchFamily="34" charset="-120"/>
+                        </a:rPr>
+                        <a:t>Bosh og'rig'i, ko'rish muammolari</a:t>
+                      </a:r>
+                      <a:endParaRPr lang="en-US" sz="900" dirty="0">
+                        <a:latin typeface="Calibri" charset="0"/>
+                        <a:ea typeface="Calibri" charset="0"/>
+                        <a:cs typeface="Calibri" charset="0"/>
+                      </a:endParaRPr>
+                    </a:p>
+                  </a:txBody>
+                  <a:tcPr marL="91440" marR="91440" marT="45720" marB="45720" anchor="ctr">
+                    <a:lnL w="4763" cap="flat" cmpd="sng" algn="ctr">
+                      <a:solidFill>
+                        <a:srgbClr val="000000"/>
+                      </a:solidFill>
+                      <a:prstDash val="solid"/>
+                      <a:round/>
+                      <a:headEnd type="none" w="med" len="med"/>
+                      <a:tailEnd type="none" w="med" len="med"/>
+                    </a:lnL>
+                    <a:lnR w="4763" cap="flat" cmpd="sng" algn="ctr">
+                      <a:solidFill>
+                        <a:srgbClr val="000000"/>
+                      </a:solidFill>
+                      <a:prstDash val="solid"/>
+                      <a:round/>
+                      <a:headEnd type="none" w="med" len="med"/>
+                      <a:tailEnd type="none" w="med" len="med"/>
+                    </a:lnR>
+                    <a:lnT w="4763" cap="flat" cmpd="sng" algn="ctr">
+                      <a:solidFill>
+                        <a:srgbClr val="000000"/>
+                      </a:solidFill>
+                      <a:prstDash val="solid"/>
+                      <a:round/>
+                      <a:headEnd type="none" w="med" len="med"/>
+                      <a:tailEnd type="none" w="med" len="med"/>
+                    </a:lnT>
+                    <a:lnB w="4763" cap="flat" cmpd="sng" algn="ctr">
+                      <a:solidFill>
+                        <a:srgbClr val="000000"/>
+                      </a:solidFill>
+                      <a:prstDash val="solid"/>
+                      <a:round/>
+                      <a:headEnd type="none" w="med" len="med"/>
+                      <a:tailEnd type="none" w="med" len="med"/>
+                    </a:lnB>
+                  </a:tcPr>
+                </a:tc>
+              </a:tr>
+              <a:tr h="692869">
+                <a:tc>
+                  <a:txBody>
+                    <a:bodyPr/>
+                    <a:lstStyle/>
+                    <a:p>
+                      <a:pPr algn="l" indent="0" marL="0">
+                        <a:buNone/>
+                      </a:pPr>
+                      <a:r>
+                        <a:rPr lang="en-US" sz="900" u="none" dirty="0">
+                          <a:solidFill>
+                            <a:srgbClr val="000000"/>
+                          </a:solidFill>
+                          <a:latin typeface="Calibri" pitchFamily="34" charset="0"/>
+                          <a:ea typeface="Calibri" pitchFamily="34" charset="-122"/>
+                          <a:cs typeface="Calibri" pitchFamily="34" charset="-120"/>
+                        </a:rPr>
+                        <a:t>Astrositoma</a:t>
                       </a:r>
                       <a:endParaRPr lang="en-US" sz="900" dirty="0">
                         <a:latin typeface="Calibri" charset="0"/>
@@ -5538,8 +9115,6 @@
                     </a:lnB>
                   </a:tcPr>
                 </a:tc>
-              </a:tr>
-              <a:tr h="692869">
                 <a:tc>
                   <a:txBody>
                     <a:bodyPr/>
@@ -5557,137 +9132,7 @@
                           <a:ea typeface="Calibri" pitchFamily="34" charset="-122"/>
                           <a:cs typeface="Calibri" pitchFamily="34" charset="-120"/>
                         </a:rPr>
-                        <a:t>Meningioma</a:t>
-                      </a:r>
-                      <a:endParaRPr lang="en-US" sz="900" dirty="0">
-                        <a:latin typeface="Calibri" charset="0"/>
-                        <a:ea typeface="Calibri" charset="0"/>
-                        <a:cs typeface="Calibri" charset="0"/>
-                      </a:endParaRPr>
-                    </a:p>
-                  </a:txBody>
-                  <a:tcPr marL="91440" marR="91440" marT="45720" marB="45720" anchor="ctr">
-                    <a:lnL w="4763" cap="flat" cmpd="sng" algn="ctr">
-                      <a:solidFill>
-                        <a:srgbClr val="000000"/>
-                      </a:solidFill>
-                      <a:prstDash val="solid"/>
-                      <a:round/>
-                      <a:headEnd type="none" w="med" len="med"/>
-                      <a:tailEnd type="none" w="med" len="med"/>
-                    </a:lnL>
-                    <a:lnR w="4763" cap="flat" cmpd="sng" algn="ctr">
-                      <a:solidFill>
-                        <a:srgbClr val="000000"/>
-                      </a:solidFill>
-                      <a:prstDash val="solid"/>
-                      <a:round/>
-                      <a:headEnd type="none" w="med" len="med"/>
-                      <a:tailEnd type="none" w="med" len="med"/>
-                    </a:lnR>
-                    <a:lnT w="4763" cap="flat" cmpd="sng" algn="ctr">
-                      <a:solidFill>
-                        <a:srgbClr val="000000"/>
-                      </a:solidFill>
-                      <a:prstDash val="solid"/>
-                      <a:round/>
-                      <a:headEnd type="none" w="med" len="med"/>
-                      <a:tailEnd type="none" w="med" len="med"/>
-                    </a:lnT>
-                    <a:lnB w="4763" cap="flat" cmpd="sng" algn="ctr">
-                      <a:solidFill>
-                        <a:srgbClr val="000000"/>
-                      </a:solidFill>
-                      <a:prstDash val="solid"/>
-                      <a:round/>
-                      <a:headEnd type="none" w="med" len="med"/>
-                      <a:tailEnd type="none" w="med" len="med"/>
-                    </a:lnB>
-                  </a:tcPr>
-                </a:tc>
-                <a:tc>
-                  <a:txBody>
-                    <a:bodyPr/>
-                    <a:lstStyle/>
-                    <a:p>
-                      <a:pPr algn="l" indent="0" marL="0">
-                        <a:buNone/>
-                      </a:pPr>
-                      <a:r>
-                        <a:rPr lang="en-US" sz="900" u="none" dirty="0">
-                          <a:solidFill>
-                            <a:srgbClr val="000000"/>
-                          </a:solidFill>
-                          <a:latin typeface="Calibri" pitchFamily="34" charset="0"/>
-                          <a:ea typeface="Calibri" pitchFamily="34" charset="-122"/>
-                          <a:cs typeface="Calibri" pitchFamily="34" charset="-120"/>
-                        </a:rPr>
-                        <a:t>Benign</a:t>
-                      </a:r>
-                      <a:endParaRPr lang="en-US" sz="900" dirty="0">
-                        <a:latin typeface="Calibri" charset="0"/>
-                        <a:ea typeface="Calibri" charset="0"/>
-                        <a:cs typeface="Calibri" charset="0"/>
-                      </a:endParaRPr>
-                    </a:p>
-                  </a:txBody>
-                  <a:tcPr marL="91440" marR="91440" marT="45720" marB="45720" anchor="ctr">
-                    <a:lnL w="4763" cap="flat" cmpd="sng" algn="ctr">
-                      <a:solidFill>
-                        <a:srgbClr val="000000"/>
-                      </a:solidFill>
-                      <a:prstDash val="solid"/>
-                      <a:round/>
-                      <a:headEnd type="none" w="med" len="med"/>
-                      <a:tailEnd type="none" w="med" len="med"/>
-                    </a:lnL>
-                    <a:lnR w="4763" cap="flat" cmpd="sng" algn="ctr">
-                      <a:solidFill>
-                        <a:srgbClr val="000000"/>
-                      </a:solidFill>
-                      <a:prstDash val="solid"/>
-                      <a:round/>
-                      <a:headEnd type="none" w="med" len="med"/>
-                      <a:tailEnd type="none" w="med" len="med"/>
-                    </a:lnR>
-                    <a:lnT w="4763" cap="flat" cmpd="sng" algn="ctr">
-                      <a:solidFill>
-                        <a:srgbClr val="000000"/>
-                      </a:solidFill>
-                      <a:prstDash val="solid"/>
-                      <a:round/>
-                      <a:headEnd type="none" w="med" len="med"/>
-                      <a:tailEnd type="none" w="med" len="med"/>
-                    </a:lnT>
-                    <a:lnB w="4763" cap="flat" cmpd="sng" algn="ctr">
-                      <a:solidFill>
-                        <a:srgbClr val="000000"/>
-                      </a:solidFill>
-                      <a:prstDash val="solid"/>
-                      <a:round/>
-                      <a:headEnd type="none" w="med" len="med"/>
-                      <a:tailEnd type="none" w="med" len="med"/>
-                    </a:lnB>
-                  </a:tcPr>
-                </a:tc>
-                <a:tc>
-                  <a:txBody>
-                    <a:bodyPr/>
-                    <a:lstStyle/>
-                    <a:p>
-                      <a:pPr algn="l" indent="0" marL="0">
-                        <a:buNone/>
-                      </a:pPr>
-                      <a:r>
-                        <a:rPr lang="en-US" sz="900" u="none" dirty="0">
-                          <a:solidFill>
-                            <a:srgbClr val="000000"/>
-                          </a:solidFill>
-                          <a:latin typeface="Calibri" pitchFamily="34" charset="0"/>
-                          <a:ea typeface="Calibri" pitchFamily="34" charset="-122"/>
-                          <a:cs typeface="Calibri" pitchFamily="34" charset="-120"/>
-                        </a:rPr>
-                        <a:t>Miya qoplamasi</a:t>
+                        <a:t>Kognitiv o'zgarishlar, o'zini tutish muammolari</a:t>
                       </a:r>
                       <a:endParaRPr lang="en-US" sz="900" dirty="0">
                         <a:latin typeface="Calibri" charset="0"/>
@@ -5754,7 +9199,7 @@
                           <a:ea typeface="Calibri" pitchFamily="34" charset="-122"/>
                           <a:cs typeface="Calibri" pitchFamily="34" charset="-120"/>
                         </a:rPr>
-                        <a:t>Neuroblastoma</a:t>
+                        <a:t>Glioblastoma</a:t>
                       </a:r>
                       <a:endParaRPr lang="en-US" sz="900" dirty="0">
                         <a:latin typeface="Calibri" charset="0"/>
@@ -5819,7 +9264,7 @@
                           <a:ea typeface="Calibri" pitchFamily="34" charset="-122"/>
                           <a:cs typeface="Calibri" pitchFamily="34" charset="-120"/>
                         </a:rPr>
-                        <a:t>Malign</a:t>
+                        <a:t>Miya</a:t>
                       </a:r>
                       <a:endParaRPr lang="en-US" sz="900" dirty="0">
                         <a:latin typeface="Calibri" charset="0"/>
@@ -5884,7 +9329,7 @@
                           <a:ea typeface="Calibri" pitchFamily="34" charset="-122"/>
                           <a:cs typeface="Calibri" pitchFamily="34" charset="-120"/>
                         </a:rPr>
-                        <a:t>Nerv tizimi</a:t>
+                        <a:t>Tez o'sish, bosh og'rig'i, muvofiqlik yo'qligi</a:t>
                       </a:r>
                       <a:endParaRPr lang="en-US" sz="900" dirty="0">
                         <a:latin typeface="Calibri" charset="0"/>
@@ -6090,7 +9535,7 @@
                 <a:ea typeface="Caveat Brush" pitchFamily="34" charset="-122"/>
                 <a:cs typeface="Caveat Brush" pitchFamily="34" charset="-120"/>
               </a:rPr>
-              <a:t>Nerv tizimi o'smalari turlari</a:t>
+              <a:t>Nerv tizimining o'smalari haqida ma'lumotlar</a:t>
             </a:r>
             <a:endParaRPr lang="en-US" sz="1050" dirty="0"/>
           </a:p>
@@ -6510,3451 +9955,6 @@
           </a:prstGeom>
         </p:spPr>
       </p:pic>
-    </p:spTree>
-  </p:cSld>
-  <p:clrMapOvr>
-    <a:masterClrMapping/>
-  </p:clrMapOvr>
-</p:sld>
-</file>
-
-<file path=ppt/slides/slide4.xml><?xml version="1.0" encoding="utf-8"?>
-<p:sld xmlns:a="http://schemas.openxmlformats.org/drawingml/2006/main" xmlns:r="http://schemas.openxmlformats.org/officeDocument/2006/relationships" xmlns:p="http://schemas.openxmlformats.org/presentationml/2006/main">
-  <p:cSld name="Slide 4">
-    <p:bg>
-      <p:bgPr>
-        <a:solidFill>
-          <a:srgbClr val="F1F1F1"/>
-        </a:solidFill>
-      </p:bgPr>
-    </p:bg>
-    <p:spTree>
-      <p:nvGrpSpPr>
-        <p:cNvPr id="1" name=""/>
-        <p:cNvGrpSpPr/>
-        <p:nvPr/>
-      </p:nvGrpSpPr>
-      <p:grpSpPr>
-        <a:xfrm>
-          <a:off x="0" y="0"/>
-          <a:ext cx="0" cy="0"/>
-          <a:chOff x="0" y="0"/>
-          <a:chExt cx="0" cy="0"/>
-        </a:xfrm>
-      </p:grpSpPr>
-      <p:pic>
-        <p:nvPicPr>
-          <p:cNvPr id="2" name="Image 0" descr="./images\slide5_img56.png">    </p:cNvPr>
-          <p:cNvPicPr>
-            <a:picLocks noChangeAspect="1"/>
-          </p:cNvPicPr>
-          <p:nvPr/>
-        </p:nvPicPr>
-        <p:blipFill>
-          <a:blip r:embed="rId1"/>
-          <a:stretch>
-            <a:fillRect/>
-          </a:stretch>
-        </p:blipFill>
-        <p:spPr>
-          <a:xfrm>
-            <a:off x="0" y="0"/>
-            <a:ext cx="9144000" cy="5143500"/>
-          </a:xfrm>
-          <a:prstGeom prst="rect">
-            <a:avLst/>
-          </a:prstGeom>
-        </p:spPr>
-      </p:pic>
-      <p:pic>
-        <p:nvPicPr>
-          <p:cNvPr id="3" name="Image 1" descr="./images\slide5_img57.png">    </p:cNvPr>
-          <p:cNvPicPr>
-            <a:picLocks noChangeAspect="1"/>
-          </p:cNvPicPr>
-          <p:nvPr/>
-        </p:nvPicPr>
-        <p:blipFill>
-          <a:blip r:embed="rId2"/>
-          <a:stretch>
-            <a:fillRect/>
-          </a:stretch>
-        </p:blipFill>
-        <p:spPr>
-          <a:xfrm>
-            <a:off x="3385895" y="1452747"/>
-            <a:ext cx="2299344" cy="2299344"/>
-          </a:xfrm>
-          <a:prstGeom prst="rect">
-            <a:avLst/>
-          </a:prstGeom>
-        </p:spPr>
-      </p:pic>
-      <p:sp>
-        <p:nvSpPr>
-          <p:cNvPr id="4" name="Shape 0"/>
-          <p:cNvSpPr/>
-          <p:nvPr/>
-        </p:nvSpPr>
-        <p:spPr>
-          <a:xfrm>
-            <a:off x="3385895" y="1452747"/>
-            <a:ext cx="2299344" cy="2299344"/>
-          </a:xfrm>
-          <a:custGeom>
-            <a:avLst/>
-            <a:gdLst/>
-            <a:ahLst/>
-            <a:cxnLst/>
-            <a:rect l="l" t="t" r="r" b="b"/>
-            <a:pathLst>
-              <a:path w="2299344" h="2299344">
-                <a:moveTo>
-                  <a:pt x="0" y="0"/>
-                </a:moveTo>
-                <a:lnTo>
-                  <a:pt x="2299344" y="0"/>
-                </a:lnTo>
-                <a:lnTo>
-                  <a:pt x="2299344" y="2299344"/>
-                </a:lnTo>
-                <a:lnTo>
-                  <a:pt x="0" y="2299344"/>
-                </a:lnTo>
-                <a:close/>
-              </a:path>
-            </a:pathLst>
-          </a:custGeom>
-          <a:solidFill>
-            <a:srgbClr val="FFFFFF">
-              <a:alpha val="0"/>
-            </a:srgbClr>
-          </a:solidFill>
-          <a:ln/>
-        </p:spPr>
-      </p:sp>
-      <p:sp>
-        <p:nvSpPr>
-          <p:cNvPr id="5" name="Text 1"/>
-          <p:cNvSpPr/>
-          <p:nvPr/>
-        </p:nvSpPr>
-        <p:spPr>
-          <a:xfrm>
-            <a:off x="3385895" y="1452747"/>
-            <a:ext cx="2299344" cy="2299344"/>
-          </a:xfrm>
-          <a:prstGeom prst="rect">
-            <a:avLst/>
-          </a:prstGeom>
-          <a:noFill/>
-          <a:ln/>
-        </p:spPr>
-        <p:txBody>
-          <a:bodyPr wrap="square" rtlCol="0" anchor="t"/>
-          <a:lstStyle/>
-          <a:p>
-            <a:pPr indent="0" marL="0">
-              <a:spcBef>
-                <a:spcPts val="375"/>
-              </a:spcBef>
-              <a:buNone/>
-            </a:pPr>
-            <a:endParaRPr lang="en-US" sz="1050" dirty="0"/>
-          </a:p>
-        </p:txBody>
-      </p:sp>
-      <p:sp>
-        <p:nvSpPr>
-          <p:cNvPr id="6" name="Shape 2"/>
-          <p:cNvSpPr/>
-          <p:nvPr/>
-        </p:nvSpPr>
-        <p:spPr>
-          <a:xfrm>
-            <a:off x="3385895" y="1452747"/>
-            <a:ext cx="2299344" cy="2299344"/>
-          </a:xfrm>
-          <a:custGeom>
-            <a:avLst/>
-            <a:gdLst/>
-            <a:ahLst/>
-            <a:cxnLst/>
-            <a:rect l="l" t="t" r="r" b="b"/>
-            <a:pathLst>
-              <a:path w="2299344" h="2299344">
-                <a:moveTo>
-                  <a:pt x="0" y="0"/>
-                </a:moveTo>
-                <a:lnTo>
-                  <a:pt x="2299344" y="0"/>
-                </a:lnTo>
-                <a:lnTo>
-                  <a:pt x="2299344" y="2299344"/>
-                </a:lnTo>
-                <a:lnTo>
-                  <a:pt x="0" y="2299344"/>
-                </a:lnTo>
-                <a:close/>
-              </a:path>
-            </a:pathLst>
-          </a:custGeom>
-          <a:solidFill>
-            <a:srgbClr val="000000">
-              <a:alpha val="0"/>
-            </a:srgbClr>
-          </a:solidFill>
-          <a:ln/>
-        </p:spPr>
-      </p:sp>
-      <p:sp>
-        <p:nvSpPr>
-          <p:cNvPr id="7" name="Text 3"/>
-          <p:cNvSpPr/>
-          <p:nvPr/>
-        </p:nvSpPr>
-        <p:spPr>
-          <a:xfrm>
-            <a:off x="3385895" y="1452747"/>
-            <a:ext cx="2299344" cy="2299344"/>
-          </a:xfrm>
-          <a:prstGeom prst="rect">
-            <a:avLst/>
-          </a:prstGeom>
-          <a:noFill/>
-          <a:ln/>
-        </p:spPr>
-        <p:txBody>
-          <a:bodyPr wrap="square" rtlCol="0" anchor="t"/>
-          <a:lstStyle/>
-          <a:p>
-            <a:pPr algn="l" indent="0" marL="0">
-              <a:spcBef>
-                <a:spcPts val="375"/>
-              </a:spcBef>
-              <a:buNone/>
-            </a:pPr>
-            <a:r>
-              <a:rPr lang="en-US" sz="1800" dirty="0">
-                <a:solidFill>
-                  <a:srgbClr val="000000"/>
-                </a:solidFill>
-                <a:latin typeface="Calibri" pitchFamily="34" charset="0"/>
-                <a:ea typeface="Calibri" pitchFamily="34" charset="-122"/>
-                <a:cs typeface="Calibri" pitchFamily="34" charset="-120"/>
-              </a:rPr>
-              <a:t> </a:t>
-            </a:r>
-            <a:endParaRPr lang="en-US" sz="1050" dirty="0"/>
-          </a:p>
-        </p:txBody>
-      </p:sp>
-      <p:pic>
-        <p:nvPicPr>
-          <p:cNvPr id="8" name="Image 2" descr="./images\slide5_img58.png">    </p:cNvPr>
-          <p:cNvPicPr>
-            <a:picLocks noChangeAspect="1"/>
-          </p:cNvPicPr>
-          <p:nvPr/>
-        </p:nvPicPr>
-        <p:blipFill>
-          <a:blip r:embed="rId3"/>
-          <a:stretch>
-            <a:fillRect/>
-          </a:stretch>
-        </p:blipFill>
-        <p:spPr>
-          <a:xfrm>
-            <a:off x="3385895" y="1452747"/>
-            <a:ext cx="2299344" cy="2299344"/>
-          </a:xfrm>
-          <a:prstGeom prst="rect">
-            <a:avLst/>
-          </a:prstGeom>
-        </p:spPr>
-      </p:pic>
-      <p:pic>
-        <p:nvPicPr>
-          <p:cNvPr id="9" name="Image 3" descr="./images\slide5_img59.png">    </p:cNvPr>
-          <p:cNvPicPr>
-            <a:picLocks noChangeAspect="1"/>
-          </p:cNvPicPr>
-          <p:nvPr/>
-        </p:nvPicPr>
-        <p:blipFill>
-          <a:blip r:embed="rId4"/>
-          <a:stretch>
-            <a:fillRect/>
-          </a:stretch>
-        </p:blipFill>
-        <p:spPr>
-          <a:xfrm>
-            <a:off x="6193097" y="1452747"/>
-            <a:ext cx="2299344" cy="2299344"/>
-          </a:xfrm>
-          <a:prstGeom prst="rect">
-            <a:avLst/>
-          </a:prstGeom>
-        </p:spPr>
-      </p:pic>
-      <p:sp>
-        <p:nvSpPr>
-          <p:cNvPr id="10" name="Shape 4"/>
-          <p:cNvSpPr/>
-          <p:nvPr/>
-        </p:nvSpPr>
-        <p:spPr>
-          <a:xfrm>
-            <a:off x="6193097" y="1452747"/>
-            <a:ext cx="2299344" cy="2299344"/>
-          </a:xfrm>
-          <a:custGeom>
-            <a:avLst/>
-            <a:gdLst/>
-            <a:ahLst/>
-            <a:cxnLst/>
-            <a:rect l="l" t="t" r="r" b="b"/>
-            <a:pathLst>
-              <a:path w="2299344" h="2299344">
-                <a:moveTo>
-                  <a:pt x="0" y="0"/>
-                </a:moveTo>
-                <a:lnTo>
-                  <a:pt x="2299344" y="0"/>
-                </a:lnTo>
-                <a:lnTo>
-                  <a:pt x="2299344" y="2299344"/>
-                </a:lnTo>
-                <a:lnTo>
-                  <a:pt x="0" y="2299344"/>
-                </a:lnTo>
-                <a:close/>
-              </a:path>
-            </a:pathLst>
-          </a:custGeom>
-          <a:solidFill>
-            <a:srgbClr val="FFFFFF">
-              <a:alpha val="0"/>
-            </a:srgbClr>
-          </a:solidFill>
-          <a:ln/>
-        </p:spPr>
-      </p:sp>
-      <p:sp>
-        <p:nvSpPr>
-          <p:cNvPr id="11" name="Text 5"/>
-          <p:cNvSpPr/>
-          <p:nvPr/>
-        </p:nvSpPr>
-        <p:spPr>
-          <a:xfrm>
-            <a:off x="6193097" y="1452747"/>
-            <a:ext cx="2299344" cy="2299344"/>
-          </a:xfrm>
-          <a:prstGeom prst="rect">
-            <a:avLst/>
-          </a:prstGeom>
-          <a:noFill/>
-          <a:ln/>
-        </p:spPr>
-        <p:txBody>
-          <a:bodyPr wrap="square" rtlCol="0" anchor="t"/>
-          <a:lstStyle/>
-          <a:p>
-            <a:pPr indent="0" marL="0">
-              <a:spcBef>
-                <a:spcPts val="375"/>
-              </a:spcBef>
-              <a:buNone/>
-            </a:pPr>
-            <a:endParaRPr lang="en-US" sz="1050" dirty="0"/>
-          </a:p>
-        </p:txBody>
-      </p:sp>
-      <p:sp>
-        <p:nvSpPr>
-          <p:cNvPr id="12" name="Shape 6"/>
-          <p:cNvSpPr/>
-          <p:nvPr/>
-        </p:nvSpPr>
-        <p:spPr>
-          <a:xfrm>
-            <a:off x="6193097" y="1452747"/>
-            <a:ext cx="2299344" cy="2299344"/>
-          </a:xfrm>
-          <a:custGeom>
-            <a:avLst/>
-            <a:gdLst/>
-            <a:ahLst/>
-            <a:cxnLst/>
-            <a:rect l="l" t="t" r="r" b="b"/>
-            <a:pathLst>
-              <a:path w="2299344" h="2299344">
-                <a:moveTo>
-                  <a:pt x="0" y="0"/>
-                </a:moveTo>
-                <a:lnTo>
-                  <a:pt x="2299344" y="0"/>
-                </a:lnTo>
-                <a:lnTo>
-                  <a:pt x="2299344" y="2299344"/>
-                </a:lnTo>
-                <a:lnTo>
-                  <a:pt x="0" y="2299344"/>
-                </a:lnTo>
-                <a:close/>
-              </a:path>
-            </a:pathLst>
-          </a:custGeom>
-          <a:solidFill>
-            <a:srgbClr val="000000">
-              <a:alpha val="0"/>
-            </a:srgbClr>
-          </a:solidFill>
-          <a:ln/>
-        </p:spPr>
-      </p:sp>
-      <p:sp>
-        <p:nvSpPr>
-          <p:cNvPr id="13" name="Text 7"/>
-          <p:cNvSpPr/>
-          <p:nvPr/>
-        </p:nvSpPr>
-        <p:spPr>
-          <a:xfrm>
-            <a:off x="6193097" y="1452747"/>
-            <a:ext cx="2299344" cy="2299344"/>
-          </a:xfrm>
-          <a:prstGeom prst="rect">
-            <a:avLst/>
-          </a:prstGeom>
-          <a:noFill/>
-          <a:ln/>
-        </p:spPr>
-        <p:txBody>
-          <a:bodyPr wrap="square" rtlCol="0" anchor="t"/>
-          <a:lstStyle/>
-          <a:p>
-            <a:pPr algn="l" indent="0" marL="0">
-              <a:spcBef>
-                <a:spcPts val="375"/>
-              </a:spcBef>
-              <a:buNone/>
-            </a:pPr>
-            <a:r>
-              <a:rPr lang="en-US" sz="1800" dirty="0">
-                <a:solidFill>
-                  <a:srgbClr val="000000"/>
-                </a:solidFill>
-                <a:latin typeface="Calibri" pitchFamily="34" charset="0"/>
-                <a:ea typeface="Calibri" pitchFamily="34" charset="-122"/>
-                <a:cs typeface="Calibri" pitchFamily="34" charset="-120"/>
-              </a:rPr>
-              <a:t> </a:t>
-            </a:r>
-            <a:endParaRPr lang="en-US" sz="1050" dirty="0"/>
-          </a:p>
-        </p:txBody>
-      </p:sp>
-      <p:pic>
-        <p:nvPicPr>
-          <p:cNvPr id="14" name="Image 4" descr="./images\slide5_img60.png">    </p:cNvPr>
-          <p:cNvPicPr>
-            <a:picLocks noChangeAspect="1"/>
-          </p:cNvPicPr>
-          <p:nvPr/>
-        </p:nvPicPr>
-        <p:blipFill>
-          <a:blip r:embed="rId5"/>
-          <a:stretch>
-            <a:fillRect/>
-          </a:stretch>
-        </p:blipFill>
-        <p:spPr>
-          <a:xfrm>
-            <a:off x="6193097" y="1452747"/>
-            <a:ext cx="2299344" cy="2299344"/>
-          </a:xfrm>
-          <a:prstGeom prst="rect">
-            <a:avLst/>
-          </a:prstGeom>
-        </p:spPr>
-      </p:pic>
-      <p:pic>
-        <p:nvPicPr>
-          <p:cNvPr id="15" name="Image 5" descr="./images\slide5_img61.png">    </p:cNvPr>
-          <p:cNvPicPr>
-            <a:picLocks noChangeAspect="1"/>
-          </p:cNvPicPr>
-          <p:nvPr/>
-        </p:nvPicPr>
-        <p:blipFill>
-          <a:blip r:embed="rId6"/>
-          <a:stretch>
-            <a:fillRect/>
-          </a:stretch>
-        </p:blipFill>
-        <p:spPr>
-          <a:xfrm>
-            <a:off x="651178" y="1452747"/>
-            <a:ext cx="2299344" cy="2299344"/>
-          </a:xfrm>
-          <a:prstGeom prst="rect">
-            <a:avLst/>
-          </a:prstGeom>
-        </p:spPr>
-      </p:pic>
-      <p:sp>
-        <p:nvSpPr>
-          <p:cNvPr id="16" name="Shape 8"/>
-          <p:cNvSpPr/>
-          <p:nvPr/>
-        </p:nvSpPr>
-        <p:spPr>
-          <a:xfrm>
-            <a:off x="651178" y="1452747"/>
-            <a:ext cx="2299344" cy="2299344"/>
-          </a:xfrm>
-          <a:custGeom>
-            <a:avLst/>
-            <a:gdLst/>
-            <a:ahLst/>
-            <a:cxnLst/>
-            <a:rect l="l" t="t" r="r" b="b"/>
-            <a:pathLst>
-              <a:path w="2299344" h="2299344">
-                <a:moveTo>
-                  <a:pt x="0" y="0"/>
-                </a:moveTo>
-                <a:lnTo>
-                  <a:pt x="2299344" y="0"/>
-                </a:lnTo>
-                <a:lnTo>
-                  <a:pt x="2299344" y="2299344"/>
-                </a:lnTo>
-                <a:lnTo>
-                  <a:pt x="0" y="2299344"/>
-                </a:lnTo>
-                <a:close/>
-              </a:path>
-            </a:pathLst>
-          </a:custGeom>
-          <a:solidFill>
-            <a:srgbClr val="FFFFFF">
-              <a:alpha val="0"/>
-            </a:srgbClr>
-          </a:solidFill>
-          <a:ln/>
-        </p:spPr>
-      </p:sp>
-      <p:sp>
-        <p:nvSpPr>
-          <p:cNvPr id="17" name="Text 9"/>
-          <p:cNvSpPr/>
-          <p:nvPr/>
-        </p:nvSpPr>
-        <p:spPr>
-          <a:xfrm>
-            <a:off x="651178" y="1452747"/>
-            <a:ext cx="2299344" cy="2299344"/>
-          </a:xfrm>
-          <a:prstGeom prst="rect">
-            <a:avLst/>
-          </a:prstGeom>
-          <a:noFill/>
-          <a:ln/>
-        </p:spPr>
-        <p:txBody>
-          <a:bodyPr wrap="square" rtlCol="0" anchor="t"/>
-          <a:lstStyle/>
-          <a:p>
-            <a:pPr indent="0" marL="0">
-              <a:spcBef>
-                <a:spcPts val="375"/>
-              </a:spcBef>
-              <a:buNone/>
-            </a:pPr>
-            <a:endParaRPr lang="en-US" sz="1050" dirty="0"/>
-          </a:p>
-        </p:txBody>
-      </p:sp>
-      <p:sp>
-        <p:nvSpPr>
-          <p:cNvPr id="18" name="Shape 10"/>
-          <p:cNvSpPr/>
-          <p:nvPr/>
-        </p:nvSpPr>
-        <p:spPr>
-          <a:xfrm>
-            <a:off x="651178" y="1452747"/>
-            <a:ext cx="2299344" cy="2299344"/>
-          </a:xfrm>
-          <a:custGeom>
-            <a:avLst/>
-            <a:gdLst/>
-            <a:ahLst/>
-            <a:cxnLst/>
-            <a:rect l="l" t="t" r="r" b="b"/>
-            <a:pathLst>
-              <a:path w="2299344" h="2299344">
-                <a:moveTo>
-                  <a:pt x="0" y="0"/>
-                </a:moveTo>
-                <a:lnTo>
-                  <a:pt x="2299344" y="0"/>
-                </a:lnTo>
-                <a:lnTo>
-                  <a:pt x="2299344" y="2299344"/>
-                </a:lnTo>
-                <a:lnTo>
-                  <a:pt x="0" y="2299344"/>
-                </a:lnTo>
-                <a:close/>
-              </a:path>
-            </a:pathLst>
-          </a:custGeom>
-          <a:solidFill>
-            <a:srgbClr val="000000">
-              <a:alpha val="0"/>
-            </a:srgbClr>
-          </a:solidFill>
-          <a:ln/>
-        </p:spPr>
-      </p:sp>
-      <p:sp>
-        <p:nvSpPr>
-          <p:cNvPr id="19" name="Text 11"/>
-          <p:cNvSpPr/>
-          <p:nvPr/>
-        </p:nvSpPr>
-        <p:spPr>
-          <a:xfrm>
-            <a:off x="651178" y="1452747"/>
-            <a:ext cx="2299344" cy="2299344"/>
-          </a:xfrm>
-          <a:prstGeom prst="rect">
-            <a:avLst/>
-          </a:prstGeom>
-          <a:noFill/>
-          <a:ln/>
-        </p:spPr>
-        <p:txBody>
-          <a:bodyPr wrap="square" rtlCol="0" anchor="t"/>
-          <a:lstStyle/>
-          <a:p>
-            <a:pPr algn="l" indent="0" marL="0">
-              <a:spcBef>
-                <a:spcPts val="375"/>
-              </a:spcBef>
-              <a:buNone/>
-            </a:pPr>
-            <a:r>
-              <a:rPr lang="en-US" sz="1800" dirty="0">
-                <a:solidFill>
-                  <a:srgbClr val="000000"/>
-                </a:solidFill>
-                <a:latin typeface="Calibri" pitchFamily="34" charset="0"/>
-                <a:ea typeface="Calibri" pitchFamily="34" charset="-122"/>
-                <a:cs typeface="Calibri" pitchFamily="34" charset="-120"/>
-              </a:rPr>
-              <a:t> </a:t>
-            </a:r>
-            <a:endParaRPr lang="en-US" sz="1050" dirty="0"/>
-          </a:p>
-        </p:txBody>
-      </p:sp>
-      <p:pic>
-        <p:nvPicPr>
-          <p:cNvPr id="20" name="Image 6" descr="./images\slide5_img62.png">    </p:cNvPr>
-          <p:cNvPicPr>
-            <a:picLocks noChangeAspect="1"/>
-          </p:cNvPicPr>
-          <p:nvPr/>
-        </p:nvPicPr>
-        <p:blipFill>
-          <a:blip r:embed="rId7"/>
-          <a:stretch>
-            <a:fillRect/>
-          </a:stretch>
-        </p:blipFill>
-        <p:spPr>
-          <a:xfrm>
-            <a:off x="651178" y="1452747"/>
-            <a:ext cx="2299344" cy="2299344"/>
-          </a:xfrm>
-          <a:prstGeom prst="rect">
-            <a:avLst/>
-          </a:prstGeom>
-        </p:spPr>
-      </p:pic>
-      <p:pic>
-        <p:nvPicPr>
-          <p:cNvPr id="21" name="Image 7" descr="./images\slide5_img63.png">    </p:cNvPr>
-          <p:cNvPicPr>
-            <a:picLocks noChangeAspect="1"/>
-          </p:cNvPicPr>
-          <p:nvPr/>
-        </p:nvPicPr>
-        <p:blipFill>
-          <a:blip r:embed="rId8"/>
-          <a:stretch>
-            <a:fillRect/>
-          </a:stretch>
-        </p:blipFill>
-        <p:spPr>
-          <a:xfrm>
-            <a:off x="551228" y="1377789"/>
-            <a:ext cx="2499245" cy="2449260"/>
-          </a:xfrm>
-          <a:prstGeom prst="rect">
-            <a:avLst/>
-          </a:prstGeom>
-        </p:spPr>
-      </p:pic>
-      <p:sp>
-        <p:nvSpPr>
-          <p:cNvPr id="22" name="Shape 12"/>
-          <p:cNvSpPr/>
-          <p:nvPr/>
-        </p:nvSpPr>
-        <p:spPr>
-          <a:xfrm>
-            <a:off x="551228" y="1377789"/>
-            <a:ext cx="2499245" cy="2449260"/>
-          </a:xfrm>
-          <a:custGeom>
-            <a:avLst/>
-            <a:gdLst/>
-            <a:ahLst/>
-            <a:cxnLst/>
-            <a:rect l="l" t="t" r="r" b="b"/>
-            <a:pathLst>
-              <a:path w="2499245" h="2449260">
-                <a:moveTo>
-                  <a:pt x="0" y="0"/>
-                </a:moveTo>
-                <a:lnTo>
-                  <a:pt x="2499245" y="0"/>
-                </a:lnTo>
-                <a:lnTo>
-                  <a:pt x="2499245" y="2449260"/>
-                </a:lnTo>
-                <a:lnTo>
-                  <a:pt x="0" y="2449260"/>
-                </a:lnTo>
-                <a:close/>
-              </a:path>
-            </a:pathLst>
-          </a:custGeom>
-          <a:solidFill>
-            <a:srgbClr val="FFFFFF">
-              <a:alpha val="0"/>
-            </a:srgbClr>
-          </a:solidFill>
-          <a:ln/>
-        </p:spPr>
-      </p:sp>
-      <p:sp>
-        <p:nvSpPr>
-          <p:cNvPr id="23" name="Text 13"/>
-          <p:cNvSpPr/>
-          <p:nvPr/>
-        </p:nvSpPr>
-        <p:spPr>
-          <a:xfrm>
-            <a:off x="551228" y="1377789"/>
-            <a:ext cx="2499245" cy="2449260"/>
-          </a:xfrm>
-          <a:prstGeom prst="rect">
-            <a:avLst/>
-          </a:prstGeom>
-          <a:noFill/>
-          <a:ln/>
-        </p:spPr>
-        <p:txBody>
-          <a:bodyPr wrap="square" rtlCol="0" anchor="t"/>
-          <a:lstStyle/>
-          <a:p>
-            <a:pPr indent="0" marL="0">
-              <a:spcBef>
-                <a:spcPts val="375"/>
-              </a:spcBef>
-              <a:buNone/>
-            </a:pPr>
-            <a:endParaRPr lang="en-US" sz="1050" dirty="0"/>
-          </a:p>
-        </p:txBody>
-      </p:sp>
-      <p:sp>
-        <p:nvSpPr>
-          <p:cNvPr id="24" name="Shape 14"/>
-          <p:cNvSpPr/>
-          <p:nvPr/>
-        </p:nvSpPr>
-        <p:spPr>
-          <a:xfrm>
-            <a:off x="551228" y="1377789"/>
-            <a:ext cx="2499245" cy="2449260"/>
-          </a:xfrm>
-          <a:custGeom>
-            <a:avLst/>
-            <a:gdLst/>
-            <a:ahLst/>
-            <a:cxnLst/>
-            <a:rect l="l" t="t" r="r" b="b"/>
-            <a:pathLst>
-              <a:path w="2499245" h="2449260">
-                <a:moveTo>
-                  <a:pt x="0" y="0"/>
-                </a:moveTo>
-                <a:lnTo>
-                  <a:pt x="2499245" y="0"/>
-                </a:lnTo>
-                <a:lnTo>
-                  <a:pt x="2499245" y="2449260"/>
-                </a:lnTo>
-                <a:lnTo>
-                  <a:pt x="0" y="2449260"/>
-                </a:lnTo>
-                <a:close/>
-              </a:path>
-            </a:pathLst>
-          </a:custGeom>
-          <a:solidFill>
-            <a:srgbClr val="000000">
-              <a:alpha val="0"/>
-            </a:srgbClr>
-          </a:solidFill>
-          <a:ln/>
-        </p:spPr>
-      </p:sp>
-      <p:sp>
-        <p:nvSpPr>
-          <p:cNvPr id="25" name="Text 15"/>
-          <p:cNvSpPr/>
-          <p:nvPr/>
-        </p:nvSpPr>
-        <p:spPr>
-          <a:xfrm>
-            <a:off x="551228" y="1377789"/>
-            <a:ext cx="2499245" cy="2449260"/>
-          </a:xfrm>
-          <a:prstGeom prst="rect">
-            <a:avLst/>
-          </a:prstGeom>
-          <a:noFill/>
-          <a:ln/>
-        </p:spPr>
-        <p:txBody>
-          <a:bodyPr wrap="square" rtlCol="0" anchor="t"/>
-          <a:lstStyle/>
-          <a:p>
-            <a:pPr algn="l" indent="0" marL="0">
-              <a:spcBef>
-                <a:spcPts val="375"/>
-              </a:spcBef>
-              <a:buNone/>
-            </a:pPr>
-            <a:r>
-              <a:rPr lang="en-US" sz="1800" dirty="0">
-                <a:solidFill>
-                  <a:srgbClr val="000000"/>
-                </a:solidFill>
-                <a:latin typeface="Calibri" pitchFamily="34" charset="0"/>
-                <a:ea typeface="Calibri" pitchFamily="34" charset="-122"/>
-                <a:cs typeface="Calibri" pitchFamily="34" charset="-120"/>
-              </a:rPr>
-              <a:t> </a:t>
-            </a:r>
-            <a:endParaRPr lang="en-US" sz="1050" dirty="0"/>
-          </a:p>
-        </p:txBody>
-      </p:sp>
-      <p:pic>
-        <p:nvPicPr>
-          <p:cNvPr id="26" name="Image 8" descr="./images\slide5_img64.png">    </p:cNvPr>
-          <p:cNvPicPr>
-            <a:picLocks noChangeAspect="1"/>
-          </p:cNvPicPr>
-          <p:nvPr/>
-        </p:nvPicPr>
-        <p:blipFill>
-          <a:blip r:embed="rId9"/>
-          <a:stretch>
-            <a:fillRect/>
-          </a:stretch>
-        </p:blipFill>
-        <p:spPr>
-          <a:xfrm>
-            <a:off x="551228" y="1377789"/>
-            <a:ext cx="2499245" cy="2449260"/>
-          </a:xfrm>
-          <a:prstGeom prst="rect">
-            <a:avLst/>
-          </a:prstGeom>
-        </p:spPr>
-      </p:pic>
-      <p:pic>
-        <p:nvPicPr>
-          <p:cNvPr id="27" name="Image 9" descr="./images\slide5_img65.png">    </p:cNvPr>
-          <p:cNvPicPr>
-            <a:picLocks noChangeAspect="1"/>
-          </p:cNvPicPr>
-          <p:nvPr/>
-        </p:nvPicPr>
-        <p:blipFill>
-          <a:blip r:embed="rId10"/>
-          <a:stretch>
-            <a:fillRect/>
-          </a:stretch>
-        </p:blipFill>
-        <p:spPr>
-          <a:xfrm>
-            <a:off x="3322378" y="1377789"/>
-            <a:ext cx="2499245" cy="2449260"/>
-          </a:xfrm>
-          <a:prstGeom prst="rect">
-            <a:avLst/>
-          </a:prstGeom>
-        </p:spPr>
-      </p:pic>
-      <p:sp>
-        <p:nvSpPr>
-          <p:cNvPr id="28" name="Shape 16"/>
-          <p:cNvSpPr/>
-          <p:nvPr/>
-        </p:nvSpPr>
-        <p:spPr>
-          <a:xfrm>
-            <a:off x="3322378" y="1377789"/>
-            <a:ext cx="2499245" cy="2449260"/>
-          </a:xfrm>
-          <a:custGeom>
-            <a:avLst/>
-            <a:gdLst/>
-            <a:ahLst/>
-            <a:cxnLst/>
-            <a:rect l="l" t="t" r="r" b="b"/>
-            <a:pathLst>
-              <a:path w="2499245" h="2449260">
-                <a:moveTo>
-                  <a:pt x="0" y="0"/>
-                </a:moveTo>
-                <a:lnTo>
-                  <a:pt x="2499245" y="0"/>
-                </a:lnTo>
-                <a:lnTo>
-                  <a:pt x="2499245" y="2449260"/>
-                </a:lnTo>
-                <a:lnTo>
-                  <a:pt x="0" y="2449260"/>
-                </a:lnTo>
-                <a:close/>
-              </a:path>
-            </a:pathLst>
-          </a:custGeom>
-          <a:solidFill>
-            <a:srgbClr val="FFFFFF">
-              <a:alpha val="0"/>
-            </a:srgbClr>
-          </a:solidFill>
-          <a:ln/>
-        </p:spPr>
-      </p:sp>
-      <p:sp>
-        <p:nvSpPr>
-          <p:cNvPr id="29" name="Text 17"/>
-          <p:cNvSpPr/>
-          <p:nvPr/>
-        </p:nvSpPr>
-        <p:spPr>
-          <a:xfrm>
-            <a:off x="3322378" y="1377789"/>
-            <a:ext cx="2499245" cy="2449260"/>
-          </a:xfrm>
-          <a:prstGeom prst="rect">
-            <a:avLst/>
-          </a:prstGeom>
-          <a:noFill/>
-          <a:ln/>
-        </p:spPr>
-        <p:txBody>
-          <a:bodyPr wrap="square" rtlCol="0" anchor="t"/>
-          <a:lstStyle/>
-          <a:p>
-            <a:pPr indent="0" marL="0">
-              <a:spcBef>
-                <a:spcPts val="375"/>
-              </a:spcBef>
-              <a:buNone/>
-            </a:pPr>
-            <a:endParaRPr lang="en-US" sz="1050" dirty="0"/>
-          </a:p>
-        </p:txBody>
-      </p:sp>
-      <p:sp>
-        <p:nvSpPr>
-          <p:cNvPr id="30" name="Shape 18"/>
-          <p:cNvSpPr/>
-          <p:nvPr/>
-        </p:nvSpPr>
-        <p:spPr>
-          <a:xfrm>
-            <a:off x="3322378" y="1377789"/>
-            <a:ext cx="2499245" cy="2449260"/>
-          </a:xfrm>
-          <a:custGeom>
-            <a:avLst/>
-            <a:gdLst/>
-            <a:ahLst/>
-            <a:cxnLst/>
-            <a:rect l="l" t="t" r="r" b="b"/>
-            <a:pathLst>
-              <a:path w="2499245" h="2449260">
-                <a:moveTo>
-                  <a:pt x="0" y="0"/>
-                </a:moveTo>
-                <a:lnTo>
-                  <a:pt x="2499245" y="0"/>
-                </a:lnTo>
-                <a:lnTo>
-                  <a:pt x="2499245" y="2449260"/>
-                </a:lnTo>
-                <a:lnTo>
-                  <a:pt x="0" y="2449260"/>
-                </a:lnTo>
-                <a:close/>
-              </a:path>
-            </a:pathLst>
-          </a:custGeom>
-          <a:solidFill>
-            <a:srgbClr val="000000">
-              <a:alpha val="0"/>
-            </a:srgbClr>
-          </a:solidFill>
-          <a:ln/>
-        </p:spPr>
-      </p:sp>
-      <p:sp>
-        <p:nvSpPr>
-          <p:cNvPr id="31" name="Text 19"/>
-          <p:cNvSpPr/>
-          <p:nvPr/>
-        </p:nvSpPr>
-        <p:spPr>
-          <a:xfrm>
-            <a:off x="3322378" y="1377789"/>
-            <a:ext cx="2499245" cy="2449260"/>
-          </a:xfrm>
-          <a:prstGeom prst="rect">
-            <a:avLst/>
-          </a:prstGeom>
-          <a:noFill/>
-          <a:ln/>
-        </p:spPr>
-        <p:txBody>
-          <a:bodyPr wrap="square" rtlCol="0" anchor="t"/>
-          <a:lstStyle/>
-          <a:p>
-            <a:pPr algn="l" indent="0" marL="0">
-              <a:spcBef>
-                <a:spcPts val="375"/>
-              </a:spcBef>
-              <a:buNone/>
-            </a:pPr>
-            <a:r>
-              <a:rPr lang="en-US" sz="1800" dirty="0">
-                <a:solidFill>
-                  <a:srgbClr val="000000"/>
-                </a:solidFill>
-                <a:latin typeface="Calibri" pitchFamily="34" charset="0"/>
-                <a:ea typeface="Calibri" pitchFamily="34" charset="-122"/>
-                <a:cs typeface="Calibri" pitchFamily="34" charset="-120"/>
-              </a:rPr>
-              <a:t> </a:t>
-            </a:r>
-            <a:endParaRPr lang="en-US" sz="1050" dirty="0"/>
-          </a:p>
-        </p:txBody>
-      </p:sp>
-      <p:pic>
-        <p:nvPicPr>
-          <p:cNvPr id="32" name="Image 10" descr="./images\slide5_img66.png">    </p:cNvPr>
-          <p:cNvPicPr>
-            <a:picLocks noChangeAspect="1"/>
-          </p:cNvPicPr>
-          <p:nvPr/>
-        </p:nvPicPr>
-        <p:blipFill>
-          <a:blip r:embed="rId11"/>
-          <a:stretch>
-            <a:fillRect/>
-          </a:stretch>
-        </p:blipFill>
-        <p:spPr>
-          <a:xfrm>
-            <a:off x="3322378" y="1377789"/>
-            <a:ext cx="2499245" cy="2449260"/>
-          </a:xfrm>
-          <a:prstGeom prst="rect">
-            <a:avLst/>
-          </a:prstGeom>
-        </p:spPr>
-      </p:pic>
-      <p:pic>
-        <p:nvPicPr>
-          <p:cNvPr id="33" name="Image 11" descr="./images\slide5_img67.png">    </p:cNvPr>
-          <p:cNvPicPr>
-            <a:picLocks noChangeAspect="1"/>
-          </p:cNvPicPr>
-          <p:nvPr/>
-        </p:nvPicPr>
-        <p:blipFill>
-          <a:blip r:embed="rId12"/>
-          <a:stretch>
-            <a:fillRect/>
-          </a:stretch>
-        </p:blipFill>
-        <p:spPr>
-          <a:xfrm>
-            <a:off x="6093528" y="1377789"/>
-            <a:ext cx="2499245" cy="2449260"/>
-          </a:xfrm>
-          <a:prstGeom prst="rect">
-            <a:avLst/>
-          </a:prstGeom>
-        </p:spPr>
-      </p:pic>
-      <p:sp>
-        <p:nvSpPr>
-          <p:cNvPr id="34" name="Shape 20"/>
-          <p:cNvSpPr/>
-          <p:nvPr/>
-        </p:nvSpPr>
-        <p:spPr>
-          <a:xfrm>
-            <a:off x="6093528" y="1377789"/>
-            <a:ext cx="2499245" cy="2449260"/>
-          </a:xfrm>
-          <a:custGeom>
-            <a:avLst/>
-            <a:gdLst/>
-            <a:ahLst/>
-            <a:cxnLst/>
-            <a:rect l="l" t="t" r="r" b="b"/>
-            <a:pathLst>
-              <a:path w="2499245" h="2449260">
-                <a:moveTo>
-                  <a:pt x="0" y="0"/>
-                </a:moveTo>
-                <a:lnTo>
-                  <a:pt x="2499245" y="0"/>
-                </a:lnTo>
-                <a:lnTo>
-                  <a:pt x="2499245" y="2449260"/>
-                </a:lnTo>
-                <a:lnTo>
-                  <a:pt x="0" y="2449260"/>
-                </a:lnTo>
-                <a:close/>
-              </a:path>
-            </a:pathLst>
-          </a:custGeom>
-          <a:solidFill>
-            <a:srgbClr val="FFFFFF">
-              <a:alpha val="0"/>
-            </a:srgbClr>
-          </a:solidFill>
-          <a:ln/>
-        </p:spPr>
-      </p:sp>
-      <p:sp>
-        <p:nvSpPr>
-          <p:cNvPr id="35" name="Text 21"/>
-          <p:cNvSpPr/>
-          <p:nvPr/>
-        </p:nvSpPr>
-        <p:spPr>
-          <a:xfrm>
-            <a:off x="6093528" y="1377789"/>
-            <a:ext cx="2499245" cy="2449260"/>
-          </a:xfrm>
-          <a:prstGeom prst="rect">
-            <a:avLst/>
-          </a:prstGeom>
-          <a:noFill/>
-          <a:ln/>
-        </p:spPr>
-        <p:txBody>
-          <a:bodyPr wrap="square" rtlCol="0" anchor="t"/>
-          <a:lstStyle/>
-          <a:p>
-            <a:pPr indent="0" marL="0">
-              <a:spcBef>
-                <a:spcPts val="375"/>
-              </a:spcBef>
-              <a:buNone/>
-            </a:pPr>
-            <a:endParaRPr lang="en-US" sz="1050" dirty="0"/>
-          </a:p>
-        </p:txBody>
-      </p:sp>
-      <p:sp>
-        <p:nvSpPr>
-          <p:cNvPr id="36" name="Shape 22"/>
-          <p:cNvSpPr/>
-          <p:nvPr/>
-        </p:nvSpPr>
-        <p:spPr>
-          <a:xfrm>
-            <a:off x="6093528" y="1377789"/>
-            <a:ext cx="2499245" cy="2449260"/>
-          </a:xfrm>
-          <a:custGeom>
-            <a:avLst/>
-            <a:gdLst/>
-            <a:ahLst/>
-            <a:cxnLst/>
-            <a:rect l="l" t="t" r="r" b="b"/>
-            <a:pathLst>
-              <a:path w="2499245" h="2449260">
-                <a:moveTo>
-                  <a:pt x="0" y="0"/>
-                </a:moveTo>
-                <a:lnTo>
-                  <a:pt x="2499245" y="0"/>
-                </a:lnTo>
-                <a:lnTo>
-                  <a:pt x="2499245" y="2449260"/>
-                </a:lnTo>
-                <a:lnTo>
-                  <a:pt x="0" y="2449260"/>
-                </a:lnTo>
-                <a:close/>
-              </a:path>
-            </a:pathLst>
-          </a:custGeom>
-          <a:solidFill>
-            <a:srgbClr val="000000">
-              <a:alpha val="0"/>
-            </a:srgbClr>
-          </a:solidFill>
-          <a:ln/>
-        </p:spPr>
-      </p:sp>
-      <p:sp>
-        <p:nvSpPr>
-          <p:cNvPr id="37" name="Text 23"/>
-          <p:cNvSpPr/>
-          <p:nvPr/>
-        </p:nvSpPr>
-        <p:spPr>
-          <a:xfrm>
-            <a:off x="6093528" y="1377789"/>
-            <a:ext cx="2499245" cy="2449260"/>
-          </a:xfrm>
-          <a:prstGeom prst="rect">
-            <a:avLst/>
-          </a:prstGeom>
-          <a:noFill/>
-          <a:ln/>
-        </p:spPr>
-        <p:txBody>
-          <a:bodyPr wrap="square" rtlCol="0" anchor="t"/>
-          <a:lstStyle/>
-          <a:p>
-            <a:pPr algn="l" indent="0" marL="0">
-              <a:spcBef>
-                <a:spcPts val="375"/>
-              </a:spcBef>
-              <a:buNone/>
-            </a:pPr>
-            <a:r>
-              <a:rPr lang="en-US" sz="1800" dirty="0">
-                <a:solidFill>
-                  <a:srgbClr val="000000"/>
-                </a:solidFill>
-                <a:latin typeface="Calibri" pitchFamily="34" charset="0"/>
-                <a:ea typeface="Calibri" pitchFamily="34" charset="-122"/>
-                <a:cs typeface="Calibri" pitchFamily="34" charset="-120"/>
-              </a:rPr>
-              <a:t> </a:t>
-            </a:r>
-            <a:endParaRPr lang="en-US" sz="1050" dirty="0"/>
-          </a:p>
-        </p:txBody>
-      </p:sp>
-      <p:pic>
-        <p:nvPicPr>
-          <p:cNvPr id="38" name="Image 12" descr="./images\slide5_img68.png">    </p:cNvPr>
-          <p:cNvPicPr>
-            <a:picLocks noChangeAspect="1"/>
-          </p:cNvPicPr>
-          <p:nvPr/>
-        </p:nvPicPr>
-        <p:blipFill>
-          <a:blip r:embed="rId13"/>
-          <a:stretch>
-            <a:fillRect/>
-          </a:stretch>
-        </p:blipFill>
-        <p:spPr>
-          <a:xfrm>
-            <a:off x="6093528" y="1377789"/>
-            <a:ext cx="2499245" cy="2449260"/>
-          </a:xfrm>
-          <a:prstGeom prst="rect">
-            <a:avLst/>
-          </a:prstGeom>
-        </p:spPr>
-      </p:pic>
-      <p:sp>
-        <p:nvSpPr>
-          <p:cNvPr id="39" name="Shape 24"/>
-          <p:cNvSpPr/>
-          <p:nvPr/>
-        </p:nvSpPr>
-        <p:spPr>
-          <a:xfrm>
-            <a:off x="874042" y="197820"/>
-            <a:ext cx="7395900" cy="552450"/>
-          </a:xfrm>
-          <a:custGeom>
-            <a:avLst/>
-            <a:gdLst/>
-            <a:ahLst/>
-            <a:cxnLst/>
-            <a:rect l="l" t="t" r="r" b="b"/>
-            <a:pathLst>
-              <a:path w="7395900" h="552450">
-                <a:moveTo>
-                  <a:pt x="0" y="0"/>
-                </a:moveTo>
-                <a:lnTo>
-                  <a:pt x="7395900" y="0"/>
-                </a:lnTo>
-                <a:lnTo>
-                  <a:pt x="7395900" y="552450"/>
-                </a:lnTo>
-                <a:lnTo>
-                  <a:pt x="0" y="552450"/>
-                </a:lnTo>
-                <a:close/>
-              </a:path>
-            </a:pathLst>
-          </a:custGeom>
-          <a:solidFill>
-            <a:srgbClr val="FFFFFF">
-              <a:alpha val="0"/>
-            </a:srgbClr>
-          </a:solidFill>
-          <a:ln/>
-        </p:spPr>
-      </p:sp>
-      <p:sp>
-        <p:nvSpPr>
-          <p:cNvPr id="40" name="Text 25"/>
-          <p:cNvSpPr/>
-          <p:nvPr/>
-        </p:nvSpPr>
-        <p:spPr>
-          <a:xfrm>
-            <a:off x="874042" y="197820"/>
-            <a:ext cx="7395900" cy="552450"/>
-          </a:xfrm>
-          <a:prstGeom prst="rect">
-            <a:avLst/>
-          </a:prstGeom>
-          <a:noFill/>
-          <a:ln/>
-        </p:spPr>
-        <p:txBody>
-          <a:bodyPr wrap="square" rtlCol="0" anchor="t"/>
-          <a:lstStyle/>
-          <a:p>
-            <a:pPr indent="0" marL="0">
-              <a:spcBef>
-                <a:spcPts val="375"/>
-              </a:spcBef>
-              <a:buNone/>
-            </a:pPr>
-            <a:endParaRPr lang="en-US" sz="1050" dirty="0"/>
-          </a:p>
-        </p:txBody>
-      </p:sp>
-      <p:sp>
-        <p:nvSpPr>
-          <p:cNvPr id="41" name="Shape 26"/>
-          <p:cNvSpPr/>
-          <p:nvPr/>
-        </p:nvSpPr>
-        <p:spPr>
-          <a:xfrm>
-            <a:off x="874042" y="197820"/>
-            <a:ext cx="7395900" cy="552450"/>
-          </a:xfrm>
-          <a:custGeom>
-            <a:avLst/>
-            <a:gdLst/>
-            <a:ahLst/>
-            <a:cxnLst/>
-            <a:rect l="l" t="t" r="r" b="b"/>
-            <a:pathLst>
-              <a:path w="7395900" h="552450">
-                <a:moveTo>
-                  <a:pt x="0" y="0"/>
-                </a:moveTo>
-                <a:lnTo>
-                  <a:pt x="7395900" y="0"/>
-                </a:lnTo>
-                <a:lnTo>
-                  <a:pt x="7395900" y="552450"/>
-                </a:lnTo>
-                <a:lnTo>
-                  <a:pt x="0" y="552450"/>
-                </a:lnTo>
-                <a:close/>
-              </a:path>
-            </a:pathLst>
-          </a:custGeom>
-          <a:solidFill>
-            <a:srgbClr val="000000">
-              <a:alpha val="0"/>
-            </a:srgbClr>
-          </a:solidFill>
-          <a:ln/>
-        </p:spPr>
-      </p:sp>
-      <p:sp>
-        <p:nvSpPr>
-          <p:cNvPr id="42" name="Text 27"/>
-          <p:cNvSpPr/>
-          <p:nvPr/>
-        </p:nvSpPr>
-        <p:spPr>
-          <a:xfrm>
-            <a:off x="874042" y="197820"/>
-            <a:ext cx="7395900" cy="552450"/>
-          </a:xfrm>
-          <a:prstGeom prst="rect">
-            <a:avLst/>
-          </a:prstGeom>
-          <a:noFill/>
-          <a:ln/>
-        </p:spPr>
-        <p:txBody>
-          <a:bodyPr wrap="square" rtlCol="0" anchor="t"/>
-          <a:lstStyle/>
-          <a:p>
-            <a:pPr algn="ctr" indent="0" marL="0">
-              <a:spcBef>
-                <a:spcPts val="375"/>
-              </a:spcBef>
-              <a:buNone/>
-            </a:pPr>
-            <a:r>
-              <a:rPr lang="en-US" sz="3000" dirty="0">
-                <a:solidFill>
-                  <a:srgbClr val="45464D"/>
-                </a:solidFill>
-                <a:latin typeface="Caveat Brush" pitchFamily="34" charset="0"/>
-                <a:ea typeface="Caveat Brush" pitchFamily="34" charset="-122"/>
-                <a:cs typeface="Caveat Brush" pitchFamily="34" charset="-120"/>
-              </a:rPr>
-              <a:t>Nerv tizimi o'smalari turlari</a:t>
-            </a:r>
-            <a:endParaRPr lang="en-US" sz="1050" dirty="0"/>
-          </a:p>
-        </p:txBody>
-      </p:sp>
-      <p:sp>
-        <p:nvSpPr>
-          <p:cNvPr id="43" name="Shape 28"/>
-          <p:cNvSpPr/>
-          <p:nvPr/>
-        </p:nvSpPr>
-        <p:spPr>
-          <a:xfrm>
-            <a:off x="651178" y="1478873"/>
-            <a:ext cx="2269341" cy="603796"/>
-          </a:xfrm>
-          <a:custGeom>
-            <a:avLst/>
-            <a:gdLst/>
-            <a:ahLst/>
-            <a:cxnLst/>
-            <a:rect l="l" t="t" r="r" b="b"/>
-            <a:pathLst>
-              <a:path w="2269341" h="603796">
-                <a:moveTo>
-                  <a:pt x="0" y="0"/>
-                </a:moveTo>
-                <a:lnTo>
-                  <a:pt x="2269341" y="0"/>
-                </a:lnTo>
-                <a:lnTo>
-                  <a:pt x="2269341" y="603796"/>
-                </a:lnTo>
-                <a:lnTo>
-                  <a:pt x="0" y="603796"/>
-                </a:lnTo>
-                <a:close/>
-              </a:path>
-            </a:pathLst>
-          </a:custGeom>
-          <a:solidFill>
-            <a:srgbClr val="FFFFFF">
-              <a:alpha val="0"/>
-            </a:srgbClr>
-          </a:solidFill>
-          <a:ln/>
-        </p:spPr>
-      </p:sp>
-      <p:sp>
-        <p:nvSpPr>
-          <p:cNvPr id="44" name="Text 29"/>
-          <p:cNvSpPr/>
-          <p:nvPr/>
-        </p:nvSpPr>
-        <p:spPr>
-          <a:xfrm>
-            <a:off x="651178" y="1478873"/>
-            <a:ext cx="2269341" cy="603796"/>
-          </a:xfrm>
-          <a:prstGeom prst="rect">
-            <a:avLst/>
-          </a:prstGeom>
-          <a:noFill/>
-          <a:ln/>
-        </p:spPr>
-        <p:txBody>
-          <a:bodyPr wrap="square" rtlCol="0" anchor="t"/>
-          <a:lstStyle/>
-          <a:p>
-            <a:pPr indent="0" marL="0">
-              <a:spcBef>
-                <a:spcPts val="375"/>
-              </a:spcBef>
-              <a:buNone/>
-            </a:pPr>
-            <a:endParaRPr lang="en-US" sz="1050" dirty="0"/>
-          </a:p>
-        </p:txBody>
-      </p:sp>
-      <p:sp>
-        <p:nvSpPr>
-          <p:cNvPr id="45" name="Shape 30"/>
-          <p:cNvSpPr/>
-          <p:nvPr/>
-        </p:nvSpPr>
-        <p:spPr>
-          <a:xfrm>
-            <a:off x="651178" y="1478873"/>
-            <a:ext cx="2269341" cy="603796"/>
-          </a:xfrm>
-          <a:custGeom>
-            <a:avLst/>
-            <a:gdLst/>
-            <a:ahLst/>
-            <a:cxnLst/>
-            <a:rect l="l" t="t" r="r" b="b"/>
-            <a:pathLst>
-              <a:path w="2269341" h="603796">
-                <a:moveTo>
-                  <a:pt x="0" y="0"/>
-                </a:moveTo>
-                <a:lnTo>
-                  <a:pt x="2269341" y="0"/>
-                </a:lnTo>
-                <a:lnTo>
-                  <a:pt x="2269341" y="603796"/>
-                </a:lnTo>
-                <a:lnTo>
-                  <a:pt x="0" y="603796"/>
-                </a:lnTo>
-                <a:close/>
-              </a:path>
-            </a:pathLst>
-          </a:custGeom>
-          <a:solidFill>
-            <a:srgbClr val="000000">
-              <a:alpha val="0"/>
-            </a:srgbClr>
-          </a:solidFill>
-          <a:ln/>
-        </p:spPr>
-      </p:sp>
-      <p:sp>
-        <p:nvSpPr>
-          <p:cNvPr id="46" name="Text 31"/>
-          <p:cNvSpPr/>
-          <p:nvPr/>
-        </p:nvSpPr>
-        <p:spPr>
-          <a:xfrm>
-            <a:off x="651178" y="1478873"/>
-            <a:ext cx="2269341" cy="603796"/>
-          </a:xfrm>
-          <a:prstGeom prst="rect">
-            <a:avLst/>
-          </a:prstGeom>
-          <a:noFill/>
-          <a:ln/>
-        </p:spPr>
-        <p:txBody>
-          <a:bodyPr wrap="square" rtlCol="0" anchor="t"/>
-          <a:lstStyle/>
-          <a:p>
-            <a:pPr algn="l" indent="0" marL="0">
-              <a:spcBef>
-                <a:spcPts val="375"/>
-              </a:spcBef>
-              <a:buNone/>
-            </a:pPr>
-            <a:r>
-              <a:rPr lang="en-US" sz="975" dirty="0">
-                <a:solidFill>
-                  <a:srgbClr val="000000"/>
-                </a:solidFill>
-                <a:latin typeface="Nunito" pitchFamily="34" charset="0"/>
-                <a:ea typeface="Nunito" pitchFamily="34" charset="-122"/>
-                <a:cs typeface="Nunito" pitchFamily="34" charset="-120"/>
-              </a:rPr>
-              <a:t>Nerv tizimi o'smalari asosan uch turga bo'linadi: benign, malign, va metastatik. Har bir tur o'ziga xos belgilarga ega.</a:t>
-            </a:r>
-            <a:endParaRPr lang="en-US" sz="1050" dirty="0"/>
-          </a:p>
-        </p:txBody>
-      </p:sp>
-      <p:sp>
-        <p:nvSpPr>
-          <p:cNvPr id="47" name="Shape 32"/>
-          <p:cNvSpPr/>
-          <p:nvPr/>
-        </p:nvSpPr>
-        <p:spPr>
-          <a:xfrm>
-            <a:off x="3385895" y="1537943"/>
-            <a:ext cx="2216616" cy="603796"/>
-          </a:xfrm>
-          <a:custGeom>
-            <a:avLst/>
-            <a:gdLst/>
-            <a:ahLst/>
-            <a:cxnLst/>
-            <a:rect l="l" t="t" r="r" b="b"/>
-            <a:pathLst>
-              <a:path w="2216616" h="603796">
-                <a:moveTo>
-                  <a:pt x="0" y="0"/>
-                </a:moveTo>
-                <a:lnTo>
-                  <a:pt x="2216616" y="0"/>
-                </a:lnTo>
-                <a:lnTo>
-                  <a:pt x="2216616" y="603796"/>
-                </a:lnTo>
-                <a:lnTo>
-                  <a:pt x="0" y="603796"/>
-                </a:lnTo>
-                <a:close/>
-              </a:path>
-            </a:pathLst>
-          </a:custGeom>
-          <a:solidFill>
-            <a:srgbClr val="FFFFFF">
-              <a:alpha val="0"/>
-            </a:srgbClr>
-          </a:solidFill>
-          <a:ln/>
-        </p:spPr>
-      </p:sp>
-      <p:sp>
-        <p:nvSpPr>
-          <p:cNvPr id="48" name="Text 33"/>
-          <p:cNvSpPr/>
-          <p:nvPr/>
-        </p:nvSpPr>
-        <p:spPr>
-          <a:xfrm>
-            <a:off x="3385895" y="1537943"/>
-            <a:ext cx="2216616" cy="603796"/>
-          </a:xfrm>
-          <a:prstGeom prst="rect">
-            <a:avLst/>
-          </a:prstGeom>
-          <a:noFill/>
-          <a:ln/>
-        </p:spPr>
-        <p:txBody>
-          <a:bodyPr wrap="square" rtlCol="0" anchor="t"/>
-          <a:lstStyle/>
-          <a:p>
-            <a:pPr indent="0" marL="0">
-              <a:spcBef>
-                <a:spcPts val="375"/>
-              </a:spcBef>
-              <a:buNone/>
-            </a:pPr>
-            <a:endParaRPr lang="en-US" sz="1050" dirty="0"/>
-          </a:p>
-        </p:txBody>
-      </p:sp>
-      <p:sp>
-        <p:nvSpPr>
-          <p:cNvPr id="49" name="Shape 34"/>
-          <p:cNvSpPr/>
-          <p:nvPr/>
-        </p:nvSpPr>
-        <p:spPr>
-          <a:xfrm>
-            <a:off x="3385895" y="1537943"/>
-            <a:ext cx="2216616" cy="603796"/>
-          </a:xfrm>
-          <a:custGeom>
-            <a:avLst/>
-            <a:gdLst/>
-            <a:ahLst/>
-            <a:cxnLst/>
-            <a:rect l="l" t="t" r="r" b="b"/>
-            <a:pathLst>
-              <a:path w="2216616" h="603796">
-                <a:moveTo>
-                  <a:pt x="0" y="0"/>
-                </a:moveTo>
-                <a:lnTo>
-                  <a:pt x="2216616" y="0"/>
-                </a:lnTo>
-                <a:lnTo>
-                  <a:pt x="2216616" y="603796"/>
-                </a:lnTo>
-                <a:lnTo>
-                  <a:pt x="0" y="603796"/>
-                </a:lnTo>
-                <a:close/>
-              </a:path>
-            </a:pathLst>
-          </a:custGeom>
-          <a:solidFill>
-            <a:srgbClr val="000000">
-              <a:alpha val="0"/>
-            </a:srgbClr>
-          </a:solidFill>
-          <a:ln/>
-        </p:spPr>
-      </p:sp>
-      <p:sp>
-        <p:nvSpPr>
-          <p:cNvPr id="50" name="Text 35"/>
-          <p:cNvSpPr/>
-          <p:nvPr/>
-        </p:nvSpPr>
-        <p:spPr>
-          <a:xfrm>
-            <a:off x="3385895" y="1537943"/>
-            <a:ext cx="2216616" cy="603796"/>
-          </a:xfrm>
-          <a:prstGeom prst="rect">
-            <a:avLst/>
-          </a:prstGeom>
-          <a:noFill/>
-          <a:ln/>
-        </p:spPr>
-        <p:txBody>
-          <a:bodyPr wrap="square" rtlCol="0" anchor="t"/>
-          <a:lstStyle/>
-          <a:p>
-            <a:pPr algn="l" indent="0" marL="0">
-              <a:spcBef>
-                <a:spcPts val="375"/>
-              </a:spcBef>
-              <a:buNone/>
-            </a:pPr>
-            <a:r>
-              <a:rPr lang="en-US" sz="975" dirty="0">
-                <a:solidFill>
-                  <a:srgbClr val="000000"/>
-                </a:solidFill>
-                <a:latin typeface="Nunito" pitchFamily="34" charset="0"/>
-                <a:ea typeface="Nunito" pitchFamily="34" charset="-122"/>
-                <a:cs typeface="Nunito" pitchFamily="34" charset="-120"/>
-              </a:rPr>
-              <a:t>Belgilari orasida bosh og'rig'i, ko'ngil aynishi, va asabiylashish kabi simptomlar mavjud. Ular kasallikning turiga qarab o'zgaradi.</a:t>
-            </a:r>
-            <a:endParaRPr lang="en-US" sz="1050" dirty="0"/>
-          </a:p>
-        </p:txBody>
-      </p:sp>
-      <p:sp>
-        <p:nvSpPr>
-          <p:cNvPr id="51" name="Shape 36"/>
-          <p:cNvSpPr/>
-          <p:nvPr/>
-        </p:nvSpPr>
-        <p:spPr>
-          <a:xfrm>
-            <a:off x="6234269" y="1597013"/>
-            <a:ext cx="2228813" cy="603796"/>
-          </a:xfrm>
-          <a:custGeom>
-            <a:avLst/>
-            <a:gdLst/>
-            <a:ahLst/>
-            <a:cxnLst/>
-            <a:rect l="l" t="t" r="r" b="b"/>
-            <a:pathLst>
-              <a:path w="2228813" h="603796">
-                <a:moveTo>
-                  <a:pt x="0" y="0"/>
-                </a:moveTo>
-                <a:lnTo>
-                  <a:pt x="2228813" y="0"/>
-                </a:lnTo>
-                <a:lnTo>
-                  <a:pt x="2228813" y="603796"/>
-                </a:lnTo>
-                <a:lnTo>
-                  <a:pt x="0" y="603796"/>
-                </a:lnTo>
-                <a:close/>
-              </a:path>
-            </a:pathLst>
-          </a:custGeom>
-          <a:solidFill>
-            <a:srgbClr val="FFFFFF">
-              <a:alpha val="0"/>
-            </a:srgbClr>
-          </a:solidFill>
-          <a:ln/>
-        </p:spPr>
-      </p:sp>
-      <p:sp>
-        <p:nvSpPr>
-          <p:cNvPr id="52" name="Text 37"/>
-          <p:cNvSpPr/>
-          <p:nvPr/>
-        </p:nvSpPr>
-        <p:spPr>
-          <a:xfrm>
-            <a:off x="6234269" y="1597013"/>
-            <a:ext cx="2228813" cy="603796"/>
-          </a:xfrm>
-          <a:prstGeom prst="rect">
-            <a:avLst/>
-          </a:prstGeom>
-          <a:noFill/>
-          <a:ln/>
-        </p:spPr>
-        <p:txBody>
-          <a:bodyPr wrap="square" rtlCol="0" anchor="t"/>
-          <a:lstStyle/>
-          <a:p>
-            <a:pPr indent="0" marL="0">
-              <a:spcBef>
-                <a:spcPts val="375"/>
-              </a:spcBef>
-              <a:buNone/>
-            </a:pPr>
-            <a:endParaRPr lang="en-US" sz="1050" dirty="0"/>
-          </a:p>
-        </p:txBody>
-      </p:sp>
-      <p:sp>
-        <p:nvSpPr>
-          <p:cNvPr id="53" name="Shape 38"/>
-          <p:cNvSpPr/>
-          <p:nvPr/>
-        </p:nvSpPr>
-        <p:spPr>
-          <a:xfrm>
-            <a:off x="6234269" y="1597013"/>
-            <a:ext cx="2228813" cy="603796"/>
-          </a:xfrm>
-          <a:custGeom>
-            <a:avLst/>
-            <a:gdLst/>
-            <a:ahLst/>
-            <a:cxnLst/>
-            <a:rect l="l" t="t" r="r" b="b"/>
-            <a:pathLst>
-              <a:path w="2228813" h="603796">
-                <a:moveTo>
-                  <a:pt x="0" y="0"/>
-                </a:moveTo>
-                <a:lnTo>
-                  <a:pt x="2228813" y="0"/>
-                </a:lnTo>
-                <a:lnTo>
-                  <a:pt x="2228813" y="603796"/>
-                </a:lnTo>
-                <a:lnTo>
-                  <a:pt x="0" y="603796"/>
-                </a:lnTo>
-                <a:close/>
-              </a:path>
-            </a:pathLst>
-          </a:custGeom>
-          <a:solidFill>
-            <a:srgbClr val="000000">
-              <a:alpha val="0"/>
-            </a:srgbClr>
-          </a:solidFill>
-          <a:ln/>
-        </p:spPr>
-      </p:sp>
-      <p:sp>
-        <p:nvSpPr>
-          <p:cNvPr id="54" name="Text 39"/>
-          <p:cNvSpPr/>
-          <p:nvPr/>
-        </p:nvSpPr>
-        <p:spPr>
-          <a:xfrm>
-            <a:off x="6234269" y="1597013"/>
-            <a:ext cx="2228813" cy="603796"/>
-          </a:xfrm>
-          <a:prstGeom prst="rect">
-            <a:avLst/>
-          </a:prstGeom>
-          <a:noFill/>
-          <a:ln/>
-        </p:spPr>
-        <p:txBody>
-          <a:bodyPr wrap="square" rtlCol="0" anchor="t"/>
-          <a:lstStyle/>
-          <a:p>
-            <a:pPr algn="ctr" indent="0" marL="0">
-              <a:spcBef>
-                <a:spcPts val="375"/>
-              </a:spcBef>
-              <a:buNone/>
-            </a:pPr>
-            <a:r>
-              <a:rPr lang="en-US" sz="975" dirty="0">
-                <a:solidFill>
-                  <a:srgbClr val="000000"/>
-                </a:solidFill>
-                <a:latin typeface="Nunito" pitchFamily="34" charset="0"/>
-                <a:ea typeface="Nunito" pitchFamily="34" charset="-122"/>
-                <a:cs typeface="Nunito" pitchFamily="34" charset="-120"/>
-              </a:rPr>
-              <a:t>O'smalarni aniqlash uchun turli tadqiqot usullari qo'llaniladi, masalan, tomografiya va biyopsiya. Bu usullar kasallikni erta aniqlashda muhimdir.</a:t>
-            </a:r>
-            <a:endParaRPr lang="en-US" sz="1050" dirty="0"/>
-          </a:p>
-        </p:txBody>
-      </p:sp>
-    </p:spTree>
-  </p:cSld>
-  <p:clrMapOvr>
-    <a:masterClrMapping/>
-  </p:clrMapOvr>
-</p:sld>
-</file>
-
-<file path=ppt/slides/slide5.xml><?xml version="1.0" encoding="utf-8"?>
-<p:sld xmlns:a="http://schemas.openxmlformats.org/drawingml/2006/main" xmlns:r="http://schemas.openxmlformats.org/officeDocument/2006/relationships" xmlns:p="http://schemas.openxmlformats.org/presentationml/2006/main">
-  <p:cSld name="Slide 5">
-    <p:bg>
-      <p:bgPr>
-        <a:solidFill>
-          <a:srgbClr val="F1F1F1"/>
-        </a:solidFill>
-      </p:bgPr>
-    </p:bg>
-    <p:spTree>
-      <p:nvGrpSpPr>
-        <p:cNvPr id="1" name=""/>
-        <p:cNvGrpSpPr/>
-        <p:nvPr/>
-      </p:nvGrpSpPr>
-      <p:grpSpPr>
-        <a:xfrm>
-          <a:off x="0" y="0"/>
-          <a:ext cx="0" cy="0"/>
-          <a:chOff x="0" y="0"/>
-          <a:chExt cx="0" cy="0"/>
-        </a:xfrm>
-      </p:grpSpPr>
-      <p:pic>
-        <p:nvPicPr>
-          <p:cNvPr id="2" name="Image 0" descr="./images\slide6_img69.png">    </p:cNvPr>
-          <p:cNvPicPr>
-            <a:picLocks noChangeAspect="1"/>
-          </p:cNvPicPr>
-          <p:nvPr/>
-        </p:nvPicPr>
-        <p:blipFill>
-          <a:blip r:embed="rId1"/>
-          <a:stretch>
-            <a:fillRect/>
-          </a:stretch>
-        </p:blipFill>
-        <p:spPr>
-          <a:xfrm>
-            <a:off x="0" y="0"/>
-            <a:ext cx="9144000" cy="5143500"/>
-          </a:xfrm>
-          <a:prstGeom prst="rect">
-            <a:avLst/>
-          </a:prstGeom>
-        </p:spPr>
-      </p:pic>
-      <p:pic>
-        <p:nvPicPr>
-          <p:cNvPr id="3" name="Image 1" descr="./images\slide6_img70.png">    </p:cNvPr>
-          <p:cNvPicPr>
-            <a:picLocks noChangeAspect="1"/>
-          </p:cNvPicPr>
-          <p:nvPr/>
-        </p:nvPicPr>
-        <p:blipFill>
-          <a:blip r:embed="rId2"/>
-          <a:stretch>
-            <a:fillRect/>
-          </a:stretch>
-        </p:blipFill>
-        <p:spPr>
-          <a:xfrm>
-            <a:off x="3116890" y="1094737"/>
-            <a:ext cx="2910220" cy="3713738"/>
-          </a:xfrm>
-          <a:prstGeom prst="rect">
-            <a:avLst/>
-          </a:prstGeom>
-        </p:spPr>
-      </p:pic>
-      <p:sp>
-        <p:nvSpPr>
-          <p:cNvPr id="4" name="Shape 0"/>
-          <p:cNvSpPr/>
-          <p:nvPr/>
-        </p:nvSpPr>
-        <p:spPr>
-          <a:xfrm>
-            <a:off x="1401482" y="161274"/>
-            <a:ext cx="6341100" cy="476250"/>
-          </a:xfrm>
-          <a:custGeom>
-            <a:avLst/>
-            <a:gdLst/>
-            <a:ahLst/>
-            <a:cxnLst/>
-            <a:rect l="l" t="t" r="r" b="b"/>
-            <a:pathLst>
-              <a:path w="6341100" h="476250">
-                <a:moveTo>
-                  <a:pt x="0" y="0"/>
-                </a:moveTo>
-                <a:lnTo>
-                  <a:pt x="6341100" y="0"/>
-                </a:lnTo>
-                <a:lnTo>
-                  <a:pt x="6341100" y="476250"/>
-                </a:lnTo>
-                <a:lnTo>
-                  <a:pt x="0" y="476250"/>
-                </a:lnTo>
-                <a:close/>
-              </a:path>
-            </a:pathLst>
-          </a:custGeom>
-          <a:solidFill>
-            <a:srgbClr val="FFFFFF">
-              <a:alpha val="0"/>
-            </a:srgbClr>
-          </a:solidFill>
-          <a:ln/>
-        </p:spPr>
-      </p:sp>
-      <p:sp>
-        <p:nvSpPr>
-          <p:cNvPr id="5" name="Text 1"/>
-          <p:cNvSpPr/>
-          <p:nvPr/>
-        </p:nvSpPr>
-        <p:spPr>
-          <a:xfrm>
-            <a:off x="1401482" y="161274"/>
-            <a:ext cx="6341100" cy="476250"/>
-          </a:xfrm>
-          <a:prstGeom prst="rect">
-            <a:avLst/>
-          </a:prstGeom>
-          <a:noFill/>
-          <a:ln/>
-        </p:spPr>
-        <p:txBody>
-          <a:bodyPr wrap="square" rtlCol="0" anchor="t"/>
-          <a:lstStyle/>
-          <a:p>
-            <a:pPr indent="0" marL="0">
-              <a:spcBef>
-                <a:spcPts val="375"/>
-              </a:spcBef>
-              <a:buNone/>
-            </a:pPr>
-            <a:endParaRPr lang="en-US" sz="1050" dirty="0"/>
-          </a:p>
-        </p:txBody>
-      </p:sp>
-      <p:sp>
-        <p:nvSpPr>
-          <p:cNvPr id="6" name="Shape 2"/>
-          <p:cNvSpPr/>
-          <p:nvPr/>
-        </p:nvSpPr>
-        <p:spPr>
-          <a:xfrm>
-            <a:off x="1401482" y="161274"/>
-            <a:ext cx="6341100" cy="476250"/>
-          </a:xfrm>
-          <a:custGeom>
-            <a:avLst/>
-            <a:gdLst/>
-            <a:ahLst/>
-            <a:cxnLst/>
-            <a:rect l="l" t="t" r="r" b="b"/>
-            <a:pathLst>
-              <a:path w="6341100" h="476250">
-                <a:moveTo>
-                  <a:pt x="0" y="0"/>
-                </a:moveTo>
-                <a:lnTo>
-                  <a:pt x="6341100" y="0"/>
-                </a:lnTo>
-                <a:lnTo>
-                  <a:pt x="6341100" y="476250"/>
-                </a:lnTo>
-                <a:lnTo>
-                  <a:pt x="0" y="476250"/>
-                </a:lnTo>
-                <a:close/>
-              </a:path>
-            </a:pathLst>
-          </a:custGeom>
-          <a:solidFill>
-            <a:srgbClr val="000000">
-              <a:alpha val="0"/>
-            </a:srgbClr>
-          </a:solidFill>
-          <a:ln/>
-        </p:spPr>
-      </p:sp>
-      <p:sp>
-        <p:nvSpPr>
-          <p:cNvPr id="7" name="Text 3"/>
-          <p:cNvSpPr/>
-          <p:nvPr/>
-        </p:nvSpPr>
-        <p:spPr>
-          <a:xfrm>
-            <a:off x="1401482" y="161274"/>
-            <a:ext cx="6341100" cy="476250"/>
-          </a:xfrm>
-          <a:prstGeom prst="rect">
-            <a:avLst/>
-          </a:prstGeom>
-          <a:noFill/>
-          <a:ln/>
-        </p:spPr>
-        <p:txBody>
-          <a:bodyPr wrap="square" rtlCol="0" anchor="t"/>
-          <a:lstStyle/>
-          <a:p>
-            <a:pPr algn="ctr" indent="0" marL="0">
-              <a:spcBef>
-                <a:spcPts val="375"/>
-              </a:spcBef>
-              <a:buNone/>
-            </a:pPr>
-            <a:r>
-              <a:rPr lang="en-US" sz="3000" dirty="0">
-                <a:solidFill>
-                  <a:srgbClr val="45464D"/>
-                </a:solidFill>
-                <a:latin typeface="Caveat Brush" pitchFamily="34" charset="0"/>
-                <a:ea typeface="Caveat Brush" pitchFamily="34" charset="-122"/>
-                <a:cs typeface="Caveat Brush" pitchFamily="34" charset="-120"/>
-              </a:rPr>
-              <a:t>Nerv tizimi o'smalari turlari</a:t>
-            </a:r>
-            <a:endParaRPr lang="en-US" sz="1050" dirty="0"/>
-          </a:p>
-        </p:txBody>
-      </p:sp>
-      <p:sp>
-        <p:nvSpPr>
-          <p:cNvPr id="8" name="Shape 4"/>
-          <p:cNvSpPr/>
-          <p:nvPr/>
-        </p:nvSpPr>
-        <p:spPr>
-          <a:xfrm>
-            <a:off x="6517040" y="2139780"/>
-            <a:ext cx="2026650" cy="349523"/>
-          </a:xfrm>
-          <a:custGeom>
-            <a:avLst/>
-            <a:gdLst/>
-            <a:ahLst/>
-            <a:cxnLst/>
-            <a:rect l="l" t="t" r="r" b="b"/>
-            <a:pathLst>
-              <a:path w="2026650" h="349523">
-                <a:moveTo>
-                  <a:pt x="0" y="0"/>
-                </a:moveTo>
-                <a:lnTo>
-                  <a:pt x="2026650" y="0"/>
-                </a:lnTo>
-                <a:lnTo>
-                  <a:pt x="2026650" y="349523"/>
-                </a:lnTo>
-                <a:lnTo>
-                  <a:pt x="0" y="349523"/>
-                </a:lnTo>
-                <a:close/>
-              </a:path>
-            </a:pathLst>
-          </a:custGeom>
-          <a:solidFill>
-            <a:srgbClr val="FFFFFF">
-              <a:alpha val="0"/>
-            </a:srgbClr>
-          </a:solidFill>
-          <a:ln/>
-        </p:spPr>
-      </p:sp>
-      <p:sp>
-        <p:nvSpPr>
-          <p:cNvPr id="9" name="Text 5"/>
-          <p:cNvSpPr/>
-          <p:nvPr/>
-        </p:nvSpPr>
-        <p:spPr>
-          <a:xfrm>
-            <a:off x="6517040" y="2139780"/>
-            <a:ext cx="2026650" cy="349523"/>
-          </a:xfrm>
-          <a:prstGeom prst="rect">
-            <a:avLst/>
-          </a:prstGeom>
-          <a:noFill/>
-          <a:ln/>
-        </p:spPr>
-        <p:txBody>
-          <a:bodyPr wrap="square" rtlCol="0" anchor="t"/>
-          <a:lstStyle/>
-          <a:p>
-            <a:pPr indent="0" marL="0">
-              <a:spcBef>
-                <a:spcPts val="375"/>
-              </a:spcBef>
-              <a:buNone/>
-            </a:pPr>
-            <a:endParaRPr lang="en-US" sz="1050" dirty="0"/>
-          </a:p>
-        </p:txBody>
-      </p:sp>
-      <p:sp>
-        <p:nvSpPr>
-          <p:cNvPr id="10" name="Shape 6"/>
-          <p:cNvSpPr/>
-          <p:nvPr/>
-        </p:nvSpPr>
-        <p:spPr>
-          <a:xfrm>
-            <a:off x="6517040" y="2139780"/>
-            <a:ext cx="2026650" cy="349523"/>
-          </a:xfrm>
-          <a:custGeom>
-            <a:avLst/>
-            <a:gdLst/>
-            <a:ahLst/>
-            <a:cxnLst/>
-            <a:rect l="l" t="t" r="r" b="b"/>
-            <a:pathLst>
-              <a:path w="2026650" h="349523">
-                <a:moveTo>
-                  <a:pt x="0" y="0"/>
-                </a:moveTo>
-                <a:lnTo>
-                  <a:pt x="2026650" y="0"/>
-                </a:lnTo>
-                <a:lnTo>
-                  <a:pt x="2026650" y="349523"/>
-                </a:lnTo>
-                <a:lnTo>
-                  <a:pt x="0" y="349523"/>
-                </a:lnTo>
-                <a:close/>
-              </a:path>
-            </a:pathLst>
-          </a:custGeom>
-          <a:solidFill>
-            <a:srgbClr val="000000">
-              <a:alpha val="0"/>
-            </a:srgbClr>
-          </a:solidFill>
-          <a:ln/>
-        </p:spPr>
-      </p:sp>
-      <p:sp>
-        <p:nvSpPr>
-          <p:cNvPr id="11" name="Text 7"/>
-          <p:cNvSpPr/>
-          <p:nvPr/>
-        </p:nvSpPr>
-        <p:spPr>
-          <a:xfrm>
-            <a:off x="6517040" y="2139780"/>
-            <a:ext cx="2026650" cy="349523"/>
-          </a:xfrm>
-          <a:prstGeom prst="rect">
-            <a:avLst/>
-          </a:prstGeom>
-          <a:noFill/>
-          <a:ln/>
-        </p:spPr>
-        <p:txBody>
-          <a:bodyPr wrap="square" rtlCol="0" anchor="t"/>
-          <a:lstStyle/>
-          <a:p>
-            <a:pPr algn="l" indent="0" marL="0">
-              <a:spcBef>
-                <a:spcPts val="375"/>
-              </a:spcBef>
-              <a:buNone/>
-            </a:pPr>
-            <a:r>
-              <a:rPr lang="en-US" sz="975" dirty="0">
-                <a:solidFill>
-                  <a:srgbClr val="000000"/>
-                </a:solidFill>
-                <a:latin typeface="Nunito" pitchFamily="34" charset="0"/>
-                <a:ea typeface="Nunito" pitchFamily="34" charset="-122"/>
-                <a:cs typeface="Nunito" pitchFamily="34" charset="-120"/>
-              </a:rPr>
-              <a:t>Nerv tizimi o'smalari asosan o'smalar, o'simliklar va hujayralardan iboratdir. Ular turli xil belgilarga ega bo'lishi mumkin.</a:t>
-            </a:r>
-            <a:endParaRPr lang="en-US" sz="1050" dirty="0"/>
-          </a:p>
-        </p:txBody>
-      </p:sp>
-      <p:sp>
-        <p:nvSpPr>
-          <p:cNvPr id="12" name="Shape 8"/>
-          <p:cNvSpPr/>
-          <p:nvPr/>
-        </p:nvSpPr>
-        <p:spPr>
-          <a:xfrm>
-            <a:off x="6446157" y="1520039"/>
-            <a:ext cx="2026650" cy="241399"/>
-          </a:xfrm>
-          <a:custGeom>
-            <a:avLst/>
-            <a:gdLst/>
-            <a:ahLst/>
-            <a:cxnLst/>
-            <a:rect l="l" t="t" r="r" b="b"/>
-            <a:pathLst>
-              <a:path w="2026650" h="241399">
-                <a:moveTo>
-                  <a:pt x="0" y="0"/>
-                </a:moveTo>
-                <a:lnTo>
-                  <a:pt x="2026650" y="0"/>
-                </a:lnTo>
-                <a:lnTo>
-                  <a:pt x="2026650" y="241399"/>
-                </a:lnTo>
-                <a:lnTo>
-                  <a:pt x="0" y="241399"/>
-                </a:lnTo>
-                <a:close/>
-              </a:path>
-            </a:pathLst>
-          </a:custGeom>
-          <a:solidFill>
-            <a:srgbClr val="FFFFFF">
-              <a:alpha val="0"/>
-            </a:srgbClr>
-          </a:solidFill>
-          <a:ln/>
-        </p:spPr>
-      </p:sp>
-      <p:sp>
-        <p:nvSpPr>
-          <p:cNvPr id="13" name="Text 9"/>
-          <p:cNvSpPr/>
-          <p:nvPr/>
-        </p:nvSpPr>
-        <p:spPr>
-          <a:xfrm>
-            <a:off x="6446157" y="1520039"/>
-            <a:ext cx="2026650" cy="241399"/>
-          </a:xfrm>
-          <a:prstGeom prst="rect">
-            <a:avLst/>
-          </a:prstGeom>
-          <a:noFill/>
-          <a:ln/>
-        </p:spPr>
-        <p:txBody>
-          <a:bodyPr wrap="square" rtlCol="0" anchor="t"/>
-          <a:lstStyle/>
-          <a:p>
-            <a:pPr indent="0" marL="0">
-              <a:spcBef>
-                <a:spcPts val="375"/>
-              </a:spcBef>
-              <a:buNone/>
-            </a:pPr>
-            <a:endParaRPr lang="en-US" sz="1050" dirty="0"/>
-          </a:p>
-        </p:txBody>
-      </p:sp>
-      <p:sp>
-        <p:nvSpPr>
-          <p:cNvPr id="14" name="Shape 10"/>
-          <p:cNvSpPr/>
-          <p:nvPr/>
-        </p:nvSpPr>
-        <p:spPr>
-          <a:xfrm>
-            <a:off x="6446157" y="1520039"/>
-            <a:ext cx="2026650" cy="241399"/>
-          </a:xfrm>
-          <a:custGeom>
-            <a:avLst/>
-            <a:gdLst/>
-            <a:ahLst/>
-            <a:cxnLst/>
-            <a:rect l="l" t="t" r="r" b="b"/>
-            <a:pathLst>
-              <a:path w="2026650" h="241399">
-                <a:moveTo>
-                  <a:pt x="0" y="0"/>
-                </a:moveTo>
-                <a:lnTo>
-                  <a:pt x="2026650" y="0"/>
-                </a:lnTo>
-                <a:lnTo>
-                  <a:pt x="2026650" y="241399"/>
-                </a:lnTo>
-                <a:lnTo>
-                  <a:pt x="0" y="241399"/>
-                </a:lnTo>
-                <a:close/>
-              </a:path>
-            </a:pathLst>
-          </a:custGeom>
-          <a:solidFill>
-            <a:srgbClr val="000000">
-              <a:alpha val="0"/>
-            </a:srgbClr>
-          </a:solidFill>
-          <a:ln/>
-        </p:spPr>
-      </p:sp>
-      <p:sp>
-        <p:nvSpPr>
-          <p:cNvPr id="15" name="Text 11"/>
-          <p:cNvSpPr/>
-          <p:nvPr/>
-        </p:nvSpPr>
-        <p:spPr>
-          <a:xfrm>
-            <a:off x="6446157" y="1520039"/>
-            <a:ext cx="2026650" cy="241399"/>
-          </a:xfrm>
-          <a:prstGeom prst="rect">
-            <a:avLst/>
-          </a:prstGeom>
-          <a:noFill/>
-          <a:ln/>
-        </p:spPr>
-        <p:txBody>
-          <a:bodyPr wrap="square" rtlCol="0" anchor="t"/>
-          <a:lstStyle/>
-          <a:p>
-            <a:pPr algn="ctr" indent="0" marL="0">
-              <a:spcBef>
-                <a:spcPts val="375"/>
-              </a:spcBef>
-              <a:buNone/>
-            </a:pPr>
-            <a:r>
-              <a:rPr lang="en-US" sz="1125" b="1" dirty="0">
-                <a:solidFill>
-                  <a:srgbClr val="000000"/>
-                </a:solidFill>
-                <a:latin typeface="Nunito" pitchFamily="34" charset="0"/>
-                <a:ea typeface="Nunito" pitchFamily="34" charset="-122"/>
-                <a:cs typeface="Nunito" pitchFamily="34" charset="-120"/>
-              </a:rPr>
-              <a:t>O'smalarning turlari</a:t>
-            </a:r>
-            <a:endParaRPr lang="en-US" sz="1050" dirty="0"/>
-          </a:p>
-        </p:txBody>
-      </p:sp>
-      <p:sp>
-        <p:nvSpPr>
-          <p:cNvPr id="16" name="Shape 12"/>
-          <p:cNvSpPr/>
-          <p:nvPr/>
-        </p:nvSpPr>
-        <p:spPr>
-          <a:xfrm>
-            <a:off x="6517040" y="3923708"/>
-            <a:ext cx="2026650" cy="349523"/>
-          </a:xfrm>
-          <a:custGeom>
-            <a:avLst/>
-            <a:gdLst/>
-            <a:ahLst/>
-            <a:cxnLst/>
-            <a:rect l="l" t="t" r="r" b="b"/>
-            <a:pathLst>
-              <a:path w="2026650" h="349523">
-                <a:moveTo>
-                  <a:pt x="0" y="0"/>
-                </a:moveTo>
-                <a:lnTo>
-                  <a:pt x="2026650" y="0"/>
-                </a:lnTo>
-                <a:lnTo>
-                  <a:pt x="2026650" y="349523"/>
-                </a:lnTo>
-                <a:lnTo>
-                  <a:pt x="0" y="349523"/>
-                </a:lnTo>
-                <a:close/>
-              </a:path>
-            </a:pathLst>
-          </a:custGeom>
-          <a:solidFill>
-            <a:srgbClr val="FFFFFF">
-              <a:alpha val="0"/>
-            </a:srgbClr>
-          </a:solidFill>
-          <a:ln/>
-        </p:spPr>
-      </p:sp>
-      <p:sp>
-        <p:nvSpPr>
-          <p:cNvPr id="17" name="Text 13"/>
-          <p:cNvSpPr/>
-          <p:nvPr/>
-        </p:nvSpPr>
-        <p:spPr>
-          <a:xfrm>
-            <a:off x="6517040" y="3923708"/>
-            <a:ext cx="2026650" cy="349523"/>
-          </a:xfrm>
-          <a:prstGeom prst="rect">
-            <a:avLst/>
-          </a:prstGeom>
-          <a:noFill/>
-          <a:ln/>
-        </p:spPr>
-        <p:txBody>
-          <a:bodyPr wrap="square" rtlCol="0" anchor="t"/>
-          <a:lstStyle/>
-          <a:p>
-            <a:pPr indent="0" marL="0">
-              <a:spcBef>
-                <a:spcPts val="375"/>
-              </a:spcBef>
-              <a:buNone/>
-            </a:pPr>
-            <a:endParaRPr lang="en-US" sz="1050" dirty="0"/>
-          </a:p>
-        </p:txBody>
-      </p:sp>
-      <p:sp>
-        <p:nvSpPr>
-          <p:cNvPr id="18" name="Shape 14"/>
-          <p:cNvSpPr/>
-          <p:nvPr/>
-        </p:nvSpPr>
-        <p:spPr>
-          <a:xfrm>
-            <a:off x="6517040" y="3923708"/>
-            <a:ext cx="2026650" cy="349523"/>
-          </a:xfrm>
-          <a:custGeom>
-            <a:avLst/>
-            <a:gdLst/>
-            <a:ahLst/>
-            <a:cxnLst/>
-            <a:rect l="l" t="t" r="r" b="b"/>
-            <a:pathLst>
-              <a:path w="2026650" h="349523">
-                <a:moveTo>
-                  <a:pt x="0" y="0"/>
-                </a:moveTo>
-                <a:lnTo>
-                  <a:pt x="2026650" y="0"/>
-                </a:lnTo>
-                <a:lnTo>
-                  <a:pt x="2026650" y="349523"/>
-                </a:lnTo>
-                <a:lnTo>
-                  <a:pt x="0" y="349523"/>
-                </a:lnTo>
-                <a:close/>
-              </a:path>
-            </a:pathLst>
-          </a:custGeom>
-          <a:solidFill>
-            <a:srgbClr val="000000">
-              <a:alpha val="0"/>
-            </a:srgbClr>
-          </a:solidFill>
-          <a:ln/>
-        </p:spPr>
-      </p:sp>
-      <p:sp>
-        <p:nvSpPr>
-          <p:cNvPr id="19" name="Text 15"/>
-          <p:cNvSpPr/>
-          <p:nvPr/>
-        </p:nvSpPr>
-        <p:spPr>
-          <a:xfrm>
-            <a:off x="6517040" y="3923708"/>
-            <a:ext cx="2026650" cy="349523"/>
-          </a:xfrm>
-          <a:prstGeom prst="rect">
-            <a:avLst/>
-          </a:prstGeom>
-          <a:noFill/>
-          <a:ln/>
-        </p:spPr>
-        <p:txBody>
-          <a:bodyPr wrap="square" rtlCol="0" anchor="t"/>
-          <a:lstStyle/>
-          <a:p>
-            <a:pPr algn="ctr" indent="0" marL="0">
-              <a:spcBef>
-                <a:spcPts val="375"/>
-              </a:spcBef>
-              <a:buNone/>
-            </a:pPr>
-            <a:r>
-              <a:rPr lang="en-US" sz="975" dirty="0">
-                <a:solidFill>
-                  <a:srgbClr val="000000"/>
-                </a:solidFill>
-                <a:latin typeface="Nunito" pitchFamily="34" charset="0"/>
-                <a:ea typeface="Nunito" pitchFamily="34" charset="-122"/>
-                <a:cs typeface="Nunito" pitchFamily="34" charset="-120"/>
-              </a:rPr>
-              <a:t>O'smalar benign va malign bo'lishi mumkin. Har bir turi o'ziga xos alomatlarni ko'rsatadi.</a:t>
-            </a:r>
-            <a:endParaRPr lang="en-US" sz="1050" dirty="0"/>
-          </a:p>
-        </p:txBody>
-      </p:sp>
-      <p:sp>
-        <p:nvSpPr>
-          <p:cNvPr id="20" name="Shape 16"/>
-          <p:cNvSpPr/>
-          <p:nvPr/>
-        </p:nvSpPr>
-        <p:spPr>
-          <a:xfrm>
-            <a:off x="6481599" y="3307470"/>
-            <a:ext cx="2026650" cy="241399"/>
-          </a:xfrm>
-          <a:custGeom>
-            <a:avLst/>
-            <a:gdLst/>
-            <a:ahLst/>
-            <a:cxnLst/>
-            <a:rect l="l" t="t" r="r" b="b"/>
-            <a:pathLst>
-              <a:path w="2026650" h="241399">
-                <a:moveTo>
-                  <a:pt x="0" y="0"/>
-                </a:moveTo>
-                <a:lnTo>
-                  <a:pt x="2026650" y="0"/>
-                </a:lnTo>
-                <a:lnTo>
-                  <a:pt x="2026650" y="241399"/>
-                </a:lnTo>
-                <a:lnTo>
-                  <a:pt x="0" y="241399"/>
-                </a:lnTo>
-                <a:close/>
-              </a:path>
-            </a:pathLst>
-          </a:custGeom>
-          <a:solidFill>
-            <a:srgbClr val="FFFFFF">
-              <a:alpha val="0"/>
-            </a:srgbClr>
-          </a:solidFill>
-          <a:ln/>
-        </p:spPr>
-      </p:sp>
-      <p:sp>
-        <p:nvSpPr>
-          <p:cNvPr id="21" name="Text 17"/>
-          <p:cNvSpPr/>
-          <p:nvPr/>
-        </p:nvSpPr>
-        <p:spPr>
-          <a:xfrm>
-            <a:off x="6481599" y="3307470"/>
-            <a:ext cx="2026650" cy="241399"/>
-          </a:xfrm>
-          <a:prstGeom prst="rect">
-            <a:avLst/>
-          </a:prstGeom>
-          <a:noFill/>
-          <a:ln/>
-        </p:spPr>
-        <p:txBody>
-          <a:bodyPr wrap="square" rtlCol="0" anchor="t"/>
-          <a:lstStyle/>
-          <a:p>
-            <a:pPr indent="0" marL="0">
-              <a:spcBef>
-                <a:spcPts val="375"/>
-              </a:spcBef>
-              <a:buNone/>
-            </a:pPr>
-            <a:endParaRPr lang="en-US" sz="1050" dirty="0"/>
-          </a:p>
-        </p:txBody>
-      </p:sp>
-      <p:sp>
-        <p:nvSpPr>
-          <p:cNvPr id="22" name="Shape 18"/>
-          <p:cNvSpPr/>
-          <p:nvPr/>
-        </p:nvSpPr>
-        <p:spPr>
-          <a:xfrm>
-            <a:off x="6481599" y="3307470"/>
-            <a:ext cx="2026650" cy="241399"/>
-          </a:xfrm>
-          <a:custGeom>
-            <a:avLst/>
-            <a:gdLst/>
-            <a:ahLst/>
-            <a:cxnLst/>
-            <a:rect l="l" t="t" r="r" b="b"/>
-            <a:pathLst>
-              <a:path w="2026650" h="241399">
-                <a:moveTo>
-                  <a:pt x="0" y="0"/>
-                </a:moveTo>
-                <a:lnTo>
-                  <a:pt x="2026650" y="0"/>
-                </a:lnTo>
-                <a:lnTo>
-                  <a:pt x="2026650" y="241399"/>
-                </a:lnTo>
-                <a:lnTo>
-                  <a:pt x="0" y="241399"/>
-                </a:lnTo>
-                <a:close/>
-              </a:path>
-            </a:pathLst>
-          </a:custGeom>
-          <a:solidFill>
-            <a:srgbClr val="000000">
-              <a:alpha val="0"/>
-            </a:srgbClr>
-          </a:solidFill>
-          <a:ln/>
-        </p:spPr>
-      </p:sp>
-      <p:sp>
-        <p:nvSpPr>
-          <p:cNvPr id="23" name="Text 19"/>
-          <p:cNvSpPr/>
-          <p:nvPr/>
-        </p:nvSpPr>
-        <p:spPr>
-          <a:xfrm>
-            <a:off x="6481599" y="3307470"/>
-            <a:ext cx="2026650" cy="241399"/>
-          </a:xfrm>
-          <a:prstGeom prst="rect">
-            <a:avLst/>
-          </a:prstGeom>
-          <a:noFill/>
-          <a:ln/>
-        </p:spPr>
-        <p:txBody>
-          <a:bodyPr wrap="square" rtlCol="0" anchor="t"/>
-          <a:lstStyle/>
-          <a:p>
-            <a:pPr algn="ctr" indent="0" marL="0">
-              <a:spcBef>
-                <a:spcPts val="375"/>
-              </a:spcBef>
-              <a:buNone/>
-            </a:pPr>
-            <a:r>
-              <a:rPr lang="en-US" sz="1125" b="1" dirty="0">
-                <a:solidFill>
-                  <a:srgbClr val="000000"/>
-                </a:solidFill>
-                <a:latin typeface="Nunito" pitchFamily="34" charset="0"/>
-                <a:ea typeface="Nunito" pitchFamily="34" charset="-122"/>
-                <a:cs typeface="Nunito" pitchFamily="34" charset="-120"/>
-              </a:rPr>
-              <a:t>O'smalar belgilari</a:t>
-            </a:r>
-            <a:endParaRPr lang="en-US" sz="1050" dirty="0"/>
-          </a:p>
-        </p:txBody>
-      </p:sp>
-      <p:sp>
-        <p:nvSpPr>
-          <p:cNvPr id="24" name="Shape 20"/>
-          <p:cNvSpPr/>
-          <p:nvPr/>
-        </p:nvSpPr>
-        <p:spPr>
-          <a:xfrm>
-            <a:off x="600373" y="2018613"/>
-            <a:ext cx="2026650" cy="349523"/>
-          </a:xfrm>
-          <a:custGeom>
-            <a:avLst/>
-            <a:gdLst/>
-            <a:ahLst/>
-            <a:cxnLst/>
-            <a:rect l="l" t="t" r="r" b="b"/>
-            <a:pathLst>
-              <a:path w="2026650" h="349523">
-                <a:moveTo>
-                  <a:pt x="0" y="0"/>
-                </a:moveTo>
-                <a:lnTo>
-                  <a:pt x="2026650" y="0"/>
-                </a:lnTo>
-                <a:lnTo>
-                  <a:pt x="2026650" y="349523"/>
-                </a:lnTo>
-                <a:lnTo>
-                  <a:pt x="0" y="349523"/>
-                </a:lnTo>
-                <a:close/>
-              </a:path>
-            </a:pathLst>
-          </a:custGeom>
-          <a:solidFill>
-            <a:srgbClr val="FFFFFF">
-              <a:alpha val="0"/>
-            </a:srgbClr>
-          </a:solidFill>
-          <a:ln/>
-        </p:spPr>
-      </p:sp>
-      <p:sp>
-        <p:nvSpPr>
-          <p:cNvPr id="25" name="Text 21"/>
-          <p:cNvSpPr/>
-          <p:nvPr/>
-        </p:nvSpPr>
-        <p:spPr>
-          <a:xfrm>
-            <a:off x="600373" y="2018613"/>
-            <a:ext cx="2026650" cy="349523"/>
-          </a:xfrm>
-          <a:prstGeom prst="rect">
-            <a:avLst/>
-          </a:prstGeom>
-          <a:noFill/>
-          <a:ln/>
-        </p:spPr>
-        <p:txBody>
-          <a:bodyPr wrap="square" rtlCol="0" anchor="t"/>
-          <a:lstStyle/>
-          <a:p>
-            <a:pPr indent="0" marL="0">
-              <a:spcBef>
-                <a:spcPts val="375"/>
-              </a:spcBef>
-              <a:buNone/>
-            </a:pPr>
-            <a:endParaRPr lang="en-US" sz="1050" dirty="0"/>
-          </a:p>
-        </p:txBody>
-      </p:sp>
-      <p:sp>
-        <p:nvSpPr>
-          <p:cNvPr id="26" name="Shape 22"/>
-          <p:cNvSpPr/>
-          <p:nvPr/>
-        </p:nvSpPr>
-        <p:spPr>
-          <a:xfrm>
-            <a:off x="600373" y="2018613"/>
-            <a:ext cx="2026650" cy="349523"/>
-          </a:xfrm>
-          <a:custGeom>
-            <a:avLst/>
-            <a:gdLst/>
-            <a:ahLst/>
-            <a:cxnLst/>
-            <a:rect l="l" t="t" r="r" b="b"/>
-            <a:pathLst>
-              <a:path w="2026650" h="349523">
-                <a:moveTo>
-                  <a:pt x="0" y="0"/>
-                </a:moveTo>
-                <a:lnTo>
-                  <a:pt x="2026650" y="0"/>
-                </a:lnTo>
-                <a:lnTo>
-                  <a:pt x="2026650" y="349523"/>
-                </a:lnTo>
-                <a:lnTo>
-                  <a:pt x="0" y="349523"/>
-                </a:lnTo>
-                <a:close/>
-              </a:path>
-            </a:pathLst>
-          </a:custGeom>
-          <a:solidFill>
-            <a:srgbClr val="000000">
-              <a:alpha val="0"/>
-            </a:srgbClr>
-          </a:solidFill>
-          <a:ln/>
-        </p:spPr>
-      </p:sp>
-      <p:sp>
-        <p:nvSpPr>
-          <p:cNvPr id="27" name="Text 23"/>
-          <p:cNvSpPr/>
-          <p:nvPr/>
-        </p:nvSpPr>
-        <p:spPr>
-          <a:xfrm>
-            <a:off x="600373" y="2018613"/>
-            <a:ext cx="2026650" cy="349523"/>
-          </a:xfrm>
-          <a:prstGeom prst="rect">
-            <a:avLst/>
-          </a:prstGeom>
-          <a:noFill/>
-          <a:ln/>
-        </p:spPr>
-        <p:txBody>
-          <a:bodyPr wrap="square" rtlCol="0" anchor="t"/>
-          <a:lstStyle/>
-          <a:p>
-            <a:pPr algn="l" indent="0" marL="0">
-              <a:spcBef>
-                <a:spcPts val="375"/>
-              </a:spcBef>
-              <a:buNone/>
-            </a:pPr>
-            <a:r>
-              <a:rPr lang="en-US" sz="975" dirty="0">
-                <a:solidFill>
-                  <a:srgbClr val="000000"/>
-                </a:solidFill>
-                <a:latin typeface="Nunito" pitchFamily="34" charset="0"/>
-                <a:ea typeface="Nunito" pitchFamily="34" charset="-122"/>
-                <a:cs typeface="Nunito" pitchFamily="34" charset="-120"/>
-              </a:rPr>
-              <a:t>Asosiy belgilari: og'riq, shish va harakat cheklanishi.</a:t>
-            </a:r>
-            <a:endParaRPr lang="en-US" sz="1050" dirty="0"/>
-          </a:p>
-        </p:txBody>
-      </p:sp>
-      <p:sp>
-        <p:nvSpPr>
-          <p:cNvPr id="28" name="Shape 24"/>
-          <p:cNvSpPr/>
-          <p:nvPr/>
-        </p:nvSpPr>
-        <p:spPr>
-          <a:xfrm>
-            <a:off x="600373" y="1456867"/>
-            <a:ext cx="2026650" cy="241399"/>
-          </a:xfrm>
-          <a:custGeom>
-            <a:avLst/>
-            <a:gdLst/>
-            <a:ahLst/>
-            <a:cxnLst/>
-            <a:rect l="l" t="t" r="r" b="b"/>
-            <a:pathLst>
-              <a:path w="2026650" h="241399">
-                <a:moveTo>
-                  <a:pt x="0" y="0"/>
-                </a:moveTo>
-                <a:lnTo>
-                  <a:pt x="2026650" y="0"/>
-                </a:lnTo>
-                <a:lnTo>
-                  <a:pt x="2026650" y="241399"/>
-                </a:lnTo>
-                <a:lnTo>
-                  <a:pt x="0" y="241399"/>
-                </a:lnTo>
-                <a:close/>
-              </a:path>
-            </a:pathLst>
-          </a:custGeom>
-          <a:solidFill>
-            <a:srgbClr val="FFFFFF">
-              <a:alpha val="0"/>
-            </a:srgbClr>
-          </a:solidFill>
-          <a:ln/>
-        </p:spPr>
-      </p:sp>
-      <p:sp>
-        <p:nvSpPr>
-          <p:cNvPr id="29" name="Text 25"/>
-          <p:cNvSpPr/>
-          <p:nvPr/>
-        </p:nvSpPr>
-        <p:spPr>
-          <a:xfrm>
-            <a:off x="600373" y="1456867"/>
-            <a:ext cx="2026650" cy="241399"/>
-          </a:xfrm>
-          <a:prstGeom prst="rect">
-            <a:avLst/>
-          </a:prstGeom>
-          <a:noFill/>
-          <a:ln/>
-        </p:spPr>
-        <p:txBody>
-          <a:bodyPr wrap="square" rtlCol="0" anchor="t"/>
-          <a:lstStyle/>
-          <a:p>
-            <a:pPr indent="0" marL="0">
-              <a:spcBef>
-                <a:spcPts val="375"/>
-              </a:spcBef>
-              <a:buNone/>
-            </a:pPr>
-            <a:endParaRPr lang="en-US" sz="1050" dirty="0"/>
-          </a:p>
-        </p:txBody>
-      </p:sp>
-      <p:sp>
-        <p:nvSpPr>
-          <p:cNvPr id="30" name="Shape 26"/>
-          <p:cNvSpPr/>
-          <p:nvPr/>
-        </p:nvSpPr>
-        <p:spPr>
-          <a:xfrm>
-            <a:off x="600373" y="1456867"/>
-            <a:ext cx="2026650" cy="241399"/>
-          </a:xfrm>
-          <a:custGeom>
-            <a:avLst/>
-            <a:gdLst/>
-            <a:ahLst/>
-            <a:cxnLst/>
-            <a:rect l="l" t="t" r="r" b="b"/>
-            <a:pathLst>
-              <a:path w="2026650" h="241399">
-                <a:moveTo>
-                  <a:pt x="0" y="0"/>
-                </a:moveTo>
-                <a:lnTo>
-                  <a:pt x="2026650" y="0"/>
-                </a:lnTo>
-                <a:lnTo>
-                  <a:pt x="2026650" y="241399"/>
-                </a:lnTo>
-                <a:lnTo>
-                  <a:pt x="0" y="241399"/>
-                </a:lnTo>
-                <a:close/>
-              </a:path>
-            </a:pathLst>
-          </a:custGeom>
-          <a:solidFill>
-            <a:srgbClr val="000000">
-              <a:alpha val="0"/>
-            </a:srgbClr>
-          </a:solidFill>
-          <a:ln/>
-        </p:spPr>
-      </p:sp>
-      <p:sp>
-        <p:nvSpPr>
-          <p:cNvPr id="31" name="Text 27"/>
-          <p:cNvSpPr/>
-          <p:nvPr/>
-        </p:nvSpPr>
-        <p:spPr>
-          <a:xfrm>
-            <a:off x="600373" y="1456867"/>
-            <a:ext cx="2026650" cy="241399"/>
-          </a:xfrm>
-          <a:prstGeom prst="rect">
-            <a:avLst/>
-          </a:prstGeom>
-          <a:noFill/>
-          <a:ln/>
-        </p:spPr>
-        <p:txBody>
-          <a:bodyPr wrap="square" rtlCol="0" anchor="t"/>
-          <a:lstStyle/>
-          <a:p>
-            <a:pPr algn="ctr" indent="0" marL="0">
-              <a:spcBef>
-                <a:spcPts val="375"/>
-              </a:spcBef>
-              <a:buNone/>
-            </a:pPr>
-            <a:r>
-              <a:rPr lang="en-US" sz="1125" b="1" dirty="0">
-                <a:solidFill>
-                  <a:srgbClr val="000000"/>
-                </a:solidFill>
-                <a:latin typeface="Nunito" pitchFamily="34" charset="0"/>
-                <a:ea typeface="Nunito" pitchFamily="34" charset="-122"/>
-                <a:cs typeface="Nunito" pitchFamily="34" charset="-120"/>
-              </a:rPr>
-              <a:t>O'smalarni aniqlash usullari</a:t>
-            </a:r>
-            <a:endParaRPr lang="en-US" sz="1050" dirty="0"/>
-          </a:p>
-        </p:txBody>
-      </p:sp>
-      <p:sp>
-        <p:nvSpPr>
-          <p:cNvPr id="32" name="Shape 28"/>
-          <p:cNvSpPr/>
-          <p:nvPr/>
-        </p:nvSpPr>
-        <p:spPr>
-          <a:xfrm>
-            <a:off x="600373" y="3866558"/>
-            <a:ext cx="2026650" cy="349523"/>
-          </a:xfrm>
-          <a:custGeom>
-            <a:avLst/>
-            <a:gdLst/>
-            <a:ahLst/>
-            <a:cxnLst/>
-            <a:rect l="l" t="t" r="r" b="b"/>
-            <a:pathLst>
-              <a:path w="2026650" h="349523">
-                <a:moveTo>
-                  <a:pt x="0" y="0"/>
-                </a:moveTo>
-                <a:lnTo>
-                  <a:pt x="2026650" y="0"/>
-                </a:lnTo>
-                <a:lnTo>
-                  <a:pt x="2026650" y="349523"/>
-                </a:lnTo>
-                <a:lnTo>
-                  <a:pt x="0" y="349523"/>
-                </a:lnTo>
-                <a:close/>
-              </a:path>
-            </a:pathLst>
-          </a:custGeom>
-          <a:solidFill>
-            <a:srgbClr val="FFFFFF">
-              <a:alpha val="0"/>
-            </a:srgbClr>
-          </a:solidFill>
-          <a:ln/>
-        </p:spPr>
-      </p:sp>
-      <p:sp>
-        <p:nvSpPr>
-          <p:cNvPr id="33" name="Text 29"/>
-          <p:cNvSpPr/>
-          <p:nvPr/>
-        </p:nvSpPr>
-        <p:spPr>
-          <a:xfrm>
-            <a:off x="600373" y="3866558"/>
-            <a:ext cx="2026650" cy="349523"/>
-          </a:xfrm>
-          <a:prstGeom prst="rect">
-            <a:avLst/>
-          </a:prstGeom>
-          <a:noFill/>
-          <a:ln/>
-        </p:spPr>
-        <p:txBody>
-          <a:bodyPr wrap="square" rtlCol="0" anchor="t"/>
-          <a:lstStyle/>
-          <a:p>
-            <a:pPr indent="0" marL="0">
-              <a:spcBef>
-                <a:spcPts val="375"/>
-              </a:spcBef>
-              <a:buNone/>
-            </a:pPr>
-            <a:endParaRPr lang="en-US" sz="1050" dirty="0"/>
-          </a:p>
-        </p:txBody>
-      </p:sp>
-      <p:sp>
-        <p:nvSpPr>
-          <p:cNvPr id="34" name="Shape 30"/>
-          <p:cNvSpPr/>
-          <p:nvPr/>
-        </p:nvSpPr>
-        <p:spPr>
-          <a:xfrm>
-            <a:off x="600373" y="3866558"/>
-            <a:ext cx="2026650" cy="349523"/>
-          </a:xfrm>
-          <a:custGeom>
-            <a:avLst/>
-            <a:gdLst/>
-            <a:ahLst/>
-            <a:cxnLst/>
-            <a:rect l="l" t="t" r="r" b="b"/>
-            <a:pathLst>
-              <a:path w="2026650" h="349523">
-                <a:moveTo>
-                  <a:pt x="0" y="0"/>
-                </a:moveTo>
-                <a:lnTo>
-                  <a:pt x="2026650" y="0"/>
-                </a:lnTo>
-                <a:lnTo>
-                  <a:pt x="2026650" y="349523"/>
-                </a:lnTo>
-                <a:lnTo>
-                  <a:pt x="0" y="349523"/>
-                </a:lnTo>
-                <a:close/>
-              </a:path>
-            </a:pathLst>
-          </a:custGeom>
-          <a:solidFill>
-            <a:srgbClr val="000000">
-              <a:alpha val="0"/>
-            </a:srgbClr>
-          </a:solidFill>
-          <a:ln/>
-        </p:spPr>
-      </p:sp>
-      <p:sp>
-        <p:nvSpPr>
-          <p:cNvPr id="35" name="Text 31"/>
-          <p:cNvSpPr/>
-          <p:nvPr/>
-        </p:nvSpPr>
-        <p:spPr>
-          <a:xfrm>
-            <a:off x="600373" y="3866558"/>
-            <a:ext cx="2026650" cy="349523"/>
-          </a:xfrm>
-          <a:prstGeom prst="rect">
-            <a:avLst/>
-          </a:prstGeom>
-          <a:noFill/>
-          <a:ln/>
-        </p:spPr>
-        <p:txBody>
-          <a:bodyPr wrap="square" rtlCol="0" anchor="t"/>
-          <a:lstStyle/>
-          <a:p>
-            <a:pPr algn="ctr" indent="0" marL="0">
-              <a:spcBef>
-                <a:spcPts val="375"/>
-              </a:spcBef>
-              <a:buNone/>
-            </a:pPr>
-            <a:r>
-              <a:rPr lang="en-US" sz="975" dirty="0">
-                <a:solidFill>
-                  <a:srgbClr val="000000"/>
-                </a:solidFill>
-                <a:latin typeface="Nunito" pitchFamily="34" charset="0"/>
-                <a:ea typeface="Nunito" pitchFamily="34" charset="-122"/>
-                <a:cs typeface="Nunito" pitchFamily="34" charset="-120"/>
-              </a:rPr>
-              <a:t>Tahlil: tomografiya, rentgen va biopsiya. Bu usullar o'smalarni aniqlashda muhim.</a:t>
-            </a:r>
-            <a:endParaRPr lang="en-US" sz="1050" dirty="0"/>
-          </a:p>
-        </p:txBody>
-      </p:sp>
-      <p:sp>
-        <p:nvSpPr>
-          <p:cNvPr id="36" name="Shape 32"/>
-          <p:cNvSpPr/>
-          <p:nvPr/>
-        </p:nvSpPr>
-        <p:spPr>
-          <a:xfrm>
-            <a:off x="482233" y="3307470"/>
-            <a:ext cx="2026650" cy="241399"/>
-          </a:xfrm>
-          <a:custGeom>
-            <a:avLst/>
-            <a:gdLst/>
-            <a:ahLst/>
-            <a:cxnLst/>
-            <a:rect l="l" t="t" r="r" b="b"/>
-            <a:pathLst>
-              <a:path w="2026650" h="241399">
-                <a:moveTo>
-                  <a:pt x="0" y="0"/>
-                </a:moveTo>
-                <a:lnTo>
-                  <a:pt x="2026650" y="0"/>
-                </a:lnTo>
-                <a:lnTo>
-                  <a:pt x="2026650" y="241399"/>
-                </a:lnTo>
-                <a:lnTo>
-                  <a:pt x="0" y="241399"/>
-                </a:lnTo>
-                <a:close/>
-              </a:path>
-            </a:pathLst>
-          </a:custGeom>
-          <a:solidFill>
-            <a:srgbClr val="FFFFFF">
-              <a:alpha val="0"/>
-            </a:srgbClr>
-          </a:solidFill>
-          <a:ln/>
-        </p:spPr>
-      </p:sp>
-      <p:sp>
-        <p:nvSpPr>
-          <p:cNvPr id="37" name="Text 33"/>
-          <p:cNvSpPr/>
-          <p:nvPr/>
-        </p:nvSpPr>
-        <p:spPr>
-          <a:xfrm>
-            <a:off x="482233" y="3307470"/>
-            <a:ext cx="2026650" cy="241399"/>
-          </a:xfrm>
-          <a:prstGeom prst="rect">
-            <a:avLst/>
-          </a:prstGeom>
-          <a:noFill/>
-          <a:ln/>
-        </p:spPr>
-        <p:txBody>
-          <a:bodyPr wrap="square" rtlCol="0" anchor="t"/>
-          <a:lstStyle/>
-          <a:p>
-            <a:pPr indent="0" marL="0">
-              <a:spcBef>
-                <a:spcPts val="375"/>
-              </a:spcBef>
-              <a:buNone/>
-            </a:pPr>
-            <a:endParaRPr lang="en-US" sz="1050" dirty="0"/>
-          </a:p>
-        </p:txBody>
-      </p:sp>
-      <p:sp>
-        <p:nvSpPr>
-          <p:cNvPr id="38" name="Shape 34"/>
-          <p:cNvSpPr/>
-          <p:nvPr/>
-        </p:nvSpPr>
-        <p:spPr>
-          <a:xfrm>
-            <a:off x="482233" y="3307470"/>
-            <a:ext cx="2026650" cy="241399"/>
-          </a:xfrm>
-          <a:custGeom>
-            <a:avLst/>
-            <a:gdLst/>
-            <a:ahLst/>
-            <a:cxnLst/>
-            <a:rect l="l" t="t" r="r" b="b"/>
-            <a:pathLst>
-              <a:path w="2026650" h="241399">
-                <a:moveTo>
-                  <a:pt x="0" y="0"/>
-                </a:moveTo>
-                <a:lnTo>
-                  <a:pt x="2026650" y="0"/>
-                </a:lnTo>
-                <a:lnTo>
-                  <a:pt x="2026650" y="241399"/>
-                </a:lnTo>
-                <a:lnTo>
-                  <a:pt x="0" y="241399"/>
-                </a:lnTo>
-                <a:close/>
-              </a:path>
-            </a:pathLst>
-          </a:custGeom>
-          <a:solidFill>
-            <a:srgbClr val="000000">
-              <a:alpha val="0"/>
-            </a:srgbClr>
-          </a:solidFill>
-          <a:ln/>
-        </p:spPr>
-      </p:sp>
-      <p:sp>
-        <p:nvSpPr>
-          <p:cNvPr id="39" name="Text 35"/>
-          <p:cNvSpPr/>
-          <p:nvPr/>
-        </p:nvSpPr>
-        <p:spPr>
-          <a:xfrm>
-            <a:off x="482233" y="3307470"/>
-            <a:ext cx="2026650" cy="241399"/>
-          </a:xfrm>
-          <a:prstGeom prst="rect">
-            <a:avLst/>
-          </a:prstGeom>
-          <a:noFill/>
-          <a:ln/>
-        </p:spPr>
-        <p:txBody>
-          <a:bodyPr wrap="square" rtlCol="0" anchor="t"/>
-          <a:lstStyle/>
-          <a:p>
-            <a:pPr algn="ctr" indent="0" marL="0">
-              <a:spcBef>
-                <a:spcPts val="375"/>
-              </a:spcBef>
-              <a:buNone/>
-            </a:pPr>
-            <a:r>
-              <a:rPr lang="en-US" sz="1125" b="1" dirty="0">
-                <a:solidFill>
-                  <a:srgbClr val="000000"/>
-                </a:solidFill>
-                <a:latin typeface="Nunito" pitchFamily="34" charset="0"/>
-                <a:ea typeface="Nunito" pitchFamily="34" charset="-122"/>
-                <a:cs typeface="Nunito" pitchFamily="34" charset="-120"/>
-              </a:rPr>
-              <a:t>Davolash usullari</a:t>
-            </a:r>
-            <a:endParaRPr lang="en-US" sz="1050" dirty="0"/>
-          </a:p>
-        </p:txBody>
-      </p:sp>
     </p:spTree>
   </p:cSld>
   <p:clrMapOvr>
@@ -9989,7 +9989,7 @@
       </p:grpSpPr>
       <p:pic>
         <p:nvPicPr>
-          <p:cNvPr id="2" name="Image 0" descr="./images\slide12_img108.png">    </p:cNvPr>
+          <p:cNvPr id="2" name="Image 0" descr="https://islife.uz/wp-content/uploads/2023/02/birinchi-erdam-768x349.png">    </p:cNvPr>
           <p:cNvPicPr>
             <a:picLocks noChangeAspect="1"/>
           </p:cNvPicPr>
@@ -10013,7 +10013,7 @@
       </p:pic>
       <p:pic>
         <p:nvPicPr>
-          <p:cNvPr id="3" name="Image 1" descr="./images\slide12_img109.jpeg">    </p:cNvPr>
+          <p:cNvPr id="3" name="Image 1" descr="./images\slide11_img107.png">    </p:cNvPr>
           <p:cNvPicPr>
             <a:picLocks noChangeAspect="1"/>
           </p:cNvPicPr>
@@ -10021,13 +10021,14 @@
         </p:nvPicPr>
         <p:blipFill>
           <a:blip r:embed="rId2"/>
-          <a:srcRect l="0" r="45747" t="4269" b="81232"/>
-          <a:stretch/>
+          <a:stretch>
+            <a:fillRect/>
+          </a:stretch>
         </p:blipFill>
         <p:spPr>
           <a:xfrm>
-            <a:off x="0" y="0"/>
-            <a:ext cx="8778240" cy="1797420"/>
+            <a:off x="6087098" y="1683097"/>
+            <a:ext cx="2542552" cy="3046631"/>
           </a:xfrm>
           <a:prstGeom prst="rect">
             <a:avLst/>
@@ -10042,8 +10043,8 @@
         </p:nvSpPr>
         <p:spPr>
           <a:xfrm>
-            <a:off x="614136" y="1912706"/>
-            <a:ext cx="7826859" cy="476250"/>
+            <a:off x="874042" y="518568"/>
+            <a:ext cx="7395915" cy="476250"/>
           </a:xfrm>
           <a:custGeom>
             <a:avLst/>
@@ -10052,15 +10053,15 @@
             <a:cxnLst/>
             <a:rect l="l" t="t" r="r" b="b"/>
             <a:pathLst>
-              <a:path w="7826859" h="476250">
+              <a:path w="7395915" h="476250">
                 <a:moveTo>
                   <a:pt x="0" y="0"/>
                 </a:moveTo>
                 <a:lnTo>
-                  <a:pt x="7826859" y="0"/>
-                </a:lnTo>
-                <a:lnTo>
-                  <a:pt x="7826859" y="476250"/>
+                  <a:pt x="7395915" y="0"/>
+                </a:lnTo>
+                <a:lnTo>
+                  <a:pt x="7395915" y="476250"/>
                 </a:lnTo>
                 <a:lnTo>
                   <a:pt x="0" y="476250"/>
@@ -10085,8 +10086,8 @@
         </p:nvSpPr>
         <p:spPr>
           <a:xfrm>
-            <a:off x="614136" y="1912706"/>
-            <a:ext cx="7826859" cy="476250"/>
+            <a:off x="874042" y="518568"/>
+            <a:ext cx="7395915" cy="476250"/>
           </a:xfrm>
           <a:prstGeom prst="rect">
             <a:avLst/>
@@ -10116,8 +10117,8 @@
         </p:nvSpPr>
         <p:spPr>
           <a:xfrm>
-            <a:off x="614136" y="1912706"/>
-            <a:ext cx="7826859" cy="476250"/>
+            <a:off x="874042" y="518568"/>
+            <a:ext cx="7395915" cy="476250"/>
           </a:xfrm>
           <a:custGeom>
             <a:avLst/>
@@ -10126,15 +10127,15 @@
             <a:cxnLst/>
             <a:rect l="l" t="t" r="r" b="b"/>
             <a:pathLst>
-              <a:path w="7826859" h="476250">
+              <a:path w="7395915" h="476250">
                 <a:moveTo>
                   <a:pt x="0" y="0"/>
                 </a:moveTo>
                 <a:lnTo>
-                  <a:pt x="7826859" y="0"/>
-                </a:lnTo>
-                <a:lnTo>
-                  <a:pt x="7826859" y="476250"/>
+                  <a:pt x="7395915" y="0"/>
+                </a:lnTo>
+                <a:lnTo>
+                  <a:pt x="7395915" y="476250"/>
                 </a:lnTo>
                 <a:lnTo>
                   <a:pt x="0" y="476250"/>
@@ -10159,8 +10160,8 @@
         </p:nvSpPr>
         <p:spPr>
           <a:xfrm>
-            <a:off x="614136" y="1912706"/>
-            <a:ext cx="7826859" cy="476250"/>
+            <a:off x="874042" y="518568"/>
+            <a:ext cx="7395915" cy="476250"/>
           </a:xfrm>
           <a:prstGeom prst="rect">
             <a:avLst/>
@@ -10187,7 +10188,7 @@
                 <a:ea typeface="Caveat Brush" pitchFamily="34" charset="-122"/>
                 <a:cs typeface="Caveat Brush" pitchFamily="34" charset="-120"/>
               </a:rPr>
-              <a:t>Nerv tizimi o'smalarini davolash usullari</a:t>
+              <a:t>Davolash Usullari</a:t>
             </a:r>
             <a:endParaRPr lang="en-US" sz="1050" dirty="0"/>
           </a:p>
@@ -10201,8 +10202,8 @@
         </p:nvSpPr>
         <p:spPr>
           <a:xfrm>
-            <a:off x="661391" y="2388956"/>
-            <a:ext cx="7779603" cy="2454473"/>
+            <a:off x="705902" y="1623611"/>
+            <a:ext cx="1713750" cy="552450"/>
           </a:xfrm>
           <a:custGeom>
             <a:avLst/>
@@ -10211,18 +10212,18 @@
             <a:cxnLst/>
             <a:rect l="l" t="t" r="r" b="b"/>
             <a:pathLst>
-              <a:path w="7779603" h="2454473">
+              <a:path w="1713750" h="552450">
                 <a:moveTo>
                   <a:pt x="0" y="0"/>
                 </a:moveTo>
                 <a:lnTo>
-                  <a:pt x="7779603" y="0"/>
-                </a:lnTo>
-                <a:lnTo>
-                  <a:pt x="7779603" y="2454473"/>
-                </a:lnTo>
-                <a:lnTo>
-                  <a:pt x="0" y="2454473"/>
+                  <a:pt x="1713750" y="0"/>
+                </a:lnTo>
+                <a:lnTo>
+                  <a:pt x="1713750" y="552450"/>
+                </a:lnTo>
+                <a:lnTo>
+                  <a:pt x="0" y="552450"/>
                 </a:lnTo>
                 <a:close/>
               </a:path>
@@ -10244,8 +10245,8 @@
         </p:nvSpPr>
         <p:spPr>
           <a:xfrm>
-            <a:off x="661391" y="2388956"/>
-            <a:ext cx="7779603" cy="2454473"/>
+            <a:off x="705902" y="1623611"/>
+            <a:ext cx="1713750" cy="552450"/>
           </a:xfrm>
           <a:prstGeom prst="rect">
             <a:avLst/>
@@ -10275,8 +10276,8 @@
         </p:nvSpPr>
         <p:spPr>
           <a:xfrm>
-            <a:off x="661391" y="2388956"/>
-            <a:ext cx="7779603" cy="2454473"/>
+            <a:off x="705902" y="1623611"/>
+            <a:ext cx="1713750" cy="552450"/>
           </a:xfrm>
           <a:custGeom>
             <a:avLst/>
@@ -10285,18 +10286,18 @@
             <a:cxnLst/>
             <a:rect l="l" t="t" r="r" b="b"/>
             <a:pathLst>
-              <a:path w="7779603" h="2454473">
+              <a:path w="1713750" h="552450">
                 <a:moveTo>
                   <a:pt x="0" y="0"/>
                 </a:moveTo>
                 <a:lnTo>
-                  <a:pt x="7779603" y="0"/>
-                </a:lnTo>
-                <a:lnTo>
-                  <a:pt x="7779603" y="2454473"/>
-                </a:lnTo>
-                <a:lnTo>
-                  <a:pt x="0" y="2454473"/>
+                  <a:pt x="1713750" y="0"/>
+                </a:lnTo>
+                <a:lnTo>
+                  <a:pt x="1713750" y="552450"/>
+                </a:lnTo>
+                <a:lnTo>
+                  <a:pt x="0" y="552450"/>
                 </a:lnTo>
                 <a:close/>
               </a:path>
@@ -10318,8 +10319,644 @@
         </p:nvSpPr>
         <p:spPr>
           <a:xfrm>
-            <a:off x="661391" y="2388956"/>
-            <a:ext cx="7779603" cy="2454473"/>
+            <a:off x="705902" y="1623611"/>
+            <a:ext cx="1713750" cy="552450"/>
+          </a:xfrm>
+          <a:prstGeom prst="rect">
+            <a:avLst/>
+          </a:prstGeom>
+          <a:noFill/>
+          <a:ln/>
+        </p:spPr>
+        <p:txBody>
+          <a:bodyPr wrap="square" rtlCol="0" anchor="t"/>
+          <a:lstStyle/>
+          <a:p>
+            <a:pPr algn="ctr" indent="0" marL="0">
+              <a:spcBef>
+                <a:spcPts val="375"/>
+              </a:spcBef>
+              <a:buNone/>
+            </a:pPr>
+            <a:r>
+              <a:rPr lang="en-US" sz="1800" dirty="0">
+                <a:solidFill>
+                  <a:srgbClr val="45464D"/>
+                </a:solidFill>
+                <a:latin typeface="Caveat Brush" pitchFamily="34" charset="0"/>
+                <a:ea typeface="Caveat Brush" pitchFamily="34" charset="-122"/>
+                <a:cs typeface="Caveat Brush" pitchFamily="34" charset="-120"/>
+              </a:rPr>
+              <a:t>Birinchi</a:t>
+            </a:r>
+            <a:endParaRPr lang="en-US" sz="1050" dirty="0"/>
+          </a:p>
+        </p:txBody>
+      </p:sp>
+      <p:sp>
+        <p:nvSpPr>
+          <p:cNvPr id="12" name="Shape 8"/>
+          <p:cNvSpPr/>
+          <p:nvPr/>
+        </p:nvSpPr>
+        <p:spPr>
+          <a:xfrm>
+            <a:off x="640191" y="3311188"/>
+            <a:ext cx="1998818" cy="552450"/>
+          </a:xfrm>
+          <a:custGeom>
+            <a:avLst/>
+            <a:gdLst/>
+            <a:ahLst/>
+            <a:cxnLst/>
+            <a:rect l="l" t="t" r="r" b="b"/>
+            <a:pathLst>
+              <a:path w="1998818" h="552450">
+                <a:moveTo>
+                  <a:pt x="0" y="0"/>
+                </a:moveTo>
+                <a:lnTo>
+                  <a:pt x="1998818" y="0"/>
+                </a:lnTo>
+                <a:lnTo>
+                  <a:pt x="1998818" y="552450"/>
+                </a:lnTo>
+                <a:lnTo>
+                  <a:pt x="0" y="552450"/>
+                </a:lnTo>
+                <a:close/>
+              </a:path>
+            </a:pathLst>
+          </a:custGeom>
+          <a:solidFill>
+            <a:srgbClr val="FFFFFF">
+              <a:alpha val="0"/>
+            </a:srgbClr>
+          </a:solidFill>
+          <a:ln/>
+        </p:spPr>
+      </p:sp>
+      <p:sp>
+        <p:nvSpPr>
+          <p:cNvPr id="13" name="Text 9"/>
+          <p:cNvSpPr/>
+          <p:nvPr/>
+        </p:nvSpPr>
+        <p:spPr>
+          <a:xfrm>
+            <a:off x="640191" y="3311188"/>
+            <a:ext cx="1998818" cy="552450"/>
+          </a:xfrm>
+          <a:prstGeom prst="rect">
+            <a:avLst/>
+          </a:prstGeom>
+          <a:noFill/>
+          <a:ln/>
+        </p:spPr>
+        <p:txBody>
+          <a:bodyPr wrap="square" rtlCol="0" anchor="t"/>
+          <a:lstStyle/>
+          <a:p>
+            <a:pPr indent="0" marL="0">
+              <a:spcBef>
+                <a:spcPts val="375"/>
+              </a:spcBef>
+              <a:buNone/>
+            </a:pPr>
+            <a:endParaRPr lang="en-US" sz="1050" dirty="0"/>
+          </a:p>
+        </p:txBody>
+      </p:sp>
+      <p:sp>
+        <p:nvSpPr>
+          <p:cNvPr id="14" name="Shape 10"/>
+          <p:cNvSpPr/>
+          <p:nvPr/>
+        </p:nvSpPr>
+        <p:spPr>
+          <a:xfrm>
+            <a:off x="640191" y="3311188"/>
+            <a:ext cx="1998818" cy="552450"/>
+          </a:xfrm>
+          <a:custGeom>
+            <a:avLst/>
+            <a:gdLst/>
+            <a:ahLst/>
+            <a:cxnLst/>
+            <a:rect l="l" t="t" r="r" b="b"/>
+            <a:pathLst>
+              <a:path w="1998818" h="552450">
+                <a:moveTo>
+                  <a:pt x="0" y="0"/>
+                </a:moveTo>
+                <a:lnTo>
+                  <a:pt x="1998818" y="0"/>
+                </a:lnTo>
+                <a:lnTo>
+                  <a:pt x="1998818" y="552450"/>
+                </a:lnTo>
+                <a:lnTo>
+                  <a:pt x="0" y="552450"/>
+                </a:lnTo>
+                <a:close/>
+              </a:path>
+            </a:pathLst>
+          </a:custGeom>
+          <a:solidFill>
+            <a:srgbClr val="000000">
+              <a:alpha val="0"/>
+            </a:srgbClr>
+          </a:solidFill>
+          <a:ln/>
+        </p:spPr>
+      </p:sp>
+      <p:sp>
+        <p:nvSpPr>
+          <p:cNvPr id="15" name="Text 11"/>
+          <p:cNvSpPr/>
+          <p:nvPr/>
+        </p:nvSpPr>
+        <p:spPr>
+          <a:xfrm>
+            <a:off x="640191" y="3311188"/>
+            <a:ext cx="1998818" cy="552450"/>
+          </a:xfrm>
+          <a:prstGeom prst="rect">
+            <a:avLst/>
+          </a:prstGeom>
+          <a:noFill/>
+          <a:ln/>
+        </p:spPr>
+        <p:txBody>
+          <a:bodyPr wrap="square" rtlCol="0" anchor="t"/>
+          <a:lstStyle/>
+          <a:p>
+            <a:pPr algn="ctr" indent="0" marL="0">
+              <a:spcBef>
+                <a:spcPts val="375"/>
+              </a:spcBef>
+              <a:buNone/>
+            </a:pPr>
+            <a:r>
+              <a:rPr lang="en-US" sz="1800" dirty="0">
+                <a:solidFill>
+                  <a:srgbClr val="45464D"/>
+                </a:solidFill>
+                <a:latin typeface="Caveat Brush" pitchFamily="34" charset="0"/>
+                <a:ea typeface="Caveat Brush" pitchFamily="34" charset="-122"/>
+                <a:cs typeface="Caveat Brush" pitchFamily="34" charset="-120"/>
+              </a:rPr>
+              <a:t>Uchinchi</a:t>
+            </a:r>
+            <a:endParaRPr lang="en-US" sz="1050" dirty="0"/>
+          </a:p>
+        </p:txBody>
+      </p:sp>
+      <p:sp>
+        <p:nvSpPr>
+          <p:cNvPr id="16" name="Shape 12"/>
+          <p:cNvSpPr/>
+          <p:nvPr/>
+        </p:nvSpPr>
+        <p:spPr>
+          <a:xfrm>
+            <a:off x="3848551" y="1623612"/>
+            <a:ext cx="1082550" cy="552450"/>
+          </a:xfrm>
+          <a:custGeom>
+            <a:avLst/>
+            <a:gdLst/>
+            <a:ahLst/>
+            <a:cxnLst/>
+            <a:rect l="l" t="t" r="r" b="b"/>
+            <a:pathLst>
+              <a:path w="1082550" h="552450">
+                <a:moveTo>
+                  <a:pt x="0" y="0"/>
+                </a:moveTo>
+                <a:lnTo>
+                  <a:pt x="1082550" y="0"/>
+                </a:lnTo>
+                <a:lnTo>
+                  <a:pt x="1082550" y="552450"/>
+                </a:lnTo>
+                <a:lnTo>
+                  <a:pt x="0" y="552450"/>
+                </a:lnTo>
+                <a:close/>
+              </a:path>
+            </a:pathLst>
+          </a:custGeom>
+          <a:solidFill>
+            <a:srgbClr val="FFFFFF">
+              <a:alpha val="0"/>
+            </a:srgbClr>
+          </a:solidFill>
+          <a:ln/>
+        </p:spPr>
+      </p:sp>
+      <p:sp>
+        <p:nvSpPr>
+          <p:cNvPr id="17" name="Text 13"/>
+          <p:cNvSpPr/>
+          <p:nvPr/>
+        </p:nvSpPr>
+        <p:spPr>
+          <a:xfrm>
+            <a:off x="3848551" y="1623612"/>
+            <a:ext cx="1082550" cy="552450"/>
+          </a:xfrm>
+          <a:prstGeom prst="rect">
+            <a:avLst/>
+          </a:prstGeom>
+          <a:noFill/>
+          <a:ln/>
+        </p:spPr>
+        <p:txBody>
+          <a:bodyPr wrap="square" rtlCol="0" anchor="t"/>
+          <a:lstStyle/>
+          <a:p>
+            <a:pPr indent="0" marL="0">
+              <a:spcBef>
+                <a:spcPts val="375"/>
+              </a:spcBef>
+              <a:buNone/>
+            </a:pPr>
+            <a:endParaRPr lang="en-US" sz="1050" dirty="0"/>
+          </a:p>
+        </p:txBody>
+      </p:sp>
+      <p:sp>
+        <p:nvSpPr>
+          <p:cNvPr id="18" name="Shape 14"/>
+          <p:cNvSpPr/>
+          <p:nvPr/>
+        </p:nvSpPr>
+        <p:spPr>
+          <a:xfrm>
+            <a:off x="3848551" y="1623612"/>
+            <a:ext cx="1082550" cy="552450"/>
+          </a:xfrm>
+          <a:custGeom>
+            <a:avLst/>
+            <a:gdLst/>
+            <a:ahLst/>
+            <a:cxnLst/>
+            <a:rect l="l" t="t" r="r" b="b"/>
+            <a:pathLst>
+              <a:path w="1082550" h="552450">
+                <a:moveTo>
+                  <a:pt x="0" y="0"/>
+                </a:moveTo>
+                <a:lnTo>
+                  <a:pt x="1082550" y="0"/>
+                </a:lnTo>
+                <a:lnTo>
+                  <a:pt x="1082550" y="552450"/>
+                </a:lnTo>
+                <a:lnTo>
+                  <a:pt x="0" y="552450"/>
+                </a:lnTo>
+                <a:close/>
+              </a:path>
+            </a:pathLst>
+          </a:custGeom>
+          <a:solidFill>
+            <a:srgbClr val="000000">
+              <a:alpha val="0"/>
+            </a:srgbClr>
+          </a:solidFill>
+          <a:ln/>
+        </p:spPr>
+      </p:sp>
+      <p:sp>
+        <p:nvSpPr>
+          <p:cNvPr id="19" name="Text 15"/>
+          <p:cNvSpPr/>
+          <p:nvPr/>
+        </p:nvSpPr>
+        <p:spPr>
+          <a:xfrm>
+            <a:off x="3848551" y="1623612"/>
+            <a:ext cx="1082550" cy="552450"/>
+          </a:xfrm>
+          <a:prstGeom prst="rect">
+            <a:avLst/>
+          </a:prstGeom>
+          <a:noFill/>
+          <a:ln/>
+        </p:spPr>
+        <p:txBody>
+          <a:bodyPr wrap="square" rtlCol="0" anchor="t"/>
+          <a:lstStyle/>
+          <a:p>
+            <a:pPr algn="ctr" indent="0" marL="0">
+              <a:spcBef>
+                <a:spcPts val="375"/>
+              </a:spcBef>
+              <a:buNone/>
+            </a:pPr>
+            <a:r>
+              <a:rPr lang="en-US" sz="1800" dirty="0">
+                <a:solidFill>
+                  <a:srgbClr val="45464D"/>
+                </a:solidFill>
+                <a:latin typeface="Caveat Brush" pitchFamily="34" charset="0"/>
+                <a:ea typeface="Caveat Brush" pitchFamily="34" charset="-122"/>
+                <a:cs typeface="Caveat Brush" pitchFamily="34" charset="-120"/>
+              </a:rPr>
+              <a:t>Ikkinchi</a:t>
+            </a:r>
+            <a:endParaRPr lang="en-US" sz="1050" dirty="0"/>
+          </a:p>
+        </p:txBody>
+      </p:sp>
+      <p:sp>
+        <p:nvSpPr>
+          <p:cNvPr id="20" name="Shape 16"/>
+          <p:cNvSpPr/>
+          <p:nvPr/>
+        </p:nvSpPr>
+        <p:spPr>
+          <a:xfrm>
+            <a:off x="2875893" y="3311188"/>
+            <a:ext cx="2968866" cy="552450"/>
+          </a:xfrm>
+          <a:custGeom>
+            <a:avLst/>
+            <a:gdLst/>
+            <a:ahLst/>
+            <a:cxnLst/>
+            <a:rect l="l" t="t" r="r" b="b"/>
+            <a:pathLst>
+              <a:path w="2968866" h="552450">
+                <a:moveTo>
+                  <a:pt x="0" y="0"/>
+                </a:moveTo>
+                <a:lnTo>
+                  <a:pt x="2968866" y="0"/>
+                </a:lnTo>
+                <a:lnTo>
+                  <a:pt x="2968866" y="552450"/>
+                </a:lnTo>
+                <a:lnTo>
+                  <a:pt x="0" y="552450"/>
+                </a:lnTo>
+                <a:close/>
+              </a:path>
+            </a:pathLst>
+          </a:custGeom>
+          <a:solidFill>
+            <a:srgbClr val="FFFFFF">
+              <a:alpha val="0"/>
+            </a:srgbClr>
+          </a:solidFill>
+          <a:ln/>
+        </p:spPr>
+      </p:sp>
+      <p:sp>
+        <p:nvSpPr>
+          <p:cNvPr id="21" name="Text 17"/>
+          <p:cNvSpPr/>
+          <p:nvPr/>
+        </p:nvSpPr>
+        <p:spPr>
+          <a:xfrm>
+            <a:off x="2875893" y="3311188"/>
+            <a:ext cx="2968866" cy="552450"/>
+          </a:xfrm>
+          <a:prstGeom prst="rect">
+            <a:avLst/>
+          </a:prstGeom>
+          <a:noFill/>
+          <a:ln/>
+        </p:spPr>
+        <p:txBody>
+          <a:bodyPr wrap="square" rtlCol="0" anchor="t"/>
+          <a:lstStyle/>
+          <a:p>
+            <a:pPr indent="0" marL="0">
+              <a:spcBef>
+                <a:spcPts val="375"/>
+              </a:spcBef>
+              <a:buNone/>
+            </a:pPr>
+            <a:endParaRPr lang="en-US" sz="1050" dirty="0"/>
+          </a:p>
+        </p:txBody>
+      </p:sp>
+      <p:sp>
+        <p:nvSpPr>
+          <p:cNvPr id="22" name="Shape 18"/>
+          <p:cNvSpPr/>
+          <p:nvPr/>
+        </p:nvSpPr>
+        <p:spPr>
+          <a:xfrm>
+            <a:off x="2875893" y="3311188"/>
+            <a:ext cx="2968866" cy="552450"/>
+          </a:xfrm>
+          <a:custGeom>
+            <a:avLst/>
+            <a:gdLst/>
+            <a:ahLst/>
+            <a:cxnLst/>
+            <a:rect l="l" t="t" r="r" b="b"/>
+            <a:pathLst>
+              <a:path w="2968866" h="552450">
+                <a:moveTo>
+                  <a:pt x="0" y="0"/>
+                </a:moveTo>
+                <a:lnTo>
+                  <a:pt x="2968866" y="0"/>
+                </a:lnTo>
+                <a:lnTo>
+                  <a:pt x="2968866" y="552450"/>
+                </a:lnTo>
+                <a:lnTo>
+                  <a:pt x="0" y="552450"/>
+                </a:lnTo>
+                <a:close/>
+              </a:path>
+            </a:pathLst>
+          </a:custGeom>
+          <a:solidFill>
+            <a:srgbClr val="000000">
+              <a:alpha val="0"/>
+            </a:srgbClr>
+          </a:solidFill>
+          <a:ln/>
+        </p:spPr>
+      </p:sp>
+      <p:sp>
+        <p:nvSpPr>
+          <p:cNvPr id="23" name="Text 19"/>
+          <p:cNvSpPr/>
+          <p:nvPr/>
+        </p:nvSpPr>
+        <p:spPr>
+          <a:xfrm>
+            <a:off x="2875893" y="3311188"/>
+            <a:ext cx="2968866" cy="552450"/>
+          </a:xfrm>
+          <a:prstGeom prst="rect">
+            <a:avLst/>
+          </a:prstGeom>
+          <a:noFill/>
+          <a:ln/>
+        </p:spPr>
+        <p:txBody>
+          <a:bodyPr wrap="square" rtlCol="0" anchor="t"/>
+          <a:lstStyle/>
+          <a:p>
+            <a:pPr algn="ctr" indent="0" marL="0">
+              <a:spcBef>
+                <a:spcPts val="375"/>
+              </a:spcBef>
+              <a:buNone/>
+            </a:pPr>
+            <a:r>
+              <a:rPr lang="en-US" sz="1800" dirty="0">
+                <a:solidFill>
+                  <a:srgbClr val="45464D"/>
+                </a:solidFill>
+                <a:latin typeface="Caveat Brush" pitchFamily="34" charset="0"/>
+                <a:ea typeface="Caveat Brush" pitchFamily="34" charset="-122"/>
+                <a:cs typeface="Caveat Brush" pitchFamily="34" charset="-120"/>
+              </a:rPr>
+              <a:t>To'rtinchi</a:t>
+            </a:r>
+            <a:endParaRPr lang="en-US" sz="1050" dirty="0"/>
+          </a:p>
+        </p:txBody>
+      </p:sp>
+      <p:sp>
+        <p:nvSpPr>
+          <p:cNvPr id="24" name="Shape 20"/>
+          <p:cNvSpPr/>
+          <p:nvPr/>
+        </p:nvSpPr>
+        <p:spPr>
+          <a:xfrm>
+            <a:off x="705902" y="2176061"/>
+            <a:ext cx="1890959" cy="932710"/>
+          </a:xfrm>
+          <a:custGeom>
+            <a:avLst/>
+            <a:gdLst/>
+            <a:ahLst/>
+            <a:cxnLst/>
+            <a:rect l="l" t="t" r="r" b="b"/>
+            <a:pathLst>
+              <a:path w="1890959" h="932710">
+                <a:moveTo>
+                  <a:pt x="0" y="0"/>
+                </a:moveTo>
+                <a:lnTo>
+                  <a:pt x="1890959" y="0"/>
+                </a:lnTo>
+                <a:lnTo>
+                  <a:pt x="1890959" y="932710"/>
+                </a:lnTo>
+                <a:lnTo>
+                  <a:pt x="0" y="932710"/>
+                </a:lnTo>
+                <a:close/>
+              </a:path>
+            </a:pathLst>
+          </a:custGeom>
+          <a:solidFill>
+            <a:srgbClr val="FFFFFF">
+              <a:alpha val="0"/>
+            </a:srgbClr>
+          </a:solidFill>
+          <a:ln/>
+        </p:spPr>
+      </p:sp>
+      <p:sp>
+        <p:nvSpPr>
+          <p:cNvPr id="25" name="Text 21"/>
+          <p:cNvSpPr/>
+          <p:nvPr/>
+        </p:nvSpPr>
+        <p:spPr>
+          <a:xfrm>
+            <a:off x="705902" y="2176061"/>
+            <a:ext cx="1890959" cy="932710"/>
+          </a:xfrm>
+          <a:prstGeom prst="rect">
+            <a:avLst/>
+          </a:prstGeom>
+          <a:noFill/>
+          <a:ln/>
+        </p:spPr>
+        <p:txBody>
+          <a:bodyPr wrap="square" rtlCol="0" anchor="t"/>
+          <a:lstStyle/>
+          <a:p>
+            <a:pPr indent="0" marL="0">
+              <a:spcBef>
+                <a:spcPts val="375"/>
+              </a:spcBef>
+              <a:buNone/>
+            </a:pPr>
+            <a:endParaRPr lang="en-US" sz="1050" dirty="0"/>
+          </a:p>
+        </p:txBody>
+      </p:sp>
+      <p:sp>
+        <p:nvSpPr>
+          <p:cNvPr id="26" name="Shape 22"/>
+          <p:cNvSpPr/>
+          <p:nvPr/>
+        </p:nvSpPr>
+        <p:spPr>
+          <a:xfrm>
+            <a:off x="705902" y="2176061"/>
+            <a:ext cx="1890959" cy="932710"/>
+          </a:xfrm>
+          <a:custGeom>
+            <a:avLst/>
+            <a:gdLst/>
+            <a:ahLst/>
+            <a:cxnLst/>
+            <a:rect l="l" t="t" r="r" b="b"/>
+            <a:pathLst>
+              <a:path w="1890959" h="932710">
+                <a:moveTo>
+                  <a:pt x="0" y="0"/>
+                </a:moveTo>
+                <a:lnTo>
+                  <a:pt x="1890959" y="0"/>
+                </a:lnTo>
+                <a:lnTo>
+                  <a:pt x="1890959" y="932710"/>
+                </a:lnTo>
+                <a:lnTo>
+                  <a:pt x="0" y="932710"/>
+                </a:lnTo>
+                <a:close/>
+              </a:path>
+            </a:pathLst>
+          </a:custGeom>
+          <a:solidFill>
+            <a:srgbClr val="000000">
+              <a:alpha val="0"/>
+            </a:srgbClr>
+          </a:solidFill>
+          <a:ln/>
+        </p:spPr>
+      </p:sp>
+      <p:sp>
+        <p:nvSpPr>
+          <p:cNvPr id="27" name="Text 23"/>
+          <p:cNvSpPr/>
+          <p:nvPr/>
+        </p:nvSpPr>
+        <p:spPr>
+          <a:xfrm>
+            <a:off x="705902" y="2176061"/>
+            <a:ext cx="1890959" cy="932710"/>
           </a:xfrm>
           <a:prstGeom prst="rect">
             <a:avLst/>
@@ -10346,10 +10983,149 @@
                 <a:ea typeface="Nunito" pitchFamily="34" charset="-122"/>
                 <a:cs typeface="Nunito" pitchFamily="34" charset="-120"/>
               </a:rPr>
-              <a:t>Nerv tizimi o'smalari uchun davolash usullari ko'plab yondashuvlarni o'z ichiga oladi. Eng ommabop usullar qatoriga jarrohlik, radioterapiya va kimyoterapiya kiradi. Har bir usulning o'ziga xos afzalliklari va kamchiliklari mavjud. Jarrohlik asosan o'smani olib tashlashda qo'llaniladi. Radioterapiya o'sma hujayralarini yo'q qilish uchun yuqori energiyali nurlarni ishlatadi. Kimyoterapiya esa dori vositalarini qo'llab, o'sma hujayralarining o'sishini to'xtatishga yordam beradi. Har bir bemor uchun eng mos davolash rejasi individual ravishda belgilanadi.</a:t>
+              <a:t>Davolash usullari turli muammolar uchun ishlab chiqilgan. Har bir usulning o'ziga xos afzalliklari bor.</a:t>
             </a:r>
             <a:endParaRPr lang="en-US" sz="1050" dirty="0"/>
           </a:p>
+        </p:txBody>
+      </p:sp>
+      <p:sp>
+        <p:nvSpPr>
+          <p:cNvPr id="28" name="Shape 24"/>
+          <p:cNvSpPr/>
+          <p:nvPr/>
+        </p:nvSpPr>
+        <p:spPr>
+          <a:xfrm>
+            <a:off x="705902" y="3917979"/>
+            <a:ext cx="1713750" cy="1225521"/>
+          </a:xfrm>
+          <a:custGeom>
+            <a:avLst/>
+            <a:gdLst/>
+            <a:ahLst/>
+            <a:cxnLst/>
+            <a:rect l="l" t="t" r="r" b="b"/>
+            <a:pathLst>
+              <a:path w="1713750" h="1225521">
+                <a:moveTo>
+                  <a:pt x="0" y="0"/>
+                </a:moveTo>
+                <a:lnTo>
+                  <a:pt x="1713750" y="0"/>
+                </a:lnTo>
+                <a:lnTo>
+                  <a:pt x="1713750" y="1225521"/>
+                </a:lnTo>
+                <a:lnTo>
+                  <a:pt x="0" y="1225521"/>
+                </a:lnTo>
+                <a:close/>
+              </a:path>
+            </a:pathLst>
+          </a:custGeom>
+          <a:solidFill>
+            <a:srgbClr val="FFFFFF">
+              <a:alpha val="0"/>
+            </a:srgbClr>
+          </a:solidFill>
+          <a:ln/>
+        </p:spPr>
+      </p:sp>
+      <p:sp>
+        <p:nvSpPr>
+          <p:cNvPr id="29" name="Text 25"/>
+          <p:cNvSpPr/>
+          <p:nvPr/>
+        </p:nvSpPr>
+        <p:spPr>
+          <a:xfrm>
+            <a:off x="705902" y="3917979"/>
+            <a:ext cx="1713750" cy="1225521"/>
+          </a:xfrm>
+          <a:prstGeom prst="rect">
+            <a:avLst/>
+          </a:prstGeom>
+          <a:noFill/>
+          <a:ln/>
+        </p:spPr>
+        <p:txBody>
+          <a:bodyPr wrap="square" rtlCol="0" anchor="t"/>
+          <a:lstStyle/>
+          <a:p>
+            <a:pPr indent="0" marL="0">
+              <a:spcBef>
+                <a:spcPts val="375"/>
+              </a:spcBef>
+              <a:buNone/>
+            </a:pPr>
+            <a:endParaRPr lang="en-US" sz="1050" dirty="0"/>
+          </a:p>
+        </p:txBody>
+      </p:sp>
+      <p:sp>
+        <p:nvSpPr>
+          <p:cNvPr id="30" name="Shape 26"/>
+          <p:cNvSpPr/>
+          <p:nvPr/>
+        </p:nvSpPr>
+        <p:spPr>
+          <a:xfrm>
+            <a:off x="705902" y="3917979"/>
+            <a:ext cx="1713750" cy="1225521"/>
+          </a:xfrm>
+          <a:custGeom>
+            <a:avLst/>
+            <a:gdLst/>
+            <a:ahLst/>
+            <a:cxnLst/>
+            <a:rect l="l" t="t" r="r" b="b"/>
+            <a:pathLst>
+              <a:path w="1713750" h="1225521">
+                <a:moveTo>
+                  <a:pt x="0" y="0"/>
+                </a:moveTo>
+                <a:lnTo>
+                  <a:pt x="1713750" y="0"/>
+                </a:lnTo>
+                <a:lnTo>
+                  <a:pt x="1713750" y="1225521"/>
+                </a:lnTo>
+                <a:lnTo>
+                  <a:pt x="0" y="1225521"/>
+                </a:lnTo>
+                <a:close/>
+              </a:path>
+            </a:pathLst>
+          </a:custGeom>
+          <a:solidFill>
+            <a:srgbClr val="000000">
+              <a:alpha val="0"/>
+            </a:srgbClr>
+          </a:solidFill>
+          <a:ln/>
+        </p:spPr>
+      </p:sp>
+      <p:sp>
+        <p:nvSpPr>
+          <p:cNvPr id="31" name="Text 27"/>
+          <p:cNvSpPr/>
+          <p:nvPr/>
+        </p:nvSpPr>
+        <p:spPr>
+          <a:xfrm>
+            <a:off x="705902" y="3917979"/>
+            <a:ext cx="1713750" cy="1225521"/>
+          </a:xfrm>
+          <a:prstGeom prst="rect">
+            <a:avLst/>
+          </a:prstGeom>
+          <a:noFill/>
+          <a:ln/>
+        </p:spPr>
+        <p:txBody>
+          <a:bodyPr wrap="square" rtlCol="0" anchor="t"/>
+          <a:lstStyle/>
           <a:p>
             <a:pPr algn="l" indent="0" marL="0">
               <a:spcBef>
@@ -10358,18 +11134,157 @@
               <a:buNone/>
             </a:pPr>
             <a:r>
-              <a:rPr lang="en-US" sz="1800" dirty="0">
+              <a:rPr lang="en-US" sz="975" dirty="0">
                 <a:solidFill>
-                  <a:srgbClr val="333333"/>
+                  <a:srgbClr val="000000"/>
                 </a:solidFill>
-                <a:latin typeface="Calibri" pitchFamily="34" charset="0"/>
-                <a:ea typeface="Calibri" pitchFamily="34" charset="-122"/>
-                <a:cs typeface="Calibri" pitchFamily="34" charset="-120"/>
+                <a:latin typeface="Nunito" pitchFamily="34" charset="0"/>
+                <a:ea typeface="Nunito" pitchFamily="34" charset="-122"/>
+                <a:cs typeface="Nunito" pitchFamily="34" charset="-120"/>
               </a:rPr>
-              <a:t> </a:t>
+              <a:t>Ushbu usullar sog'liqni yaxshilashga, kasalliklarni oldini olishga yordam beradi. Har bir usul individual yondashuvni talab qiladi.</a:t>
             </a:r>
             <a:endParaRPr lang="en-US" sz="1050" dirty="0"/>
           </a:p>
+        </p:txBody>
+      </p:sp>
+      <p:sp>
+        <p:nvSpPr>
+          <p:cNvPr id="32" name="Shape 28"/>
+          <p:cNvSpPr/>
+          <p:nvPr/>
+        </p:nvSpPr>
+        <p:spPr>
+          <a:xfrm>
+            <a:off x="3532953" y="3917979"/>
+            <a:ext cx="1926401" cy="1225521"/>
+          </a:xfrm>
+          <a:custGeom>
+            <a:avLst/>
+            <a:gdLst/>
+            <a:ahLst/>
+            <a:cxnLst/>
+            <a:rect l="l" t="t" r="r" b="b"/>
+            <a:pathLst>
+              <a:path w="1926401" h="1225521">
+                <a:moveTo>
+                  <a:pt x="0" y="0"/>
+                </a:moveTo>
+                <a:lnTo>
+                  <a:pt x="1926401" y="0"/>
+                </a:lnTo>
+                <a:lnTo>
+                  <a:pt x="1926401" y="1225521"/>
+                </a:lnTo>
+                <a:lnTo>
+                  <a:pt x="0" y="1225521"/>
+                </a:lnTo>
+                <a:close/>
+              </a:path>
+            </a:pathLst>
+          </a:custGeom>
+          <a:solidFill>
+            <a:srgbClr val="FFFFFF">
+              <a:alpha val="0"/>
+            </a:srgbClr>
+          </a:solidFill>
+          <a:ln/>
+        </p:spPr>
+      </p:sp>
+      <p:sp>
+        <p:nvSpPr>
+          <p:cNvPr id="33" name="Text 29"/>
+          <p:cNvSpPr/>
+          <p:nvPr/>
+        </p:nvSpPr>
+        <p:spPr>
+          <a:xfrm>
+            <a:off x="3532953" y="3917979"/>
+            <a:ext cx="1926401" cy="1225521"/>
+          </a:xfrm>
+          <a:prstGeom prst="rect">
+            <a:avLst/>
+          </a:prstGeom>
+          <a:noFill/>
+          <a:ln/>
+        </p:spPr>
+        <p:txBody>
+          <a:bodyPr wrap="square" rtlCol="0" anchor="t"/>
+          <a:lstStyle/>
+          <a:p>
+            <a:pPr indent="0" marL="0">
+              <a:spcBef>
+                <a:spcPts val="375"/>
+              </a:spcBef>
+              <a:buNone/>
+            </a:pPr>
+            <a:endParaRPr lang="en-US" sz="1050" dirty="0"/>
+          </a:p>
+        </p:txBody>
+      </p:sp>
+      <p:sp>
+        <p:nvSpPr>
+          <p:cNvPr id="34" name="Shape 30"/>
+          <p:cNvSpPr/>
+          <p:nvPr/>
+        </p:nvSpPr>
+        <p:spPr>
+          <a:xfrm>
+            <a:off x="3532953" y="3917979"/>
+            <a:ext cx="1926401" cy="1225521"/>
+          </a:xfrm>
+          <a:custGeom>
+            <a:avLst/>
+            <a:gdLst/>
+            <a:ahLst/>
+            <a:cxnLst/>
+            <a:rect l="l" t="t" r="r" b="b"/>
+            <a:pathLst>
+              <a:path w="1926401" h="1225521">
+                <a:moveTo>
+                  <a:pt x="0" y="0"/>
+                </a:moveTo>
+                <a:lnTo>
+                  <a:pt x="1926401" y="0"/>
+                </a:lnTo>
+                <a:lnTo>
+                  <a:pt x="1926401" y="1225521"/>
+                </a:lnTo>
+                <a:lnTo>
+                  <a:pt x="0" y="1225521"/>
+                </a:lnTo>
+                <a:close/>
+              </a:path>
+            </a:pathLst>
+          </a:custGeom>
+          <a:solidFill>
+            <a:srgbClr val="000000">
+              <a:alpha val="0"/>
+            </a:srgbClr>
+          </a:solidFill>
+          <a:ln/>
+        </p:spPr>
+      </p:sp>
+      <p:sp>
+        <p:nvSpPr>
+          <p:cNvPr id="35" name="Text 31"/>
+          <p:cNvSpPr/>
+          <p:nvPr/>
+        </p:nvSpPr>
+        <p:spPr>
+          <a:xfrm>
+            <a:off x="3532953" y="3917979"/>
+            <a:ext cx="1926401" cy="1225521"/>
+          </a:xfrm>
+          <a:prstGeom prst="rect">
+            <a:avLst/>
+          </a:prstGeom>
+          <a:noFill/>
+          <a:ln/>
+        </p:spPr>
+        <p:txBody>
+          <a:bodyPr wrap="square" rtlCol="0" anchor="t"/>
+          <a:lstStyle/>
           <a:p>
             <a:pPr algn="l" indent="0" marL="0">
               <a:spcBef>
@@ -10378,15 +11293,333 @@
               <a:buNone/>
             </a:pPr>
             <a:r>
-              <a:rPr lang="en-US" sz="1800" dirty="0">
+              <a:rPr lang="en-US" sz="975" dirty="0">
+                <a:solidFill>
+                  <a:srgbClr val="000000"/>
+                </a:solidFill>
+                <a:latin typeface="Nunito" pitchFamily="34" charset="0"/>
+                <a:ea typeface="Nunito" pitchFamily="34" charset="-122"/>
+                <a:cs typeface="Nunito" pitchFamily="34" charset="-120"/>
+              </a:rPr>
+              <a:t>Yuqori samarali davolash usullari bilan zamonaviy tibbiyot o'zining imkoniyatlarini kengaytirmoqda. Yangiliklar va tadqiqotlar doimiy ravishda davom etmoqda.</a:t>
+            </a:r>
+            <a:endParaRPr lang="en-US" sz="1050" dirty="0"/>
+          </a:p>
+        </p:txBody>
+      </p:sp>
+      <p:sp>
+        <p:nvSpPr>
+          <p:cNvPr id="36" name="Shape 32"/>
+          <p:cNvSpPr/>
+          <p:nvPr/>
+        </p:nvSpPr>
+        <p:spPr>
+          <a:xfrm>
+            <a:off x="3473884" y="2053192"/>
+            <a:ext cx="2079983" cy="866556"/>
+          </a:xfrm>
+          <a:custGeom>
+            <a:avLst/>
+            <a:gdLst/>
+            <a:ahLst/>
+            <a:cxnLst/>
+            <a:rect l="l" t="t" r="r" b="b"/>
+            <a:pathLst>
+              <a:path w="2079983" h="866556">
+                <a:moveTo>
+                  <a:pt x="0" y="0"/>
+                </a:moveTo>
+                <a:lnTo>
+                  <a:pt x="2079983" y="0"/>
+                </a:lnTo>
+                <a:lnTo>
+                  <a:pt x="2079983" y="866556"/>
+                </a:lnTo>
+                <a:lnTo>
+                  <a:pt x="0" y="866556"/>
+                </a:lnTo>
+                <a:close/>
+              </a:path>
+            </a:pathLst>
+          </a:custGeom>
+          <a:solidFill>
+            <a:srgbClr val="FFFFFF">
+              <a:alpha val="0"/>
+            </a:srgbClr>
+          </a:solidFill>
+          <a:ln/>
+        </p:spPr>
+      </p:sp>
+      <p:sp>
+        <p:nvSpPr>
+          <p:cNvPr id="37" name="Text 33"/>
+          <p:cNvSpPr/>
+          <p:nvPr/>
+        </p:nvSpPr>
+        <p:spPr>
+          <a:xfrm>
+            <a:off x="3473884" y="2053192"/>
+            <a:ext cx="2079983" cy="866556"/>
+          </a:xfrm>
+          <a:prstGeom prst="rect">
+            <a:avLst/>
+          </a:prstGeom>
+          <a:noFill/>
+          <a:ln/>
+        </p:spPr>
+        <p:txBody>
+          <a:bodyPr wrap="square" rtlCol="0" anchor="t"/>
+          <a:lstStyle/>
+          <a:p>
+            <a:pPr indent="0" marL="0">
+              <a:spcBef>
+                <a:spcPts val="375"/>
+              </a:spcBef>
+              <a:buNone/>
+            </a:pPr>
+            <a:endParaRPr lang="en-US" sz="1050" dirty="0"/>
+          </a:p>
+        </p:txBody>
+      </p:sp>
+      <p:sp>
+        <p:nvSpPr>
+          <p:cNvPr id="38" name="Shape 34"/>
+          <p:cNvSpPr/>
+          <p:nvPr/>
+        </p:nvSpPr>
+        <p:spPr>
+          <a:xfrm>
+            <a:off x="3473884" y="2053192"/>
+            <a:ext cx="2079983" cy="866556"/>
+          </a:xfrm>
+          <a:custGeom>
+            <a:avLst/>
+            <a:gdLst/>
+            <a:ahLst/>
+            <a:cxnLst/>
+            <a:rect l="l" t="t" r="r" b="b"/>
+            <a:pathLst>
+              <a:path w="2079983" h="866556">
+                <a:moveTo>
+                  <a:pt x="0" y="0"/>
+                </a:moveTo>
+                <a:lnTo>
+                  <a:pt x="2079983" y="0"/>
+                </a:lnTo>
+                <a:lnTo>
+                  <a:pt x="2079983" y="866556"/>
+                </a:lnTo>
+                <a:lnTo>
+                  <a:pt x="0" y="866556"/>
+                </a:lnTo>
+                <a:close/>
+              </a:path>
+            </a:pathLst>
+          </a:custGeom>
+          <a:solidFill>
+            <a:srgbClr val="000000">
+              <a:alpha val="0"/>
+            </a:srgbClr>
+          </a:solidFill>
+          <a:ln/>
+        </p:spPr>
+      </p:sp>
+      <p:sp>
+        <p:nvSpPr>
+          <p:cNvPr id="39" name="Text 35"/>
+          <p:cNvSpPr/>
+          <p:nvPr/>
+        </p:nvSpPr>
+        <p:spPr>
+          <a:xfrm>
+            <a:off x="3473884" y="2053192"/>
+            <a:ext cx="2079983" cy="866556"/>
+          </a:xfrm>
+          <a:prstGeom prst="rect">
+            <a:avLst/>
+          </a:prstGeom>
+          <a:noFill/>
+          <a:ln/>
+        </p:spPr>
+        <p:txBody>
+          <a:bodyPr wrap="square" rtlCol="0" anchor="t"/>
+          <a:lstStyle/>
+          <a:p>
+            <a:pPr algn="l" indent="0" marL="0">
+              <a:spcBef>
+                <a:spcPts val="375"/>
+              </a:spcBef>
+              <a:buNone/>
+            </a:pPr>
+            <a:r>
+              <a:rPr lang="en-US" sz="975" dirty="0">
+                <a:solidFill>
+                  <a:srgbClr val="000000"/>
+                </a:solidFill>
+                <a:latin typeface="Nunito" pitchFamily="34" charset="0"/>
+                <a:ea typeface="Nunito" pitchFamily="34" charset="-122"/>
+                <a:cs typeface="Nunito" pitchFamily="34" charset="-120"/>
+              </a:rPr>
+              <a:t>Davolash jarayonida bemorlarning individual xususiyatlarini hisobga olish muhimdir. Har bir bemorning holati alohida baholanadi.</a:t>
+            </a:r>
+            <a:endParaRPr lang="en-US" sz="1050" dirty="0"/>
+          </a:p>
+        </p:txBody>
+      </p:sp>
+      <p:sp>
+        <p:nvSpPr>
+          <p:cNvPr id="40" name="Shape 36"/>
+          <p:cNvSpPr/>
+          <p:nvPr/>
+        </p:nvSpPr>
+        <p:spPr>
+          <a:xfrm>
+            <a:off x="0" y="0"/>
+            <a:ext cx="2857500" cy="238125"/>
+          </a:xfrm>
+          <a:custGeom>
+            <a:avLst/>
+            <a:gdLst/>
+            <a:ahLst/>
+            <a:cxnLst/>
+            <a:rect l="l" t="t" r="r" b="b"/>
+            <a:pathLst>
+              <a:path w="2857500" h="238125">
+                <a:moveTo>
+                  <a:pt x="0" y="0"/>
+                </a:moveTo>
+                <a:lnTo>
+                  <a:pt x="2857500" y="0"/>
+                </a:lnTo>
+                <a:lnTo>
+                  <a:pt x="2857500" y="238125"/>
+                </a:lnTo>
+                <a:lnTo>
+                  <a:pt x="0" y="238125"/>
+                </a:lnTo>
+                <a:close/>
+              </a:path>
+            </a:pathLst>
+          </a:custGeom>
+          <a:solidFill>
+            <a:srgbClr val="FFFFFF">
+              <a:alpha val="0"/>
+            </a:srgbClr>
+          </a:solidFill>
+          <a:ln/>
+        </p:spPr>
+      </p:sp>
+      <p:sp>
+        <p:nvSpPr>
+          <p:cNvPr id="41" name="Text 37"/>
+          <p:cNvSpPr/>
+          <p:nvPr/>
+        </p:nvSpPr>
+        <p:spPr>
+          <a:xfrm>
+            <a:off x="0" y="0"/>
+            <a:ext cx="2857500" cy="238125"/>
+          </a:xfrm>
+          <a:prstGeom prst="rect">
+            <a:avLst/>
+          </a:prstGeom>
+          <a:noFill/>
+          <a:ln/>
+        </p:spPr>
+        <p:txBody>
+          <a:bodyPr wrap="square" rtlCol="0" anchor="t"/>
+          <a:lstStyle/>
+          <a:p>
+            <a:pPr indent="0" marL="0">
+              <a:spcBef>
+                <a:spcPts val="375"/>
+              </a:spcBef>
+              <a:buNone/>
+            </a:pPr>
+            <a:endParaRPr lang="en-US" sz="1050" dirty="0"/>
+          </a:p>
+        </p:txBody>
+      </p:sp>
+      <p:sp>
+        <p:nvSpPr>
+          <p:cNvPr id="42" name="Shape 38"/>
+          <p:cNvSpPr/>
+          <p:nvPr/>
+        </p:nvSpPr>
+        <p:spPr>
+          <a:xfrm>
+            <a:off x="0" y="0"/>
+            <a:ext cx="2857500" cy="238125"/>
+          </a:xfrm>
+          <a:custGeom>
+            <a:avLst/>
+            <a:gdLst/>
+            <a:ahLst/>
+            <a:cxnLst/>
+            <a:rect l="l" t="t" r="r" b="b"/>
+            <a:pathLst>
+              <a:path w="2857500" h="238125">
+                <a:moveTo>
+                  <a:pt x="0" y="0"/>
+                </a:moveTo>
+                <a:lnTo>
+                  <a:pt x="2857500" y="0"/>
+                </a:lnTo>
+                <a:lnTo>
+                  <a:pt x="2857500" y="238125"/>
+                </a:lnTo>
+                <a:lnTo>
+                  <a:pt x="0" y="238125"/>
+                </a:lnTo>
+                <a:close/>
+              </a:path>
+            </a:pathLst>
+          </a:custGeom>
+          <a:solidFill>
+            <a:srgbClr val="000000">
+              <a:alpha val="0"/>
+            </a:srgbClr>
+          </a:solidFill>
+          <a:ln/>
+        </p:spPr>
+      </p:sp>
+      <p:sp>
+        <p:nvSpPr>
+          <p:cNvPr id="43" name="Text 39"/>
+          <p:cNvSpPr/>
+          <p:nvPr/>
+        </p:nvSpPr>
+        <p:spPr>
+          <a:xfrm>
+            <a:off x="0" y="0"/>
+            <a:ext cx="2857500" cy="238125"/>
+          </a:xfrm>
+          <a:prstGeom prst="rect">
+            <a:avLst/>
+          </a:prstGeom>
+          <a:noFill/>
+          <a:ln/>
+        </p:spPr>
+        <p:txBody>
+          <a:bodyPr wrap="square" rtlCol="0" anchor="t"/>
+          <a:lstStyle/>
+          <a:p>
+            <a:pPr algn="l" indent="0" marL="0">
+              <a:spcBef>
+                <a:spcPts val="375"/>
+              </a:spcBef>
+              <a:buNone/>
+            </a:pPr>
+            <a:r>
+              <a:rPr lang="en-US" sz="600" dirty="0">
                 <a:solidFill>
                   <a:srgbClr val="333333"/>
                 </a:solidFill>
-                <a:latin typeface="Calibri" pitchFamily="34" charset="0"/>
-                <a:ea typeface="Calibri" pitchFamily="34" charset="-122"/>
-                <a:cs typeface="Calibri" pitchFamily="34" charset="-120"/>
+                <a:latin typeface="微软雅黑" pitchFamily="34" charset="0"/>
+                <a:ea typeface="微软雅黑" pitchFamily="34" charset="-122"/>
+                <a:cs typeface="微软雅黑" pitchFamily="34" charset="-120"/>
               </a:rPr>
-              <a:t> </a:t>
+              <a:t>Davolash usullarining xilma-xilligi</a:t>
             </a:r>
             <a:endParaRPr lang="en-US" sz="1050" dirty="0"/>
           </a:p>
@@ -10426,7 +11659,7 @@
       </p:grpSpPr>
       <p:pic>
         <p:nvPicPr>
-          <p:cNvPr id="2" name="Image 0" descr="./images\slide14_img117.png">    </p:cNvPr>
+          <p:cNvPr id="2" name="Image 0" descr="https://oefen.uz/data/documents/b3ac6fa9-d4bc-44f3-b7ff-4f025a47a2c4/page_7.png">    </p:cNvPr>
           <p:cNvPicPr>
             <a:picLocks noChangeAspect="1"/>
           </p:cNvPicPr>
@@ -11038,7 +12271,7 @@
                 <a:ea typeface="Caveat Brush" pitchFamily="34" charset="-122"/>
                 <a:cs typeface="Caveat Brush" pitchFamily="34" charset="-120"/>
               </a:rPr>
-              <a:t>Nerv tizimi o'smalari davolash</a:t>
+              <a:t>Tadqiqot va Statistika</a:t>
             </a:r>
             <a:endParaRPr lang="en-US" sz="1050" dirty="0"/>
           </a:p>
@@ -11197,7 +12430,7 @@
                 <a:ea typeface="Caveat Brush" pitchFamily="34" charset="-122"/>
                 <a:cs typeface="Caveat Brush" pitchFamily="34" charset="-120"/>
               </a:rPr>
-              <a:t>Birinchi</a:t>
+              <a:t>Asosiy</a:t>
             </a:r>
             <a:endParaRPr lang="en-US" sz="1050" dirty="0"/>
           </a:p>
@@ -11356,7 +12589,7 @@
                 <a:ea typeface="Caveat Brush" pitchFamily="34" charset="-122"/>
                 <a:cs typeface="Caveat Brush" pitchFamily="34" charset="-120"/>
               </a:rPr>
-              <a:t>Ikkinchi</a:t>
+              <a:t>Tahlil</a:t>
             </a:r>
             <a:endParaRPr lang="en-US" sz="1050" dirty="0"/>
           </a:p>
@@ -11515,7 +12748,7 @@
                 <a:ea typeface="Caveat Brush" pitchFamily="34" charset="-122"/>
                 <a:cs typeface="Caveat Brush" pitchFamily="34" charset="-120"/>
               </a:rPr>
-              <a:t>Uchinchi</a:t>
+              <a:t>Natijalar</a:t>
             </a:r>
             <a:endParaRPr lang="en-US" sz="1050" dirty="0"/>
           </a:p>
@@ -11674,7 +12907,7 @@
                 <a:ea typeface="Nunito" pitchFamily="34" charset="-122"/>
                 <a:cs typeface="Nunito" pitchFamily="34" charset="-120"/>
               </a:rPr>
-              <a:t>Nerv tizimi o'smalarini davolashda dastlabki bosqichda kasallikni aniqlash juda muhimdir. O'sma turlari va ularning joylashuvi muhim rol o'ynaydi. Davolash usullari o'smaning xususiyatlariga qarab tanlanadi. Har bir bemor uchun individual yondashuv zarur.</a:t>
+              <a:t>Tadqiqot jarayoni statistik ma'lumotlarni to'plash, tahlil qilish va natijalarni sharhlashdan iborat. Bu jarayonlar ilmiy tadqiqotlarda muhim ahamiyatga ega.</a:t>
             </a:r>
             <a:endParaRPr lang="en-US" sz="1050" dirty="0"/>
           </a:p>
@@ -11833,7 +13066,7 @@
                 <a:ea typeface="Nunito" pitchFamily="34" charset="-122"/>
                 <a:cs typeface="Nunito" pitchFamily="34" charset="-120"/>
               </a:rPr>
-              <a:t>Asosiy davolash usullari: jarrohlik, radioterapiya va kemoterapiya. Ularning har biri o'zining afzalliklari va kamchiliklariga ega. Davolash strategiyasi o'smaning rivojlanish bosqichiga qarab belgilanadi. Tegishli mutaxassislar bilan maslahatlashish muhimdir.</a:t>
+              <a:t>Statistika, ma'lumotlarni sanash va tasniflash usuli bo'lib, u tadqiqot natijalarini ishonchli va aniq ko'rsatadi. Bu soha turli fanlarda qo'llaniladi.</a:t>
             </a:r>
             <a:endParaRPr lang="en-US" sz="1050" dirty="0"/>
           </a:p>
@@ -11992,7 +13225,7 @@
                 <a:ea typeface="Nunito" pitchFamily="34" charset="-122"/>
                 <a:cs typeface="Nunito" pitchFamily="34" charset="-120"/>
               </a:rPr>
-              <a:t>O'smalarni davolashda qo'shimcha terapiyalardan ham foydalaniladi. Masalan, immunoterapiya yoki maqsadli terapiyalar. Ushbu usullar o'sma hujayralarining o'sishini to'xtatishga yordam beradi. Barcha davolash usullari mutaxassislar tomonidan nazorat qilinishi lozim.</a:t>
+              <a:t>Tadqiqot va statistika jarayoni muammoni aniqlashdan boshlanadi, so'ngra ma'lumot to'planadi va tahlil qilinadi, natijalar esa qaror qabul qilishda qo'llaniladi.</a:t>
             </a:r>
             <a:endParaRPr lang="en-US" sz="1050" dirty="0"/>
           </a:p>
@@ -12056,7 +13289,7 @@
       </p:grpSpPr>
       <p:pic>
         <p:nvPicPr>
-          <p:cNvPr id="2" name="Image 0" descr="./images\slide15_img124.png">    </p:cNvPr>
+          <p:cNvPr id="2" name="Image 0" descr="https://arxiv.uz/data/documents/328c577a-4ec7-4e55-a2bc-9010d440670b/page-4.png">    </p:cNvPr>
           <p:cNvPicPr>
             <a:picLocks noChangeAspect="1"/>
           </p:cNvPicPr>
@@ -12413,7 +13646,7 @@
                 <a:ea typeface="Nunito" pitchFamily="34" charset="-122"/>
                 <a:cs typeface="Nunito" pitchFamily="34" charset="-120"/>
               </a:rPr>
-              <a:t>Nerv tizimi o'smalari, asab tizimining turli qismlarida rivojlanadigan benign yoki malignant o'smalardir. Ushbu o'smalar asab hujayralaridan, myelindan yoki glial hujayralardan paydo bo'lishi mumkin. O'smalarning belgilari keng qamrovli bo'lib, bosh og'rig'i, muvofiqlikni boshqarishdagi qiyinchilik, his-tuyg'u o'zgarishlari va boshqa nevrologik simptomlar orqali namoyon bo'lishi mumkin. Diagnostika asosan MRI, CT skanerlash va biopsiya yordamida amalga oshiriladi. Davolash usullari esa jarrohlik, radioterapiya va kimyoterapiyani o'z ichiga oladi. O'smalarning tipiga ko'ra, davolash strategiyalari har xil bo'ladi va har bir bemorda individual yondashuv talab etiladi.</a:t>
+              <a:t>Nerv tizimi o'smalari - bu asab tizimidagi o'smalar bo'lib, ular turli xil shakl va o'lchamda bo'lishi mumkin. Ushbu o'smalar ma'lum bir joyda to'planishi yoki tarqalishi mumkin. Ularning diagnostikasi uchun kompyuter tomografiyasi va magnet-rezonans tomografiyasi kabi tasvirlash usullari qo'llaniladi. Davolash usullari, odatda, xirurgik aralashuv, kimyoviy terapiya va radiatsiya terapiyasini o'z ichiga oladi. Nerv tizimi o'smalari rivojlantirish sabablari aniq emas, ammo genetik omillar va atrof-muhit ta'siri rol o'ynashi mumkin. Malakali tibbiy yordamga murojaat qilish va erta aniqlash juda muhimdir.</a:t>
             </a:r>
             <a:endParaRPr lang="en-US" sz="1050" dirty="0"/>
           </a:p>
@@ -13058,7 +14291,7 @@
                 <a:ea typeface="微软雅黑" pitchFamily="34" charset="-122"/>
                 <a:cs typeface="微软雅黑" pitchFamily="34" charset="-120"/>
               </a:rPr>
-              <a:t>1. Abdullayev A. A., Mirzaev R. M. Nerv tizimi o'smalari va ularning davolash usullari. 2020. Tibbiyot nashrlari.2. krijanov S. Y., Shabanov A. R. Nerv tizimi o'smalari kasalliklari. 2019. O'zbekiston Tibbiyot Akademiyasi.3. Nurmurodova Z. U. Asab tizimi va o'smalari: Xavflar va oldini olish. 2021. Noshirlar engraving.4. Qodirov I. S., Mullaev O. F. Onkologiya asoslari. Nerv tizimidagi o'smalar. 2018. Tibbiyot ilmiy jurnali.5. Turg'unov Sh. Kh. Asab tizimidagi o'smalar va ularni aniq tadqiq qilish. 2022. O'zbekiston Fanlar Akademiyasi.</a:t>
+              <a:t>1. Azizov D., Sharipov Z. "Nerv tizimi o'smalari: patologiya va davolash jarayoni". 2021, Tibbiyot nashr.</a:t>
             </a:r>
             <a:endParaRPr lang="en-US" sz="1050" dirty="0"/>
           </a:p>
